--- a/docs/THUYET_TRINH_COOKING_NOTE.pptx
+++ b/docs/THUYET_TRINH_COOKING_NOTE.pptx
@@ -5,23 +5,24 @@
     <p:sldMasterId id="2147483648" r:id="rId1"/>
   </p:sldMasterIdLst>
   <p:sldIdLst>
-    <p:sldId id="256" r:id="rId7"/>
-    <p:sldId id="257" r:id="rId8"/>
-    <p:sldId id="258" r:id="rId9"/>
-    <p:sldId id="259" r:id="rId10"/>
-    <p:sldId id="260" r:id="rId11"/>
-    <p:sldId id="261" r:id="rId12"/>
-    <p:sldId id="262" r:id="rId13"/>
-    <p:sldId id="263" r:id="rId14"/>
-    <p:sldId id="264" r:id="rId15"/>
-    <p:sldId id="265" r:id="rId16"/>
-    <p:sldId id="266" r:id="rId17"/>
-    <p:sldId id="267" r:id="rId18"/>
-    <p:sldId id="268" r:id="rId19"/>
-    <p:sldId id="269" r:id="rId20"/>
-    <p:sldId id="270" r:id="rId21"/>
+    <p:sldId id="256" r:id="rId2"/>
+    <p:sldId id="271" r:id="rId3"/>
+    <p:sldId id="257" r:id="rId4"/>
+    <p:sldId id="258" r:id="rId5"/>
+    <p:sldId id="259" r:id="rId6"/>
+    <p:sldId id="260" r:id="rId7"/>
+    <p:sldId id="261" r:id="rId8"/>
+    <p:sldId id="262" r:id="rId9"/>
+    <p:sldId id="263" r:id="rId10"/>
+    <p:sldId id="264" r:id="rId11"/>
+    <p:sldId id="265" r:id="rId12"/>
+    <p:sldId id="266" r:id="rId13"/>
+    <p:sldId id="267" r:id="rId14"/>
+    <p:sldId id="268" r:id="rId15"/>
+    <p:sldId id="269" r:id="rId16"/>
+    <p:sldId id="270" r:id="rId17"/>
   </p:sldIdLst>
-  <p:sldSz cx="12191695" cy="6858000" type="screen4x3"/>
+  <p:sldSz cx="12192000" cy="6858000"/>
   <p:notesSz cx="6858000" cy="9144000"/>
   <p:defaultTextStyle>
     <a:defPPr>
@@ -118,6 +119,22 @@
       </a:defRPr>
     </a:lvl9pPr>
   </p:defaultTextStyle>
+  <p:extLst>
+    <p:ext uri="{EFAFB233-063F-42B5-8137-9DF3F51BA10A}">
+      <p15:sldGuideLst xmlns:p15="http://schemas.microsoft.com/office/powerpoint/2012/main">
+        <p15:guide id="1" orient="horz" pos="2160">
+          <p15:clr>
+            <a:srgbClr val="A4A3A4"/>
+          </p15:clr>
+        </p15:guide>
+        <p15:guide id="2" pos="2880">
+          <p15:clr>
+            <a:srgbClr val="A4A3A4"/>
+          </p15:clr>
+        </p15:guide>
+      </p15:sldGuideLst>
+    </p:ext>
+  </p:extLst>
 </p:presentation>
 </file>
 
@@ -159,10 +176,9 @@
           <a:lstStyle/>
           <a:p>
             <a:r>
-              <a:rPr lang="en-US" smtClean="0"/>
+              <a:rPr lang="en-US"/>
               <a:t>Click to edit Master title style</a:t>
             </a:r>
-            <a:endParaRPr lang="en-US"/>
           </a:p>
         </p:txBody>
       </p:sp>
@@ -278,10 +294,9 @@
           </a:lstStyle>
           <a:p>
             <a:r>
-              <a:rPr lang="en-US" smtClean="0"/>
+              <a:rPr lang="en-US"/>
               <a:t>Click to edit Master subtitle style</a:t>
             </a:r>
-            <a:endParaRPr lang="en-US"/>
           </a:p>
         </p:txBody>
       </p:sp>
@@ -302,7 +317,7 @@
           <a:p>
             <a:fld id="{5BCAD085-E8A6-8845-BD4E-CB4CCA059FC4}" type="datetimeFigureOut">
               <a:rPr lang="en-US" smtClean="0"/>
-              <a:t>1/27/13</a:t>
+              <a:t>9/16/2026</a:t>
             </a:fld>
             <a:endParaRPr lang="en-US"/>
           </a:p>
@@ -396,10 +411,9 @@
           <a:lstStyle/>
           <a:p>
             <a:r>
-              <a:rPr lang="en-US" smtClean="0"/>
+              <a:rPr lang="en-US"/>
               <a:t>Click to edit Master title style</a:t>
             </a:r>
-            <a:endParaRPr lang="en-US"/>
           </a:p>
         </p:txBody>
       </p:sp>
@@ -420,38 +434,37 @@
           <a:p>
             <a:pPr lvl="0"/>
             <a:r>
-              <a:rPr lang="en-US" smtClean="0"/>
+              <a:rPr lang="en-US"/>
               <a:t>Click to edit Master text styles</a:t>
             </a:r>
           </a:p>
           <a:p>
             <a:pPr lvl="1"/>
             <a:r>
-              <a:rPr lang="en-US" smtClean="0"/>
+              <a:rPr lang="en-US"/>
               <a:t>Second level</a:t>
             </a:r>
           </a:p>
           <a:p>
             <a:pPr lvl="2"/>
             <a:r>
-              <a:rPr lang="en-US" smtClean="0"/>
+              <a:rPr lang="en-US"/>
               <a:t>Third level</a:t>
             </a:r>
           </a:p>
           <a:p>
             <a:pPr lvl="3"/>
             <a:r>
-              <a:rPr lang="en-US" smtClean="0"/>
+              <a:rPr lang="en-US"/>
               <a:t>Fourth level</a:t>
             </a:r>
           </a:p>
           <a:p>
             <a:pPr lvl="4"/>
             <a:r>
-              <a:rPr lang="en-US" smtClean="0"/>
+              <a:rPr lang="en-US"/>
               <a:t>Fifth level</a:t>
             </a:r>
-            <a:endParaRPr lang="en-US"/>
           </a:p>
         </p:txBody>
       </p:sp>
@@ -472,7 +485,7 @@
           <a:p>
             <a:fld id="{5BCAD085-E8A6-8845-BD4E-CB4CCA059FC4}" type="datetimeFigureOut">
               <a:rPr lang="en-US" smtClean="0"/>
-              <a:t>1/27/13</a:t>
+              <a:t>9/16/2026</a:t>
             </a:fld>
             <a:endParaRPr lang="en-US"/>
           </a:p>
@@ -571,10 +584,9 @@
           <a:lstStyle/>
           <a:p>
             <a:r>
-              <a:rPr lang="en-US" smtClean="0"/>
+              <a:rPr lang="en-US"/>
               <a:t>Click to edit Master title style</a:t>
             </a:r>
-            <a:endParaRPr lang="en-US"/>
           </a:p>
         </p:txBody>
       </p:sp>
@@ -600,38 +612,37 @@
           <a:p>
             <a:pPr lvl="0"/>
             <a:r>
-              <a:rPr lang="en-US" smtClean="0"/>
+              <a:rPr lang="en-US"/>
               <a:t>Click to edit Master text styles</a:t>
             </a:r>
           </a:p>
           <a:p>
             <a:pPr lvl="1"/>
             <a:r>
-              <a:rPr lang="en-US" smtClean="0"/>
+              <a:rPr lang="en-US"/>
               <a:t>Second level</a:t>
             </a:r>
           </a:p>
           <a:p>
             <a:pPr lvl="2"/>
             <a:r>
-              <a:rPr lang="en-US" smtClean="0"/>
+              <a:rPr lang="en-US"/>
               <a:t>Third level</a:t>
             </a:r>
           </a:p>
           <a:p>
             <a:pPr lvl="3"/>
             <a:r>
-              <a:rPr lang="en-US" smtClean="0"/>
+              <a:rPr lang="en-US"/>
               <a:t>Fourth level</a:t>
             </a:r>
           </a:p>
           <a:p>
             <a:pPr lvl="4"/>
             <a:r>
-              <a:rPr lang="en-US" smtClean="0"/>
+              <a:rPr lang="en-US"/>
               <a:t>Fifth level</a:t>
             </a:r>
-            <a:endParaRPr lang="en-US"/>
           </a:p>
         </p:txBody>
       </p:sp>
@@ -652,7 +663,7 @@
           <a:p>
             <a:fld id="{5BCAD085-E8A6-8845-BD4E-CB4CCA059FC4}" type="datetimeFigureOut">
               <a:rPr lang="en-US" smtClean="0"/>
-              <a:t>1/27/13</a:t>
+              <a:t>9/16/2026</a:t>
             </a:fld>
             <a:endParaRPr lang="en-US"/>
           </a:p>
@@ -746,10 +757,9 @@
           <a:lstStyle/>
           <a:p>
             <a:r>
-              <a:rPr lang="en-US" smtClean="0"/>
+              <a:rPr lang="en-US"/>
               <a:t>Click to edit Master title style</a:t>
             </a:r>
-            <a:endParaRPr lang="en-US"/>
           </a:p>
         </p:txBody>
       </p:sp>
@@ -770,38 +780,37 @@
           <a:p>
             <a:pPr lvl="0"/>
             <a:r>
-              <a:rPr lang="en-US" smtClean="0"/>
+              <a:rPr lang="en-US"/>
               <a:t>Click to edit Master text styles</a:t>
             </a:r>
           </a:p>
           <a:p>
             <a:pPr lvl="1"/>
             <a:r>
-              <a:rPr lang="en-US" smtClean="0"/>
+              <a:rPr lang="en-US"/>
               <a:t>Second level</a:t>
             </a:r>
           </a:p>
           <a:p>
             <a:pPr lvl="2"/>
             <a:r>
-              <a:rPr lang="en-US" smtClean="0"/>
+              <a:rPr lang="en-US"/>
               <a:t>Third level</a:t>
             </a:r>
           </a:p>
           <a:p>
             <a:pPr lvl="3"/>
             <a:r>
-              <a:rPr lang="en-US" smtClean="0"/>
+              <a:rPr lang="en-US"/>
               <a:t>Fourth level</a:t>
             </a:r>
           </a:p>
           <a:p>
             <a:pPr lvl="4"/>
             <a:r>
-              <a:rPr lang="en-US" smtClean="0"/>
+              <a:rPr lang="en-US"/>
               <a:t>Fifth level</a:t>
             </a:r>
-            <a:endParaRPr lang="en-US"/>
           </a:p>
         </p:txBody>
       </p:sp>
@@ -822,7 +831,7 @@
           <a:p>
             <a:fld id="{5BCAD085-E8A6-8845-BD4E-CB4CCA059FC4}" type="datetimeFigureOut">
               <a:rPr lang="en-US" smtClean="0"/>
-              <a:t>1/27/13</a:t>
+              <a:t>9/16/2026</a:t>
             </a:fld>
             <a:endParaRPr lang="en-US"/>
           </a:p>
@@ -925,10 +934,9 @@
           </a:lstStyle>
           <a:p>
             <a:r>
-              <a:rPr lang="en-US" smtClean="0"/>
+              <a:rPr lang="en-US"/>
               <a:t>Click to edit Master title style</a:t>
             </a:r>
-            <a:endParaRPr lang="en-US"/>
           </a:p>
         </p:txBody>
       </p:sp>
@@ -1045,7 +1053,7 @@
           <a:p>
             <a:pPr lvl="0"/>
             <a:r>
-              <a:rPr lang="en-US" smtClean="0"/>
+              <a:rPr lang="en-US"/>
               <a:t>Click to edit Master text styles</a:t>
             </a:r>
           </a:p>
@@ -1068,7 +1076,7 @@
           <a:p>
             <a:fld id="{5BCAD085-E8A6-8845-BD4E-CB4CCA059FC4}" type="datetimeFigureOut">
               <a:rPr lang="en-US" smtClean="0"/>
-              <a:t>1/27/13</a:t>
+              <a:t>9/16/2026</a:t>
             </a:fld>
             <a:endParaRPr lang="en-US"/>
           </a:p>
@@ -1162,10 +1170,9 @@
           <a:lstStyle/>
           <a:p>
             <a:r>
-              <a:rPr lang="en-US" smtClean="0"/>
+              <a:rPr lang="en-US"/>
               <a:t>Click to edit Master title style</a:t>
             </a:r>
-            <a:endParaRPr lang="en-US"/>
           </a:p>
         </p:txBody>
       </p:sp>
@@ -1219,38 +1226,37 @@
           <a:p>
             <a:pPr lvl="0"/>
             <a:r>
-              <a:rPr lang="en-US" smtClean="0"/>
+              <a:rPr lang="en-US"/>
               <a:t>Click to edit Master text styles</a:t>
             </a:r>
           </a:p>
           <a:p>
             <a:pPr lvl="1"/>
             <a:r>
-              <a:rPr lang="en-US" smtClean="0"/>
+              <a:rPr lang="en-US"/>
               <a:t>Second level</a:t>
             </a:r>
           </a:p>
           <a:p>
             <a:pPr lvl="2"/>
             <a:r>
-              <a:rPr lang="en-US" smtClean="0"/>
+              <a:rPr lang="en-US"/>
               <a:t>Third level</a:t>
             </a:r>
           </a:p>
           <a:p>
             <a:pPr lvl="3"/>
             <a:r>
-              <a:rPr lang="en-US" smtClean="0"/>
+              <a:rPr lang="en-US"/>
               <a:t>Fourth level</a:t>
             </a:r>
           </a:p>
           <a:p>
             <a:pPr lvl="4"/>
             <a:r>
-              <a:rPr lang="en-US" smtClean="0"/>
+              <a:rPr lang="en-US"/>
               <a:t>Fifth level</a:t>
             </a:r>
-            <a:endParaRPr lang="en-US"/>
           </a:p>
         </p:txBody>
       </p:sp>
@@ -1304,38 +1310,37 @@
           <a:p>
             <a:pPr lvl="0"/>
             <a:r>
-              <a:rPr lang="en-US" smtClean="0"/>
+              <a:rPr lang="en-US"/>
               <a:t>Click to edit Master text styles</a:t>
             </a:r>
           </a:p>
           <a:p>
             <a:pPr lvl="1"/>
             <a:r>
-              <a:rPr lang="en-US" smtClean="0"/>
+              <a:rPr lang="en-US"/>
               <a:t>Second level</a:t>
             </a:r>
           </a:p>
           <a:p>
             <a:pPr lvl="2"/>
             <a:r>
-              <a:rPr lang="en-US" smtClean="0"/>
+              <a:rPr lang="en-US"/>
               <a:t>Third level</a:t>
             </a:r>
           </a:p>
           <a:p>
             <a:pPr lvl="3"/>
             <a:r>
-              <a:rPr lang="en-US" smtClean="0"/>
+              <a:rPr lang="en-US"/>
               <a:t>Fourth level</a:t>
             </a:r>
           </a:p>
           <a:p>
             <a:pPr lvl="4"/>
             <a:r>
-              <a:rPr lang="en-US" smtClean="0"/>
+              <a:rPr lang="en-US"/>
               <a:t>Fifth level</a:t>
             </a:r>
-            <a:endParaRPr lang="en-US"/>
           </a:p>
         </p:txBody>
       </p:sp>
@@ -1356,7 +1361,7 @@
           <a:p>
             <a:fld id="{5BCAD085-E8A6-8845-BD4E-CB4CCA059FC4}" type="datetimeFigureOut">
               <a:rPr lang="en-US" smtClean="0"/>
-              <a:t>1/27/13</a:t>
+              <a:t>9/16/2026</a:t>
             </a:fld>
             <a:endParaRPr lang="en-US"/>
           </a:p>
@@ -1454,10 +1459,9 @@
           </a:lstStyle>
           <a:p>
             <a:r>
-              <a:rPr lang="en-US" smtClean="0"/>
+              <a:rPr lang="en-US"/>
               <a:t>Click to edit Master title style</a:t>
             </a:r>
-            <a:endParaRPr lang="en-US"/>
           </a:p>
         </p:txBody>
       </p:sp>
@@ -1520,7 +1524,7 @@
           <a:p>
             <a:pPr lvl="0"/>
             <a:r>
-              <a:rPr lang="en-US" smtClean="0"/>
+              <a:rPr lang="en-US"/>
               <a:t>Click to edit Master text styles</a:t>
             </a:r>
           </a:p>
@@ -1576,38 +1580,37 @@
           <a:p>
             <a:pPr lvl="0"/>
             <a:r>
-              <a:rPr lang="en-US" smtClean="0"/>
+              <a:rPr lang="en-US"/>
               <a:t>Click to edit Master text styles</a:t>
             </a:r>
           </a:p>
           <a:p>
             <a:pPr lvl="1"/>
             <a:r>
-              <a:rPr lang="en-US" smtClean="0"/>
+              <a:rPr lang="en-US"/>
               <a:t>Second level</a:t>
             </a:r>
           </a:p>
           <a:p>
             <a:pPr lvl="2"/>
             <a:r>
-              <a:rPr lang="en-US" smtClean="0"/>
+              <a:rPr lang="en-US"/>
               <a:t>Third level</a:t>
             </a:r>
           </a:p>
           <a:p>
             <a:pPr lvl="3"/>
             <a:r>
-              <a:rPr lang="en-US" smtClean="0"/>
+              <a:rPr lang="en-US"/>
               <a:t>Fourth level</a:t>
             </a:r>
           </a:p>
           <a:p>
             <a:pPr lvl="4"/>
             <a:r>
-              <a:rPr lang="en-US" smtClean="0"/>
+              <a:rPr lang="en-US"/>
               <a:t>Fifth level</a:t>
             </a:r>
-            <a:endParaRPr lang="en-US"/>
           </a:p>
         </p:txBody>
       </p:sp>
@@ -1670,7 +1673,7 @@
           <a:p>
             <a:pPr lvl="0"/>
             <a:r>
-              <a:rPr lang="en-US" smtClean="0"/>
+              <a:rPr lang="en-US"/>
               <a:t>Click to edit Master text styles</a:t>
             </a:r>
           </a:p>
@@ -1726,38 +1729,37 @@
           <a:p>
             <a:pPr lvl="0"/>
             <a:r>
-              <a:rPr lang="en-US" smtClean="0"/>
+              <a:rPr lang="en-US"/>
               <a:t>Click to edit Master text styles</a:t>
             </a:r>
           </a:p>
           <a:p>
             <a:pPr lvl="1"/>
             <a:r>
-              <a:rPr lang="en-US" smtClean="0"/>
+              <a:rPr lang="en-US"/>
               <a:t>Second level</a:t>
             </a:r>
           </a:p>
           <a:p>
             <a:pPr lvl="2"/>
             <a:r>
-              <a:rPr lang="en-US" smtClean="0"/>
+              <a:rPr lang="en-US"/>
               <a:t>Third level</a:t>
             </a:r>
           </a:p>
           <a:p>
             <a:pPr lvl="3"/>
             <a:r>
-              <a:rPr lang="en-US" smtClean="0"/>
+              <a:rPr lang="en-US"/>
               <a:t>Fourth level</a:t>
             </a:r>
           </a:p>
           <a:p>
             <a:pPr lvl="4"/>
             <a:r>
-              <a:rPr lang="en-US" smtClean="0"/>
+              <a:rPr lang="en-US"/>
               <a:t>Fifth level</a:t>
             </a:r>
-            <a:endParaRPr lang="en-US"/>
           </a:p>
         </p:txBody>
       </p:sp>
@@ -1778,7 +1780,7 @@
           <a:p>
             <a:fld id="{5BCAD085-E8A6-8845-BD4E-CB4CCA059FC4}" type="datetimeFigureOut">
               <a:rPr lang="en-US" smtClean="0"/>
-              <a:t>1/27/13</a:t>
+              <a:t>9/16/2026</a:t>
             </a:fld>
             <a:endParaRPr lang="en-US"/>
           </a:p>
@@ -1872,10 +1874,9 @@
           <a:lstStyle/>
           <a:p>
             <a:r>
-              <a:rPr lang="en-US" smtClean="0"/>
+              <a:rPr lang="en-US"/>
               <a:t>Click to edit Master title style</a:t>
             </a:r>
-            <a:endParaRPr lang="en-US"/>
           </a:p>
         </p:txBody>
       </p:sp>
@@ -1896,7 +1897,7 @@
           <a:p>
             <a:fld id="{5BCAD085-E8A6-8845-BD4E-CB4CCA059FC4}" type="datetimeFigureOut">
               <a:rPr lang="en-US" smtClean="0"/>
-              <a:t>1/27/13</a:t>
+              <a:t>9/16/2026</a:t>
             </a:fld>
             <a:endParaRPr lang="en-US"/>
           </a:p>
@@ -1991,7 +1992,7 @@
           <a:p>
             <a:fld id="{5BCAD085-E8A6-8845-BD4E-CB4CCA059FC4}" type="datetimeFigureOut">
               <a:rPr lang="en-US" smtClean="0"/>
-              <a:t>1/27/13</a:t>
+              <a:t>9/16/2026</a:t>
             </a:fld>
             <a:endParaRPr lang="en-US"/>
           </a:p>
@@ -2094,10 +2095,9 @@
           </a:lstStyle>
           <a:p>
             <a:r>
-              <a:rPr lang="en-US" smtClean="0"/>
+              <a:rPr lang="en-US"/>
               <a:t>Click to edit Master title style</a:t>
             </a:r>
-            <a:endParaRPr lang="en-US"/>
           </a:p>
         </p:txBody>
       </p:sp>
@@ -2151,38 +2151,37 @@
           <a:p>
             <a:pPr lvl="0"/>
             <a:r>
-              <a:rPr lang="en-US" smtClean="0"/>
+              <a:rPr lang="en-US"/>
               <a:t>Click to edit Master text styles</a:t>
             </a:r>
           </a:p>
           <a:p>
             <a:pPr lvl="1"/>
             <a:r>
-              <a:rPr lang="en-US" smtClean="0"/>
+              <a:rPr lang="en-US"/>
               <a:t>Second level</a:t>
             </a:r>
           </a:p>
           <a:p>
             <a:pPr lvl="2"/>
             <a:r>
-              <a:rPr lang="en-US" smtClean="0"/>
+              <a:rPr lang="en-US"/>
               <a:t>Third level</a:t>
             </a:r>
           </a:p>
           <a:p>
             <a:pPr lvl="3"/>
             <a:r>
-              <a:rPr lang="en-US" smtClean="0"/>
+              <a:rPr lang="en-US"/>
               <a:t>Fourth level</a:t>
             </a:r>
           </a:p>
           <a:p>
             <a:pPr lvl="4"/>
             <a:r>
-              <a:rPr lang="en-US" smtClean="0"/>
+              <a:rPr lang="en-US"/>
               <a:t>Fifth level</a:t>
             </a:r>
-            <a:endParaRPr lang="en-US"/>
           </a:p>
         </p:txBody>
       </p:sp>
@@ -2245,7 +2244,7 @@
           <a:p>
             <a:pPr lvl="0"/>
             <a:r>
-              <a:rPr lang="en-US" smtClean="0"/>
+              <a:rPr lang="en-US"/>
               <a:t>Click to edit Master text styles</a:t>
             </a:r>
           </a:p>
@@ -2268,7 +2267,7 @@
           <a:p>
             <a:fld id="{5BCAD085-E8A6-8845-BD4E-CB4CCA059FC4}" type="datetimeFigureOut">
               <a:rPr lang="en-US" smtClean="0"/>
-              <a:t>1/27/13</a:t>
+              <a:t>9/16/2026</a:t>
             </a:fld>
             <a:endParaRPr lang="en-US"/>
           </a:p>
@@ -2371,10 +2370,9 @@
           </a:lstStyle>
           <a:p>
             <a:r>
-              <a:rPr lang="en-US" smtClean="0"/>
+              <a:rPr lang="en-US"/>
               <a:t>Click to edit Master title style</a:t>
             </a:r>
-            <a:endParaRPr lang="en-US"/>
           </a:p>
         </p:txBody>
       </p:sp>
@@ -2498,7 +2496,7 @@
           <a:p>
             <a:pPr lvl="0"/>
             <a:r>
-              <a:rPr lang="en-US" smtClean="0"/>
+              <a:rPr lang="en-US"/>
               <a:t>Click to edit Master text styles</a:t>
             </a:r>
           </a:p>
@@ -2521,7 +2519,7 @@
           <a:p>
             <a:fld id="{5BCAD085-E8A6-8845-BD4E-CB4CCA059FC4}" type="datetimeFigureOut">
               <a:rPr lang="en-US" smtClean="0"/>
-              <a:t>1/27/13</a:t>
+              <a:t>9/16/2026</a:t>
             </a:fld>
             <a:endParaRPr lang="en-US"/>
           </a:p>
@@ -2630,10 +2628,9 @@
           <a:lstStyle/>
           <a:p>
             <a:r>
-              <a:rPr lang="en-US" smtClean="0"/>
+              <a:rPr lang="en-US"/>
               <a:t>Click to edit Master title style</a:t>
             </a:r>
-            <a:endParaRPr lang="en-US"/>
           </a:p>
         </p:txBody>
       </p:sp>
@@ -2664,38 +2661,37 @@
           <a:p>
             <a:pPr lvl="0"/>
             <a:r>
-              <a:rPr lang="en-US" smtClean="0"/>
+              <a:rPr lang="en-US"/>
               <a:t>Click to edit Master text styles</a:t>
             </a:r>
           </a:p>
           <a:p>
             <a:pPr lvl="1"/>
             <a:r>
-              <a:rPr lang="en-US" smtClean="0"/>
+              <a:rPr lang="en-US"/>
               <a:t>Second level</a:t>
             </a:r>
           </a:p>
           <a:p>
             <a:pPr lvl="2"/>
             <a:r>
-              <a:rPr lang="en-US" smtClean="0"/>
+              <a:rPr lang="en-US"/>
               <a:t>Third level</a:t>
             </a:r>
           </a:p>
           <a:p>
             <a:pPr lvl="3"/>
             <a:r>
-              <a:rPr lang="en-US" smtClean="0"/>
+              <a:rPr lang="en-US"/>
               <a:t>Fourth level</a:t>
             </a:r>
           </a:p>
           <a:p>
             <a:pPr lvl="4"/>
             <a:r>
-              <a:rPr lang="en-US" smtClean="0"/>
+              <a:rPr lang="en-US"/>
               <a:t>Fifth level</a:t>
             </a:r>
-            <a:endParaRPr lang="en-US"/>
           </a:p>
         </p:txBody>
       </p:sp>
@@ -2734,7 +2730,7 @@
           <a:p>
             <a:fld id="{5BCAD085-E8A6-8845-BD4E-CB4CCA059FC4}" type="datetimeFigureOut">
               <a:rPr lang="en-US" smtClean="0"/>
-              <a:t>1/27/13</a:t>
+              <a:t>9/16/2026</a:t>
             </a:fld>
             <a:endParaRPr lang="en-US"/>
           </a:p>
@@ -3093,7 +3089,7 @@
 </file>
 
 <file path=ppt/slides/slide1.xml><?xml version="1.0" encoding="utf-8"?>
-<p:sld xmlns:a="http://schemas.openxmlformats.org/drawingml/2006/main" xmlns:p="http://schemas.openxmlformats.org/presentationml/2006/main" xmlns:r="http://schemas.openxmlformats.org/officeDocument/2006/relationships">
+<p:sld xmlns:a="http://schemas.openxmlformats.org/drawingml/2006/main" xmlns:r="http://schemas.openxmlformats.org/officeDocument/2006/relationships" xmlns:p="http://schemas.openxmlformats.org/presentationml/2006/main">
   <p:cSld>
     <p:spTree>
       <p:nvGrpSpPr>
@@ -3101,7 +3097,14 @@
         <p:cNvGrpSpPr/>
         <p:nvPr/>
       </p:nvGrpSpPr>
-      <p:grpSpPr/>
+      <p:grpSpPr>
+        <a:xfrm>
+          <a:off x="0" y="0"/>
+          <a:ext cx="0" cy="0"/>
+          <a:chOff x="0" y="0"/>
+          <a:chExt cx="0" cy="0"/>
+        </a:xfrm>
+      </p:grpSpPr>
       <p:sp>
         <p:nvSpPr>
           <p:cNvPr id="2" name="Rectangle 1"/>
@@ -3117,7 +3120,7 @@
             <a:avLst/>
           </a:prstGeom>
           <a:solidFill>
-            <a:srgbClr val="1B4F72"/>
+            <a:schemeClr val="accent1"/>
           </a:solidFill>
           <a:ln>
             <a:noFill/>
@@ -3142,6 +3145,11 @@
           <a:lstStyle/>
           <a:p>
             <a:pPr algn="ctr"/>
+            <a:endParaRPr dirty="0">
+              <a:highlight>
+                <a:srgbClr val="FFFF00"/>
+              </a:highlight>
+            </a:endParaRPr>
           </a:p>
         </p:txBody>
       </p:sp>
@@ -3154,7 +3162,7 @@
         <p:spPr>
           <a:xfrm>
             <a:off x="914400" y="731520"/>
-            <a:ext cx="10332720" cy="5303520"/>
+            <a:ext cx="10332720" cy="3185487"/>
           </a:xfrm>
           <a:prstGeom prst="rect">
             <a:avLst/>
@@ -3175,23 +3183,27 @@
               </a:defRPr>
             </a:pPr>
             <a:r>
+              <a:rPr dirty="0"/>
               <a:t>TRƯỜNG CAO ĐẲNG KỸ THUẬT – CÔNG NGHỆ BÁCH KHOA</a:t>
             </a:r>
-            <a:br/>
-            <a:r>
-              <a:t>KHOA CÔNG NGHỆ THÔNG TIN</a:t>
-            </a:r>
-          </a:p>
-          <a:p>
-            <a:br/>
-            <a:pPr algn="ctr">
-              <a:defRPr sz="1600" b="1">
-                <a:solidFill>
-                  <a:srgbClr val="FFA726"/>
-                </a:solidFill>
-              </a:defRPr>
-            </a:pPr>
-            <a:r>
+            <a:br>
+              <a:rPr dirty="0"/>
+            </a:br>
+            <a:r>
+              <a:rPr dirty="0" err="1"/>
+              <a:t>KHOA</a:t>
+            </a:r>
+            <a:r>
+              <a:rPr dirty="0"/>
+              <a:t> CÔNG NGHỆ THÔNG TIN</a:t>
+            </a:r>
+          </a:p>
+          <a:p>
+            <a:br>
+              <a:rPr dirty="0"/>
+            </a:br>
+            <a:r>
+              <a:rPr dirty="0"/>
               <a:t>BÁO CÁO BÀI TẬP LỚN MÔN: PHÁT TRIỂN ỨNG DỤNG DI ĐỘNG</a:t>
             </a:r>
           </a:p>
@@ -3204,6 +3216,7 @@
               </a:defRPr>
             </a:pPr>
             <a:r>
+              <a:rPr dirty="0"/>
               <a:t>COOKING NOTE — SỔ TAY NẤU ĂN THÔNG MINH</a:t>
             </a:r>
           </a:p>
@@ -3216,25 +3229,166 @@
               </a:defRPr>
             </a:pPr>
             <a:r>
-              <a:t>Kiến trúc MVVM · Jetpack Compose Material 3 · Room Database 2.6.1 · Trợ lý AI Multi-Provider</a:t>
-            </a:r>
-          </a:p>
-          <a:p>
-            <a:br/>
-            <a:br/>
-            <a:pPr algn="ctr">
-              <a:defRPr sz="1400">
-                <a:solidFill>
-                  <a:srgbClr val="FFFFFF"/>
-                </a:solidFill>
-              </a:defRPr>
-            </a:pPr>
-            <a:r>
-              <a:t>Giảng viên hướng dẫn: ThS. Lê Văn Quân</a:t>
-            </a:r>
-            <a:br/>
-            <a:r>
-              <a:t>Nhóm sinh viên thực hiện: Vũ Đình Đạo (NT), Ngô Gia Bảo, Nguyễn Tiến Dũng, Lê Đức Trọng — Lớp: TT602-K16LT</a:t>
+              <a:rPr dirty="0" err="1"/>
+              <a:t>Kiến</a:t>
+            </a:r>
+            <a:r>
+              <a:rPr dirty="0"/>
+              <a:t> </a:t>
+            </a:r>
+            <a:r>
+              <a:rPr dirty="0" err="1"/>
+              <a:t>trúc</a:t>
+            </a:r>
+            <a:r>
+              <a:rPr dirty="0"/>
+              <a:t> MVVM · Jetpack Compose Material 3 · Room Database 2.6.1 · </a:t>
+            </a:r>
+            <a:r>
+              <a:rPr dirty="0" err="1"/>
+              <a:t>Trợ</a:t>
+            </a:r>
+            <a:r>
+              <a:rPr dirty="0"/>
+              <a:t> </a:t>
+            </a:r>
+            <a:r>
+              <a:rPr dirty="0" err="1"/>
+              <a:t>lý</a:t>
+            </a:r>
+            <a:r>
+              <a:rPr dirty="0"/>
+              <a:t> AI Multi-Provider</a:t>
+            </a:r>
+          </a:p>
+          <a:p>
+            <a:br>
+              <a:rPr dirty="0"/>
+            </a:br>
+            <a:br>
+              <a:rPr dirty="0"/>
+            </a:br>
+            <a:r>
+              <a:rPr dirty="0" err="1"/>
+              <a:t>Giảng</a:t>
+            </a:r>
+            <a:r>
+              <a:rPr dirty="0"/>
+              <a:t> </a:t>
+            </a:r>
+            <a:r>
+              <a:rPr dirty="0" err="1"/>
+              <a:t>viên</a:t>
+            </a:r>
+            <a:r>
+              <a:rPr dirty="0"/>
+              <a:t> </a:t>
+            </a:r>
+            <a:r>
+              <a:rPr dirty="0" err="1"/>
+              <a:t>hướng</a:t>
+            </a:r>
+            <a:r>
+              <a:rPr dirty="0"/>
+              <a:t> </a:t>
+            </a:r>
+            <a:r>
+              <a:rPr dirty="0" err="1"/>
+              <a:t>dẫn</a:t>
+            </a:r>
+            <a:r>
+              <a:rPr lang="en-US" dirty="0"/>
+              <a:t>: </a:t>
+            </a:r>
+            <a:r>
+              <a:rPr dirty="0"/>
+              <a:t>Lê Văn Quân</a:t>
+            </a:r>
+            <a:br>
+              <a:rPr dirty="0"/>
+            </a:br>
+            <a:r>
+              <a:rPr dirty="0" err="1"/>
+              <a:t>Nhóm</a:t>
+            </a:r>
+            <a:r>
+              <a:rPr dirty="0"/>
+              <a:t> </a:t>
+            </a:r>
+            <a:r>
+              <a:rPr dirty="0" err="1"/>
+              <a:t>sinh</a:t>
+            </a:r>
+            <a:r>
+              <a:rPr dirty="0"/>
+              <a:t> </a:t>
+            </a:r>
+            <a:r>
+              <a:rPr dirty="0" err="1"/>
+              <a:t>viên</a:t>
+            </a:r>
+            <a:r>
+              <a:rPr dirty="0"/>
+              <a:t> </a:t>
+            </a:r>
+            <a:r>
+              <a:rPr dirty="0" err="1"/>
+              <a:t>thực</a:t>
+            </a:r>
+            <a:r>
+              <a:rPr dirty="0"/>
+              <a:t> </a:t>
+            </a:r>
+            <a:r>
+              <a:rPr dirty="0" err="1"/>
+              <a:t>hiện</a:t>
+            </a:r>
+            <a:r>
+              <a:rPr dirty="0"/>
+              <a:t>: Vũ </a:t>
+            </a:r>
+            <a:r>
+              <a:rPr dirty="0" err="1"/>
+              <a:t>Đình</a:t>
+            </a:r>
+            <a:r>
+              <a:rPr dirty="0"/>
+              <a:t> </a:t>
+            </a:r>
+            <a:r>
+              <a:rPr dirty="0" err="1"/>
+              <a:t>Đạo</a:t>
+            </a:r>
+            <a:r>
+              <a:rPr dirty="0"/>
+              <a:t> (NT), Ngô Gia Bảo</a:t>
+            </a:r>
+            <a:r>
+              <a:rPr lang="en-US" dirty="0"/>
+              <a:t>, </a:t>
+            </a:r>
+            <a:r>
+              <a:rPr dirty="0"/>
+              <a:t>Nguyễn Tiến Dũng, Lê Đức </a:t>
+            </a:r>
+            <a:r>
+              <a:rPr dirty="0" err="1"/>
+              <a:t>Trọng</a:t>
+            </a:r>
+            <a:r>
+              <a:rPr dirty="0"/>
+              <a:t> </a:t>
+            </a:r>
+            <a:endParaRPr lang="en-US" dirty="0"/>
+          </a:p>
+          <a:p>
+            <a:r>
+              <a:rPr dirty="0" err="1"/>
+              <a:t>Lớp</a:t>
+            </a:r>
+            <a:r>
+              <a:rPr dirty="0"/>
+              <a:t>: TT602-K16LT</a:t>
             </a:r>
           </a:p>
         </p:txBody>
@@ -3248,7 +3402,7 @@
 </file>
 
 <file path=ppt/slides/slide10.xml><?xml version="1.0" encoding="utf-8"?>
-<p:sld xmlns:a="http://schemas.openxmlformats.org/drawingml/2006/main" xmlns:p="http://schemas.openxmlformats.org/presentationml/2006/main" xmlns:r="http://schemas.openxmlformats.org/officeDocument/2006/relationships">
+<p:sld xmlns:a="http://schemas.openxmlformats.org/drawingml/2006/main" xmlns:r="http://schemas.openxmlformats.org/officeDocument/2006/relationships" xmlns:p="http://schemas.openxmlformats.org/presentationml/2006/main">
   <p:cSld>
     <p:spTree>
       <p:nvGrpSpPr>
@@ -3256,7 +3410,14 @@
         <p:cNvGrpSpPr/>
         <p:nvPr/>
       </p:nvGrpSpPr>
-      <p:grpSpPr/>
+      <p:grpSpPr>
+        <a:xfrm>
+          <a:off x="0" y="0"/>
+          <a:ext cx="0" cy="0"/>
+          <a:chOff x="0" y="0"/>
+          <a:chExt cx="0" cy="0"/>
+        </a:xfrm>
+      </p:grpSpPr>
       <p:sp>
         <p:nvSpPr>
           <p:cNvPr id="2" name="TextBox 1"/>
@@ -3302,7 +3463,7 @@
               </a:defRPr>
             </a:pPr>
             <a:r>
-              <a:t>9. Phân hệ Cài đặt &amp; Sao lưu Dữ liệu (Backup)</a:t>
+              <a:t>8. Tìm kiếm Tức thì &amp; Lọc Danh mục Thông minh</a:t>
             </a:r>
           </a:p>
         </p:txBody>
@@ -3349,6 +3510,7 @@
           <a:lstStyle/>
           <a:p>
             <a:pPr algn="ctr"/>
+            <a:endParaRPr/>
           </a:p>
         </p:txBody>
       </p:sp>
@@ -3378,14 +3540,14 @@
               <a:spcAft>
                 <a:spcPts val="1000"/>
               </a:spcAft>
-              <a:defRPr b="1" sz="1600">
+              <a:defRPr sz="1600" b="1">
                 <a:solidFill>
                   <a:srgbClr val="1B4F72"/>
                 </a:solidFill>
               </a:defRPr>
             </a:pPr>
             <a:r>
-              <a:t>Tùy biến cấu hình AI</a:t>
+              <a:t>Kỹ thuật Debounce 300ms</a:t>
             </a:r>
           </a:p>
           <a:p>
@@ -3400,7 +3562,7 @@
               </a:defRPr>
             </a:pPr>
             <a:r>
-              <a:t>• Dễ dàng chuyển đổi linh hoạt giữa 5 nhà cung cấp AI trong menu thả xuống.</a:t>
+              <a:t>• Vấn đề: Người dùng gõ phím liên tục nếu truy vấn DB ngay sẽ gây giật lag và tốn pin.</a:t>
             </a:r>
           </a:p>
           <a:p>
@@ -3415,7 +3577,7 @@
               </a:defRPr>
             </a:pPr>
             <a:r>
-              <a:t>• Tùy chỉnh Endpoint URL, Model ID (gpt-4o-mini, claude-3-5-haiku, gemini-1.5-flash) và max_tokens.</a:t>
+              <a:t>• Giải pháp: Áp dụng toán tử debounce(300L) trong Kotlin Flow tại SearchViewModel.</a:t>
             </a:r>
           </a:p>
           <a:p>
@@ -3430,7 +3592,7 @@
               </a:defRPr>
             </a:pPr>
             <a:r>
-              <a:t>• Tự động ẩn/hiện trường nhập API Key tùy theo lựa chọn sử dụng Cloud hay Offline.</a:t>
+              <a:t>• Chỉ thực hiện truy vấn khi người dùng dừng gõ 300ms, giúp UI phản hồi cực kỳ êm ái.</a:t>
             </a:r>
           </a:p>
         </p:txBody>
@@ -3477,6 +3639,7 @@
           <a:lstStyle/>
           <a:p>
             <a:pPr algn="ctr"/>
+            <a:endParaRPr/>
           </a:p>
         </p:txBody>
       </p:sp>
@@ -3506,14 +3669,14 @@
               <a:spcAft>
                 <a:spcPts val="1000"/>
               </a:spcAft>
-              <a:defRPr b="1" sz="1600">
+              <a:defRPr sz="1600" b="1">
                 <a:solidFill>
                   <a:srgbClr val="1B4F72"/>
                 </a:solidFill>
               </a:defRPr>
             </a:pPr>
             <a:r>
-              <a:t>Sao lưu SQLite Bất đồng bộ</a:t>
+              <a:t>Truy vấn Đa trường dữ liệu</a:t>
             </a:r>
           </a:p>
           <a:p>
@@ -3528,7 +3691,7 @@
               </a:defRPr>
             </a:pPr>
             <a:r>
-              <a:t>• Xuất toàn bộ cơ sở dữ liệu SQLite thành tệp `cookingnote-backup.db`.</a:t>
+              <a:t>• Tìm kiếm đồng thời trên nhiều trường: Tên món ăn, mô tả, ghi chú và cả tên nguyên liệu bên trong.</a:t>
             </a:r>
           </a:p>
           <a:p>
@@ -3543,7 +3706,7 @@
               </a:defRPr>
             </a:pPr>
             <a:r>
-              <a:t>• Tác vụ đọc ghi đĩa chạy 100% trên luồng nền Dispatchers.IO, triệt tiêu việc đơ màn hình chính.</a:t>
+              <a:t>• Đánh chỉ mục (Index) trên Room Database giúp câu lệnh SQL LIKE phản hồi dưới 20ms.</a:t>
             </a:r>
           </a:p>
           <a:p>
@@ -3558,7 +3721,7 @@
               </a:defRPr>
             </a:pPr>
             <a:r>
-              <a:t>• Tích hợp Android FileProvider cho phép gửi tệp sao lưu qua Google Drive, Zalo, Gmail.</a:t>
+              <a:t>• Trạng thái giao diện phân định rõ: Gợi ý ban đầu, Đang tìm kiếm, Không tìm thấy kết quả.</a:t>
             </a:r>
           </a:p>
         </p:txBody>
@@ -3572,7 +3735,7 @@
 </file>
 
 <file path=ppt/slides/slide11.xml><?xml version="1.0" encoding="utf-8"?>
-<p:sld xmlns:a="http://schemas.openxmlformats.org/drawingml/2006/main" xmlns:p="http://schemas.openxmlformats.org/presentationml/2006/main" xmlns:r="http://schemas.openxmlformats.org/officeDocument/2006/relationships">
+<p:sld xmlns:a="http://schemas.openxmlformats.org/drawingml/2006/main" xmlns:r="http://schemas.openxmlformats.org/officeDocument/2006/relationships" xmlns:p="http://schemas.openxmlformats.org/presentationml/2006/main">
   <p:cSld>
     <p:spTree>
       <p:nvGrpSpPr>
@@ -3580,7 +3743,14 @@
         <p:cNvGrpSpPr/>
         <p:nvPr/>
       </p:nvGrpSpPr>
-      <p:grpSpPr/>
+      <p:grpSpPr>
+        <a:xfrm>
+          <a:off x="0" y="0"/>
+          <a:ext cx="0" cy="0"/>
+          <a:chOff x="0" y="0"/>
+          <a:chExt cx="0" cy="0"/>
+        </a:xfrm>
+      </p:grpSpPr>
       <p:sp>
         <p:nvSpPr>
           <p:cNvPr id="2" name="TextBox 1"/>
@@ -3611,7 +3781,7 @@
               </a:defRPr>
             </a:pPr>
             <a:r>
-              <a:t>THIẾT KẾ HỆ THỐNG</a:t>
+              <a:t>CHỨC NĂNG CHÍNH</a:t>
             </a:r>
           </a:p>
           <a:p>
@@ -3626,7 +3796,7 @@
               </a:defRPr>
             </a:pPr>
             <a:r>
-              <a:t>10. Cơ sở Dữ liệu Room (10 Entities &amp; 9 DAOs)</a:t>
+              <a:t>9. Phân hệ Cài đặt &amp; Sao lưu Dữ liệu (Backup)</a:t>
             </a:r>
           </a:p>
         </p:txBody>
@@ -3673,6 +3843,7 @@
           <a:lstStyle/>
           <a:p>
             <a:pPr algn="ctr"/>
+            <a:endParaRPr/>
           </a:p>
         </p:txBody>
       </p:sp>
@@ -3702,14 +3873,14 @@
               <a:spcAft>
                 <a:spcPts val="1000"/>
               </a:spcAft>
-              <a:defRPr b="1" sz="1600">
+              <a:defRPr sz="1600" b="1">
                 <a:solidFill>
                   <a:srgbClr val="1B4F72"/>
                 </a:solidFill>
               </a:defRPr>
             </a:pPr>
             <a:r>
-              <a:t>Các bảng quan hệ chính</a:t>
+              <a:t>Tùy biến cấu hình AI</a:t>
             </a:r>
           </a:p>
           <a:p>
@@ -3724,7 +3895,7 @@
               </a:defRPr>
             </a:pPr>
             <a:r>
-              <a:t>• recipes: Bảng chính chứa thông tin công thức (PK: id, FK: categoryId).</a:t>
+              <a:t>• Dễ dàng chuyển đổi linh hoạt giữa 5 nhà cung cấp AI trong menu thả xuống.</a:t>
             </a:r>
           </a:p>
           <a:p>
@@ -3739,7 +3910,7 @@
               </a:defRPr>
             </a:pPr>
             <a:r>
-              <a:t>• ingredients: Nguyên liệu (FK: recipeId có ràng buộc CASCADE xóa tự động).</a:t>
+              <a:t>• Tùy chỉnh Endpoint URL, Model ID (gpt-4o-mini, claude-3-5-haiku, gemini-1.5-flash) và max_tokens.</a:t>
             </a:r>
           </a:p>
           <a:p>
@@ -3754,37 +3925,7 @@
               </a:defRPr>
             </a:pPr>
             <a:r>
-              <a:t>• steps: Các bước thực hiện (FK: recipeId có ràng buộc CASCADE).</a:t>
-            </a:r>
-          </a:p>
-          <a:p>
-            <a:pPr>
-              <a:spcAft>
-                <a:spcPts val="800"/>
-              </a:spcAft>
-              <a:defRPr sz="1300">
-                <a:solidFill>
-                  <a:srgbClr val="212529"/>
-                </a:solidFill>
-              </a:defRPr>
-            </a:pPr>
-            <a:r>
-              <a:t>• categories: Danh mục món ăn có màu sắc và icon trực quan.</a:t>
-            </a:r>
-          </a:p>
-          <a:p>
-            <a:pPr>
-              <a:spcAft>
-                <a:spcPts val="800"/>
-              </a:spcAft>
-              <a:defRPr sz="1300">
-                <a:solidFill>
-                  <a:srgbClr val="212529"/>
-                </a:solidFill>
-              </a:defRPr>
-            </a:pPr>
-            <a:r>
-              <a:t>• pantry_items: Nguyên liệu thực tế trong tủ lạnh và ngưỡng sắp hết.</a:t>
+              <a:t>• Tự động ẩn/hiện trường nhập API Key tùy theo lựa chọn sử dụng Cloud hay Offline.</a:t>
             </a:r>
           </a:p>
         </p:txBody>
@@ -3831,6 +3972,7 @@
           <a:lstStyle/>
           <a:p>
             <a:pPr algn="ctr"/>
+            <a:endParaRPr/>
           </a:p>
         </p:txBody>
       </p:sp>
@@ -3860,14 +4002,14 @@
               <a:spcAft>
                 <a:spcPts val="1000"/>
               </a:spcAft>
-              <a:defRPr b="1" sz="1600">
+              <a:defRPr sz="1600" b="1">
                 <a:solidFill>
                   <a:srgbClr val="1B4F72"/>
                 </a:solidFill>
               </a:defRPr>
             </a:pPr>
             <a:r>
-              <a:t>Nhật ký &amp; Lịch sử hỗ trợ</a:t>
+              <a:t>Sao lưu SQLite Bất đồng bộ</a:t>
             </a:r>
           </a:p>
           <a:p>
@@ -3882,7 +4024,7 @@
               </a:defRPr>
             </a:pPr>
             <a:r>
-              <a:t>• cook_history: Ghi nhận lịch sử mỗi lần nấu món ăn (FK: recipeId).</a:t>
+              <a:t>• Xuất toàn bộ cơ sở dữ liệu SQLite thành tệp `cookingnote-backup.db`.</a:t>
             </a:r>
           </a:p>
           <a:p>
@@ -3897,7 +4039,7 @@
               </a:defRPr>
             </a:pPr>
             <a:r>
-              <a:t>• tags &amp; recipe_tag_cross_ref: Quan hệ N-N cho phép gắn nhiều nhãn linh hoạt.</a:t>
+              <a:t>• Tác vụ đọc ghi đĩa chạy 100% trên luồng nền Dispatchers.IO, triệt tiêu việc đơ màn hình chính.</a:t>
             </a:r>
           </a:p>
           <a:p>
@@ -3912,22 +4054,7 @@
               </a:defRPr>
             </a:pPr>
             <a:r>
-              <a:t>• chat_messages: Lưu trữ toàn bộ hội thoại với trợ lý AI.</a:t>
-            </a:r>
-          </a:p>
-          <a:p>
-            <a:pPr>
-              <a:spcAft>
-                <a:spcPts val="800"/>
-              </a:spcAft>
-              <a:defRPr sz="1300">
-                <a:solidFill>
-                  <a:srgbClr val="212529"/>
-                </a:solidFill>
-              </a:defRPr>
-            </a:pPr>
-            <a:r>
-              <a:t>• ai_query_logs: Theo dõi độ trễ và tỷ lệ thành công của các lượt gọi mạng.</a:t>
+              <a:t>• Tích hợp Android FileProvider cho phép gửi tệp sao lưu qua Google Drive, Zalo, Gmail.</a:t>
             </a:r>
           </a:p>
         </p:txBody>
@@ -3941,7 +4068,7 @@
 </file>
 
 <file path=ppt/slides/slide12.xml><?xml version="1.0" encoding="utf-8"?>
-<p:sld xmlns:a="http://schemas.openxmlformats.org/drawingml/2006/main" xmlns:p="http://schemas.openxmlformats.org/presentationml/2006/main" xmlns:r="http://schemas.openxmlformats.org/officeDocument/2006/relationships">
+<p:sld xmlns:a="http://schemas.openxmlformats.org/drawingml/2006/main" xmlns:r="http://schemas.openxmlformats.org/officeDocument/2006/relationships" xmlns:p="http://schemas.openxmlformats.org/presentationml/2006/main">
   <p:cSld>
     <p:spTree>
       <p:nvGrpSpPr>
@@ -3949,7 +4076,14 @@
         <p:cNvGrpSpPr/>
         <p:nvPr/>
       </p:nvGrpSpPr>
-      <p:grpSpPr/>
+      <p:grpSpPr>
+        <a:xfrm>
+          <a:off x="0" y="0"/>
+          <a:ext cx="0" cy="0"/>
+          <a:chOff x="0" y="0"/>
+          <a:chExt cx="0" cy="0"/>
+        </a:xfrm>
+      </p:grpSpPr>
       <p:sp>
         <p:nvSpPr>
           <p:cNvPr id="2" name="TextBox 1"/>
@@ -3980,7 +4114,7 @@
               </a:defRPr>
             </a:pPr>
             <a:r>
-              <a:t>ĐẢM BẢO CHẤT LƯỢNG</a:t>
+              <a:t>THIẾT KẾ HỆ THỐNG</a:t>
             </a:r>
           </a:p>
           <a:p>
@@ -3995,7 +4129,7 @@
               </a:defRPr>
             </a:pPr>
             <a:r>
-              <a:t>11. Chiến lược Kiểm thử Tự động (100/100 Tests Passed)</a:t>
+              <a:t>10. Cơ sở Dữ liệu Room (10 Entities &amp; 9 DAOs)</a:t>
             </a:r>
           </a:p>
         </p:txBody>
@@ -4042,6 +4176,7 @@
           <a:lstStyle/>
           <a:p>
             <a:pPr algn="ctr"/>
+            <a:endParaRPr/>
           </a:p>
         </p:txBody>
       </p:sp>
@@ -4071,14 +4206,14 @@
               <a:spcAft>
                 <a:spcPts val="1000"/>
               </a:spcAft>
-              <a:defRPr b="1" sz="1600">
+              <a:defRPr sz="1600" b="1">
                 <a:solidFill>
                   <a:srgbClr val="1B4F72"/>
                 </a:solidFill>
               </a:defRPr>
             </a:pPr>
             <a:r>
-              <a:t>Hạ tầng Test độc lập trên JVM</a:t>
+              <a:t>Các bảng quan hệ chính</a:t>
             </a:r>
           </a:p>
           <a:p>
@@ -4093,7 +4228,7 @@
               </a:defRPr>
             </a:pPr>
             <a:r>
-              <a:t>• MainDispatcherRule: Tự động quản lý TestDispatcher cho các Coroutine ViewModel.</a:t>
+              <a:t>• recipes: Bảng chính chứa thông tin công thức (PK: id, FK: categoryId).</a:t>
             </a:r>
           </a:p>
           <a:p>
@@ -4108,7 +4243,7 @@
               </a:defRPr>
             </a:pPr>
             <a:r>
-              <a:t>• Chuyển đổi sang java.util.Base64: Giúp kiểm thử AI xử lý ảnh chạy thuần túy trên JVM mà không ném lỗi Stub.</a:t>
+              <a:t>• ingredients: Nguyên liệu (FK: recipeId có ràng buộc CASCADE xóa tự động).</a:t>
             </a:r>
           </a:p>
           <a:p>
@@ -4123,7 +4258,37 @@
               </a:defRPr>
             </a:pPr>
             <a:r>
-              <a:t>• Turbine Framework: Kiểm tra chính xác từng giá trị phát xạ của StateFlow có WhileSubscribed.</a:t>
+              <a:t>• steps: Các bước thực hiện (FK: recipeId có ràng buộc CASCADE).</a:t>
+            </a:r>
+          </a:p>
+          <a:p>
+            <a:pPr>
+              <a:spcAft>
+                <a:spcPts val="800"/>
+              </a:spcAft>
+              <a:defRPr sz="1300">
+                <a:solidFill>
+                  <a:srgbClr val="212529"/>
+                </a:solidFill>
+              </a:defRPr>
+            </a:pPr>
+            <a:r>
+              <a:t>• categories: Danh mục món ăn có màu sắc và icon trực quan.</a:t>
+            </a:r>
+          </a:p>
+          <a:p>
+            <a:pPr>
+              <a:spcAft>
+                <a:spcPts val="800"/>
+              </a:spcAft>
+              <a:defRPr sz="1300">
+                <a:solidFill>
+                  <a:srgbClr val="212529"/>
+                </a:solidFill>
+              </a:defRPr>
+            </a:pPr>
+            <a:r>
+              <a:t>• pantry_items: Nguyên liệu thực tế trong tủ lạnh và ngưỡng sắp hết.</a:t>
             </a:r>
           </a:p>
         </p:txBody>
@@ -4170,6 +4335,7 @@
           <a:lstStyle/>
           <a:p>
             <a:pPr algn="ctr"/>
+            <a:endParaRPr/>
           </a:p>
         </p:txBody>
       </p:sp>
@@ -4199,14 +4365,14 @@
               <a:spcAft>
                 <a:spcPts val="1000"/>
               </a:spcAft>
-              <a:defRPr b="1" sz="1600">
+              <a:defRPr sz="1600" b="1">
                 <a:solidFill>
                   <a:srgbClr val="1B4F72"/>
                 </a:solidFill>
               </a:defRPr>
             </a:pPr>
             <a:r>
-              <a:t>Kết quả nghiệm thu thực tế</a:t>
+              <a:t>Nhật ký &amp; Lịch sử hỗ trợ</a:t>
             </a:r>
           </a:p>
           <a:p>
@@ -4221,7 +4387,7 @@
               </a:defRPr>
             </a:pPr>
             <a:r>
-              <a:t>• CookbookRepositoryTest: Xác thực tính toàn vẹn Transaction khi thêm/sửa món.</a:t>
+              <a:t>• cook_history: Ghi nhận lịch sử mỗi lần nấu món ăn (FK: recipeId).</a:t>
             </a:r>
           </a:p>
           <a:p>
@@ -4236,7 +4402,7 @@
               </a:defRPr>
             </a:pPr>
             <a:r>
-              <a:t>• 10 ViewModel Tests: Kiểm tra 100% các trạng thái Loading, Content, Empty, Error.</a:t>
+              <a:t>• tags &amp; recipe_tag_cross_ref: Quan hệ N-N cho phép gắn nhiều nhãn linh hoạt.</a:t>
             </a:r>
           </a:p>
           <a:p>
@@ -4251,7 +4417,7 @@
               </a:defRPr>
             </a:pPr>
             <a:r>
-              <a:t>• RuleBasedAiTest: Đảm bảo thuật toán lọc món nhanh, ăn chay hoạt động chính xác.</a:t>
+              <a:t>• chat_messages: Lưu trữ toàn bộ hội thoại với trợ lý AI.</a:t>
             </a:r>
           </a:p>
           <a:p>
@@ -4266,11 +4432,7 @@
               </a:defRPr>
             </a:pPr>
             <a:r>
-              <a:t>• Kết quả kiểm thử: 100/100 tests PASSED (100%) trong 11.5s.</a:t>
-            </a:r>
-            <a:br/>
-            <a:r>
-              <a:t>Biên dịch APK thành công: ./gradlew :app:assembleDebug.</a:t>
+              <a:t>• ai_query_logs: Theo dõi độ trễ và tỷ lệ thành công của các lượt gọi mạng.</a:t>
             </a:r>
           </a:p>
         </p:txBody>
@@ -4284,7 +4446,7 @@
 </file>
 
 <file path=ppt/slides/slide13.xml><?xml version="1.0" encoding="utf-8"?>
-<p:sld xmlns:a="http://schemas.openxmlformats.org/drawingml/2006/main" xmlns:p="http://schemas.openxmlformats.org/presentationml/2006/main" xmlns:r="http://schemas.openxmlformats.org/officeDocument/2006/relationships">
+<p:sld xmlns:a="http://schemas.openxmlformats.org/drawingml/2006/main" xmlns:r="http://schemas.openxmlformats.org/officeDocument/2006/relationships" xmlns:p="http://schemas.openxmlformats.org/presentationml/2006/main">
   <p:cSld>
     <p:spTree>
       <p:nvGrpSpPr>
@@ -4292,7 +4454,14 @@
         <p:cNvGrpSpPr/>
         <p:nvPr/>
       </p:nvGrpSpPr>
-      <p:grpSpPr/>
+      <p:grpSpPr>
+        <a:xfrm>
+          <a:off x="0" y="0"/>
+          <a:ext cx="0" cy="0"/>
+          <a:chOff x="0" y="0"/>
+          <a:chExt cx="0" cy="0"/>
+        </a:xfrm>
+      </p:grpSpPr>
       <p:sp>
         <p:nvSpPr>
           <p:cNvPr id="2" name="TextBox 1"/>
@@ -4323,7 +4492,7 @@
               </a:defRPr>
             </a:pPr>
             <a:r>
-              <a:t>TỔNG KẾT ĐỀ TÀI</a:t>
+              <a:t>ĐẢM BẢO CHẤT LƯỢNG</a:t>
             </a:r>
           </a:p>
           <a:p>
@@ -4338,7 +4507,7 @@
               </a:defRPr>
             </a:pPr>
             <a:r>
-              <a:t>12. Đánh giá Kết quả Đạt được &amp; Hạn chế</a:t>
+              <a:t>11. Chiến lược Kiểm thử Tự động (100/100 Tests Passed)</a:t>
             </a:r>
           </a:p>
         </p:txBody>
@@ -4385,6 +4554,7 @@
           <a:lstStyle/>
           <a:p>
             <a:pPr algn="ctr"/>
+            <a:endParaRPr/>
           </a:p>
         </p:txBody>
       </p:sp>
@@ -4414,14 +4584,14 @@
               <a:spcAft>
                 <a:spcPts val="1000"/>
               </a:spcAft>
-              <a:defRPr b="1" sz="1600">
+              <a:defRPr sz="1600" b="1">
                 <a:solidFill>
                   <a:srgbClr val="1B4F72"/>
                 </a:solidFill>
               </a:defRPr>
             </a:pPr>
             <a:r>
-              <a:t>Thành quả nổi bật</a:t>
+              <a:t>Hạ tầng Test độc lập trên JVM</a:t>
             </a:r>
           </a:p>
           <a:p>
@@ -4436,7 +4606,7 @@
               </a:defRPr>
             </a:pPr>
             <a:r>
-              <a:t>• Hoàn thành toàn diện một ứng dụng Android hoàn chỉnh, sẵn sàng cài đặt thực tế.</a:t>
+              <a:t>• MainDispatcherRule: Tự động quản lý TestDispatcher cho các Coroutine ViewModel.</a:t>
             </a:r>
           </a:p>
           <a:p>
@@ -4451,7 +4621,7 @@
               </a:defRPr>
             </a:pPr>
             <a:r>
-              <a:t>• Kiến trúc MVVM + UDF chuyên nghiệp, đáp ứng các tiêu chuẩn khắt khe nhất của Google.</a:t>
+              <a:t>• Chuyển đổi sang java.util.Base64: Giúp kiểm thử AI xử lý ảnh chạy thuần túy trên JVM mà không ném lỗi Stub.</a:t>
             </a:r>
           </a:p>
           <a:p>
@@ -4466,22 +4636,7 @@
               </a:defRPr>
             </a:pPr>
             <a:r>
-              <a:t>• Hoạt động ngoại tuyến mạnh mẽ kết hợp hài hòa cùng công nghệ AI thời thượng.</a:t>
-            </a:r>
-          </a:p>
-          <a:p>
-            <a:pPr>
-              <a:spcAft>
-                <a:spcPts val="800"/>
-              </a:spcAft>
-              <a:defRPr sz="1300">
-                <a:solidFill>
-                  <a:srgbClr val="212529"/>
-                </a:solidFill>
-              </a:defRPr>
-            </a:pPr>
-            <a:r>
-              <a:t>• Hệ thống kiểm thử tự động vững chắc, dễ dàng bảo trì và mở rộng trong tương lai.</a:t>
+              <a:t>• Turbine Framework: Kiểm tra chính xác từng giá trị phát xạ của StateFlow có WhileSubscribed.</a:t>
             </a:r>
           </a:p>
         </p:txBody>
@@ -4528,6 +4683,7 @@
           <a:lstStyle/>
           <a:p>
             <a:pPr algn="ctr"/>
+            <a:endParaRPr/>
           </a:p>
         </p:txBody>
       </p:sp>
@@ -4557,14 +4713,14 @@
               <a:spcAft>
                 <a:spcPts val="1000"/>
               </a:spcAft>
-              <a:defRPr b="1" sz="1600">
+              <a:defRPr sz="1600" b="1">
                 <a:solidFill>
                   <a:srgbClr val="1B4F72"/>
                 </a:solidFill>
               </a:defRPr>
             </a:pPr>
             <a:r>
-              <a:t>Hạn chế cần khắc phục</a:t>
+              <a:t>Kết quả nghiệm thu thực tế</a:t>
             </a:r>
           </a:p>
           <a:p>
@@ -4579,7 +4735,7 @@
               </a:defRPr>
             </a:pPr>
             <a:r>
-              <a:t>• Tính năng quét ảnh món ăn bằng CameraX mới dừng ở mức cấu hình dependency, chưa tích hợp UI chụp trực tiếp.</a:t>
+              <a:t>• CookbookRepositoryTest: Xác thực tính toàn vẹn Transaction khi thêm/sửa món.</a:t>
             </a:r>
           </a:p>
           <a:p>
@@ -4594,7 +4750,41 @@
               </a:defRPr>
             </a:pPr>
             <a:r>
-              <a:t>• Chưa hỗ trợ đồng bộ đám mây đa thiết bị (Cloud Sync) do ưu tiên tính riêng tư dữ liệu cục bộ.</a:t>
+              <a:t>• 10 ViewModel Tests: Kiểm tra 100% các trạng thái Loading, Content, Empty, Error.</a:t>
+            </a:r>
+          </a:p>
+          <a:p>
+            <a:pPr>
+              <a:spcAft>
+                <a:spcPts val="800"/>
+              </a:spcAft>
+              <a:defRPr sz="1300">
+                <a:solidFill>
+                  <a:srgbClr val="212529"/>
+                </a:solidFill>
+              </a:defRPr>
+            </a:pPr>
+            <a:r>
+              <a:t>• RuleBasedAiTest: Đảm bảo thuật toán lọc món nhanh, ăn chay hoạt động chính xác.</a:t>
+            </a:r>
+          </a:p>
+          <a:p>
+            <a:pPr>
+              <a:spcAft>
+                <a:spcPts val="800"/>
+              </a:spcAft>
+              <a:defRPr sz="1300">
+                <a:solidFill>
+                  <a:srgbClr val="212529"/>
+                </a:solidFill>
+              </a:defRPr>
+            </a:pPr>
+            <a:r>
+              <a:t>• Kết quả kiểm thử: 100/100 tests PASSED (100%) trong 11.5s.</a:t>
+            </a:r>
+            <a:br/>
+            <a:r>
+              <a:t>Biên dịch APK thành công: ./gradlew :app:assembleDebug.</a:t>
             </a:r>
           </a:p>
         </p:txBody>
@@ -4608,7 +4798,7 @@
 </file>
 
 <file path=ppt/slides/slide14.xml><?xml version="1.0" encoding="utf-8"?>
-<p:sld xmlns:a="http://schemas.openxmlformats.org/drawingml/2006/main" xmlns:p="http://schemas.openxmlformats.org/presentationml/2006/main" xmlns:r="http://schemas.openxmlformats.org/officeDocument/2006/relationships">
+<p:sld xmlns:a="http://schemas.openxmlformats.org/drawingml/2006/main" xmlns:r="http://schemas.openxmlformats.org/officeDocument/2006/relationships" xmlns:p="http://schemas.openxmlformats.org/presentationml/2006/main">
   <p:cSld>
     <p:spTree>
       <p:nvGrpSpPr>
@@ -4616,7 +4806,347 @@
         <p:cNvGrpSpPr/>
         <p:nvPr/>
       </p:nvGrpSpPr>
-      <p:grpSpPr/>
+      <p:grpSpPr>
+        <a:xfrm>
+          <a:off x="0" y="0"/>
+          <a:ext cx="0" cy="0"/>
+          <a:chOff x="0" y="0"/>
+          <a:chExt cx="0" cy="0"/>
+        </a:xfrm>
+      </p:grpSpPr>
+      <p:sp>
+        <p:nvSpPr>
+          <p:cNvPr id="2" name="TextBox 1"/>
+          <p:cNvSpPr txBox="1"/>
+          <p:nvPr/>
+        </p:nvSpPr>
+        <p:spPr>
+          <a:xfrm>
+            <a:off x="731520" y="365760"/>
+            <a:ext cx="10698480" cy="1097280"/>
+          </a:xfrm>
+          <a:prstGeom prst="rect">
+            <a:avLst/>
+          </a:prstGeom>
+          <a:noFill/>
+        </p:spPr>
+        <p:txBody>
+          <a:bodyPr wrap="square" lIns="0" tIns="0" rIns="0" bIns="0">
+            <a:spAutoFit/>
+          </a:bodyPr>
+          <a:lstStyle/>
+          <a:p>
+            <a:pPr>
+              <a:defRPr sz="1100" b="1">
+                <a:solidFill>
+                  <a:srgbClr val="E65100"/>
+                </a:solidFill>
+              </a:defRPr>
+            </a:pPr>
+            <a:r>
+              <a:t>TỔNG KẾT ĐỀ TÀI</a:t>
+            </a:r>
+          </a:p>
+          <a:p>
+            <a:pPr>
+              <a:spcBef>
+                <a:spcPts val="400"/>
+              </a:spcBef>
+              <a:defRPr sz="2400" b="1">
+                <a:solidFill>
+                  <a:srgbClr val="1B4F72"/>
+                </a:solidFill>
+              </a:defRPr>
+            </a:pPr>
+            <a:r>
+              <a:t>12. Đánh giá Kết quả Đạt được &amp; Hạn chế</a:t>
+            </a:r>
+          </a:p>
+        </p:txBody>
+      </p:sp>
+      <p:sp>
+        <p:nvSpPr>
+          <p:cNvPr id="3" name="Rounded Rectangle 2"/>
+          <p:cNvSpPr/>
+          <p:nvPr/>
+        </p:nvSpPr>
+        <p:spPr>
+          <a:xfrm>
+            <a:off x="731520" y="1645920"/>
+            <a:ext cx="5120640" cy="4572000"/>
+          </a:xfrm>
+          <a:prstGeom prst="roundRect">
+            <a:avLst/>
+          </a:prstGeom>
+          <a:solidFill>
+            <a:srgbClr val="EEF2F7"/>
+          </a:solidFill>
+          <a:ln w="12700">
+            <a:solidFill>
+              <a:srgbClr val="D0D7DE"/>
+            </a:solidFill>
+          </a:ln>
+        </p:spPr>
+        <p:style>
+          <a:lnRef idx="1">
+            <a:schemeClr val="accent1"/>
+          </a:lnRef>
+          <a:fillRef idx="3">
+            <a:schemeClr val="accent1"/>
+          </a:fillRef>
+          <a:effectRef idx="2">
+            <a:schemeClr val="accent1"/>
+          </a:effectRef>
+          <a:fontRef idx="minor">
+            <a:schemeClr val="lt1"/>
+          </a:fontRef>
+        </p:style>
+        <p:txBody>
+          <a:bodyPr rtlCol="0" anchor="ctr"/>
+          <a:lstStyle/>
+          <a:p>
+            <a:pPr algn="ctr"/>
+            <a:endParaRPr/>
+          </a:p>
+        </p:txBody>
+      </p:sp>
+      <p:sp>
+        <p:nvSpPr>
+          <p:cNvPr id="4" name="TextBox 3"/>
+          <p:cNvSpPr txBox="1"/>
+          <p:nvPr/>
+        </p:nvSpPr>
+        <p:spPr>
+          <a:xfrm>
+            <a:off x="960120" y="1828800"/>
+            <a:ext cx="4663440" cy="4206240"/>
+          </a:xfrm>
+          <a:prstGeom prst="rect">
+            <a:avLst/>
+          </a:prstGeom>
+          <a:noFill/>
+        </p:spPr>
+        <p:txBody>
+          <a:bodyPr wrap="square">
+            <a:spAutoFit/>
+          </a:bodyPr>
+          <a:lstStyle/>
+          <a:p>
+            <a:pPr>
+              <a:spcAft>
+                <a:spcPts val="1000"/>
+              </a:spcAft>
+              <a:defRPr sz="1600" b="1">
+                <a:solidFill>
+                  <a:srgbClr val="1B4F72"/>
+                </a:solidFill>
+              </a:defRPr>
+            </a:pPr>
+            <a:r>
+              <a:t>Thành quả nổi bật</a:t>
+            </a:r>
+          </a:p>
+          <a:p>
+            <a:pPr>
+              <a:spcAft>
+                <a:spcPts val="800"/>
+              </a:spcAft>
+              <a:defRPr sz="1300">
+                <a:solidFill>
+                  <a:srgbClr val="212529"/>
+                </a:solidFill>
+              </a:defRPr>
+            </a:pPr>
+            <a:r>
+              <a:t>• Hoàn thành toàn diện một ứng dụng Android hoàn chỉnh, sẵn sàng cài đặt thực tế.</a:t>
+            </a:r>
+          </a:p>
+          <a:p>
+            <a:pPr>
+              <a:spcAft>
+                <a:spcPts val="800"/>
+              </a:spcAft>
+              <a:defRPr sz="1300">
+                <a:solidFill>
+                  <a:srgbClr val="212529"/>
+                </a:solidFill>
+              </a:defRPr>
+            </a:pPr>
+            <a:r>
+              <a:t>• Kiến trúc MVVM + UDF chuyên nghiệp, đáp ứng các tiêu chuẩn khắt khe nhất của Google.</a:t>
+            </a:r>
+          </a:p>
+          <a:p>
+            <a:pPr>
+              <a:spcAft>
+                <a:spcPts val="800"/>
+              </a:spcAft>
+              <a:defRPr sz="1300">
+                <a:solidFill>
+                  <a:srgbClr val="212529"/>
+                </a:solidFill>
+              </a:defRPr>
+            </a:pPr>
+            <a:r>
+              <a:t>• Hoạt động ngoại tuyến mạnh mẽ kết hợp hài hòa cùng công nghệ AI thời thượng.</a:t>
+            </a:r>
+          </a:p>
+          <a:p>
+            <a:pPr>
+              <a:spcAft>
+                <a:spcPts val="800"/>
+              </a:spcAft>
+              <a:defRPr sz="1300">
+                <a:solidFill>
+                  <a:srgbClr val="212529"/>
+                </a:solidFill>
+              </a:defRPr>
+            </a:pPr>
+            <a:r>
+              <a:t>• Hệ thống kiểm thử tự động vững chắc, dễ dàng bảo trì và mở rộng trong tương lai.</a:t>
+            </a:r>
+          </a:p>
+        </p:txBody>
+      </p:sp>
+      <p:sp>
+        <p:nvSpPr>
+          <p:cNvPr id="5" name="Rounded Rectangle 4"/>
+          <p:cNvSpPr/>
+          <p:nvPr/>
+        </p:nvSpPr>
+        <p:spPr>
+          <a:xfrm>
+            <a:off x="6217920" y="1645920"/>
+            <a:ext cx="5212080" cy="4572000"/>
+          </a:xfrm>
+          <a:prstGeom prst="roundRect">
+            <a:avLst/>
+          </a:prstGeom>
+          <a:solidFill>
+            <a:srgbClr val="EEF2F7"/>
+          </a:solidFill>
+          <a:ln w="12700">
+            <a:solidFill>
+              <a:srgbClr val="D0D7DE"/>
+            </a:solidFill>
+          </a:ln>
+        </p:spPr>
+        <p:style>
+          <a:lnRef idx="1">
+            <a:schemeClr val="accent1"/>
+          </a:lnRef>
+          <a:fillRef idx="3">
+            <a:schemeClr val="accent1"/>
+          </a:fillRef>
+          <a:effectRef idx="2">
+            <a:schemeClr val="accent1"/>
+          </a:effectRef>
+          <a:fontRef idx="minor">
+            <a:schemeClr val="lt1"/>
+          </a:fontRef>
+        </p:style>
+        <p:txBody>
+          <a:bodyPr rtlCol="0" anchor="ctr"/>
+          <a:lstStyle/>
+          <a:p>
+            <a:pPr algn="ctr"/>
+            <a:endParaRPr/>
+          </a:p>
+        </p:txBody>
+      </p:sp>
+      <p:sp>
+        <p:nvSpPr>
+          <p:cNvPr id="6" name="TextBox 5"/>
+          <p:cNvSpPr txBox="1"/>
+          <p:nvPr/>
+        </p:nvSpPr>
+        <p:spPr>
+          <a:xfrm>
+            <a:off x="6446520" y="1828800"/>
+            <a:ext cx="4754880" cy="4206240"/>
+          </a:xfrm>
+          <a:prstGeom prst="rect">
+            <a:avLst/>
+          </a:prstGeom>
+          <a:noFill/>
+        </p:spPr>
+        <p:txBody>
+          <a:bodyPr wrap="square">
+            <a:spAutoFit/>
+          </a:bodyPr>
+          <a:lstStyle/>
+          <a:p>
+            <a:pPr>
+              <a:spcAft>
+                <a:spcPts val="1000"/>
+              </a:spcAft>
+              <a:defRPr sz="1600" b="1">
+                <a:solidFill>
+                  <a:srgbClr val="1B4F72"/>
+                </a:solidFill>
+              </a:defRPr>
+            </a:pPr>
+            <a:r>
+              <a:t>Hạn chế cần khắc phục</a:t>
+            </a:r>
+          </a:p>
+          <a:p>
+            <a:pPr>
+              <a:spcAft>
+                <a:spcPts val="800"/>
+              </a:spcAft>
+              <a:defRPr sz="1300">
+                <a:solidFill>
+                  <a:srgbClr val="212529"/>
+                </a:solidFill>
+              </a:defRPr>
+            </a:pPr>
+            <a:r>
+              <a:t>• Tính năng quét ảnh món ăn bằng CameraX mới dừng ở mức cấu hình dependency, chưa tích hợp UI chụp trực tiếp.</a:t>
+            </a:r>
+          </a:p>
+          <a:p>
+            <a:pPr>
+              <a:spcAft>
+                <a:spcPts val="800"/>
+              </a:spcAft>
+              <a:defRPr sz="1300">
+                <a:solidFill>
+                  <a:srgbClr val="212529"/>
+                </a:solidFill>
+              </a:defRPr>
+            </a:pPr>
+            <a:r>
+              <a:t>• Chưa hỗ trợ đồng bộ đám mây đa thiết bị (Cloud Sync) do ưu tiên tính riêng tư dữ liệu cục bộ.</a:t>
+            </a:r>
+          </a:p>
+        </p:txBody>
+      </p:sp>
+    </p:spTree>
+  </p:cSld>
+  <p:clrMapOvr>
+    <a:masterClrMapping/>
+  </p:clrMapOvr>
+</p:sld>
+</file>
+
+<file path=ppt/slides/slide15.xml><?xml version="1.0" encoding="utf-8"?>
+<p:sld xmlns:a="http://schemas.openxmlformats.org/drawingml/2006/main" xmlns:r="http://schemas.openxmlformats.org/officeDocument/2006/relationships" xmlns:p="http://schemas.openxmlformats.org/presentationml/2006/main">
+  <p:cSld>
+    <p:spTree>
+      <p:nvGrpSpPr>
+        <p:cNvPr id="1" name=""/>
+        <p:cNvGrpSpPr/>
+        <p:nvPr/>
+      </p:nvGrpSpPr>
+      <p:grpSpPr>
+        <a:xfrm>
+          <a:off x="0" y="0"/>
+          <a:ext cx="0" cy="0"/>
+          <a:chOff x="0" y="0"/>
+          <a:chExt cx="0" cy="0"/>
+        </a:xfrm>
+      </p:grpSpPr>
       <p:sp>
         <p:nvSpPr>
           <p:cNvPr id="2" name="TextBox 1"/>
@@ -4709,6 +5239,7 @@
           <a:lstStyle/>
           <a:p>
             <a:pPr algn="ctr"/>
+            <a:endParaRPr/>
           </a:p>
         </p:txBody>
       </p:sp>
@@ -4738,7 +5269,7 @@
               <a:spcAft>
                 <a:spcPts val="1000"/>
               </a:spcAft>
-              <a:defRPr b="1" sz="1600">
+              <a:defRPr sz="1600" b="1">
                 <a:solidFill>
                   <a:srgbClr val="1B4F72"/>
                 </a:solidFill>
@@ -4822,6 +5353,7 @@
           <a:lstStyle/>
           <a:p>
             <a:pPr algn="ctr"/>
+            <a:endParaRPr/>
           </a:p>
         </p:txBody>
       </p:sp>
@@ -4851,7 +5383,7 @@
               <a:spcAft>
                 <a:spcPts val="1000"/>
               </a:spcAft>
-              <a:defRPr b="1" sz="1600">
+              <a:defRPr sz="1600" b="1">
                 <a:solidFill>
                   <a:srgbClr val="1B4F72"/>
                 </a:solidFill>
@@ -4935,6 +5467,7 @@
           <a:lstStyle/>
           <a:p>
             <a:pPr algn="ctr"/>
+            <a:endParaRPr/>
           </a:p>
         </p:txBody>
       </p:sp>
@@ -4964,7 +5497,7 @@
               <a:spcAft>
                 <a:spcPts val="1000"/>
               </a:spcAft>
-              <a:defRPr b="1" sz="1600">
+              <a:defRPr sz="1600" b="1">
                 <a:solidFill>
                   <a:srgbClr val="1B4F72"/>
                 </a:solidFill>
@@ -5014,8 +5547,8 @@
 </p:sld>
 </file>
 
-<file path=ppt/slides/slide15.xml><?xml version="1.0" encoding="utf-8"?>
-<p:sld xmlns:a="http://schemas.openxmlformats.org/drawingml/2006/main" xmlns:p="http://schemas.openxmlformats.org/presentationml/2006/main" xmlns:r="http://schemas.openxmlformats.org/officeDocument/2006/relationships">
+<file path=ppt/slides/slide16.xml><?xml version="1.0" encoding="utf-8"?>
+<p:sld xmlns:a="http://schemas.openxmlformats.org/drawingml/2006/main" xmlns:r="http://schemas.openxmlformats.org/officeDocument/2006/relationships" xmlns:p="http://schemas.openxmlformats.org/presentationml/2006/main">
   <p:cSld>
     <p:spTree>
       <p:nvGrpSpPr>
@@ -5023,7 +5556,14 @@
         <p:cNvGrpSpPr/>
         <p:nvPr/>
       </p:nvGrpSpPr>
-      <p:grpSpPr/>
+      <p:grpSpPr>
+        <a:xfrm>
+          <a:off x="0" y="0"/>
+          <a:ext cx="0" cy="0"/>
+          <a:chOff x="0" y="0"/>
+          <a:chExt cx="0" cy="0"/>
+        </a:xfrm>
+      </p:grpSpPr>
       <p:sp>
         <p:nvSpPr>
           <p:cNvPr id="2" name="Rectangle 1"/>
@@ -5064,6 +5604,7 @@
           <a:lstStyle/>
           <a:p>
             <a:pPr algn="ctr"/>
+            <a:endParaRPr/>
           </a:p>
         </p:txBody>
       </p:sp>
@@ -5075,8 +5616,8 @@
         </p:nvSpPr>
         <p:spPr>
           <a:xfrm>
-            <a:off x="914400" y="1371600"/>
-            <a:ext cx="10332720" cy="4114800"/>
+            <a:off x="929487" y="2551837"/>
+            <a:ext cx="10332720" cy="1754326"/>
           </a:xfrm>
           <a:prstGeom prst="rect">
             <a:avLst/>
@@ -5097,38 +5638,8 @@
               </a:defRPr>
             </a:pPr>
             <a:r>
+              <a:rPr sz="5400" dirty="0"/>
               <a:t>XIN TRÂN TRỌNG CẢM ƠN THẦY VÀ CÁC BẠN ĐÃ LẮNG NGHE!</a:t>
-            </a:r>
-          </a:p>
-          <a:p>
-            <a:br/>
-            <a:br/>
-            <a:pPr algn="ctr">
-              <a:defRPr sz="1600">
-                <a:solidFill>
-                  <a:srgbClr val="E0E0E0"/>
-                </a:solidFill>
-              </a:defRPr>
-            </a:pPr>
-            <a:r>
-              <a:t>Nhóm chúng em rất mong nhận được những lời nhận xét, góp ý quý báu từ Thầy</a:t>
-            </a:r>
-            <a:br/>
-            <a:r>
-              <a:t>để đề tài Cooking Note ngày càng hoàn thiện hơn.</a:t>
-            </a:r>
-          </a:p>
-          <a:p>
-            <a:br/>
-            <a:pPr algn="ctr">
-              <a:defRPr sz="2200" b="1">
-                <a:solidFill>
-                  <a:srgbClr val="FFA726"/>
-                </a:solidFill>
-              </a:defRPr>
-            </a:pPr>
-            <a:r>
-              <a:t>❓ Q &amp; A — CÂU HỎI VÀ THẢO LUẬN</a:t>
             </a:r>
           </a:p>
         </p:txBody>
@@ -5142,7 +5653,7 @@
 </file>
 
 <file path=ppt/slides/slide2.xml><?xml version="1.0" encoding="utf-8"?>
-<p:sld xmlns:a="http://schemas.openxmlformats.org/drawingml/2006/main" xmlns:p="http://schemas.openxmlformats.org/presentationml/2006/main" xmlns:r="http://schemas.openxmlformats.org/officeDocument/2006/relationships">
+<p:sld xmlns:a="http://schemas.openxmlformats.org/drawingml/2006/main" xmlns:r="http://schemas.openxmlformats.org/officeDocument/2006/relationships" xmlns:p="http://schemas.openxmlformats.org/presentationml/2006/main">
   <p:cSld>
     <p:spTree>
       <p:nvGrpSpPr>
@@ -5150,7 +5661,44 @@
         <p:cNvGrpSpPr/>
         <p:nvPr/>
       </p:nvGrpSpPr>
-      <p:grpSpPr/>
+      <p:grpSpPr>
+        <a:xfrm>
+          <a:off x="0" y="0"/>
+          <a:ext cx="0" cy="0"/>
+          <a:chOff x="0" y="0"/>
+          <a:chExt cx="0" cy="0"/>
+        </a:xfrm>
+      </p:grpSpPr>
+    </p:spTree>
+    <p:extLst>
+      <p:ext uri="{BB962C8B-B14F-4D97-AF65-F5344CB8AC3E}">
+        <p14:creationId xmlns:p14="http://schemas.microsoft.com/office/powerpoint/2010/main" val="3590799977"/>
+      </p:ext>
+    </p:extLst>
+  </p:cSld>
+  <p:clrMapOvr>
+    <a:masterClrMapping/>
+  </p:clrMapOvr>
+</p:sld>
+</file>
+
+<file path=ppt/slides/slide3.xml><?xml version="1.0" encoding="utf-8"?>
+<p:sld xmlns:a="http://schemas.openxmlformats.org/drawingml/2006/main" xmlns:r="http://schemas.openxmlformats.org/officeDocument/2006/relationships" xmlns:p="http://schemas.openxmlformats.org/presentationml/2006/main">
+  <p:cSld>
+    <p:spTree>
+      <p:nvGrpSpPr>
+        <p:cNvPr id="1" name=""/>
+        <p:cNvGrpSpPr/>
+        <p:nvPr/>
+      </p:nvGrpSpPr>
+      <p:grpSpPr>
+        <a:xfrm>
+          <a:off x="0" y="0"/>
+          <a:ext cx="0" cy="0"/>
+          <a:chOff x="0" y="0"/>
+          <a:chExt cx="0" cy="0"/>
+        </a:xfrm>
+      </p:grpSpPr>
       <p:sp>
         <p:nvSpPr>
           <p:cNvPr id="2" name="TextBox 1"/>
@@ -5243,6 +5791,7 @@
           <a:lstStyle/>
           <a:p>
             <a:pPr algn="ctr"/>
+            <a:endParaRPr/>
           </a:p>
         </p:txBody>
       </p:sp>
@@ -5254,7 +5803,7 @@
         </p:nvSpPr>
         <p:spPr>
           <a:xfrm>
-            <a:off x="960120" y="1828800"/>
+            <a:off x="960120" y="1901952"/>
             <a:ext cx="4663440" cy="4206240"/>
           </a:xfrm>
           <a:prstGeom prst="rect">
@@ -5272,15 +5821,73 @@
               <a:spcAft>
                 <a:spcPts val="1000"/>
               </a:spcAft>
-              <a:defRPr b="1" sz="1600">
+              <a:defRPr sz="1600" b="1">
                 <a:solidFill>
                   <a:srgbClr val="1B4F72"/>
                 </a:solidFill>
               </a:defRPr>
             </a:pPr>
             <a:r>
-              <a:t>Vấn đề của người nội trợ hiện đại</a:t>
-            </a:r>
+              <a:rPr dirty="0" err="1"/>
+              <a:t>Vấn</a:t>
+            </a:r>
+            <a:r>
+              <a:rPr dirty="0"/>
+              <a:t> </a:t>
+            </a:r>
+            <a:r>
+              <a:rPr dirty="0" err="1"/>
+              <a:t>đề</a:t>
+            </a:r>
+            <a:r>
+              <a:rPr dirty="0"/>
+              <a:t> </a:t>
+            </a:r>
+            <a:r>
+              <a:rPr dirty="0" err="1"/>
+              <a:t>của</a:t>
+            </a:r>
+            <a:r>
+              <a:rPr dirty="0"/>
+              <a:t> </a:t>
+            </a:r>
+            <a:r>
+              <a:rPr dirty="0" err="1"/>
+              <a:t>người</a:t>
+            </a:r>
+            <a:r>
+              <a:rPr dirty="0"/>
+              <a:t> </a:t>
+            </a:r>
+            <a:r>
+              <a:rPr dirty="0" err="1"/>
+              <a:t>nội</a:t>
+            </a:r>
+            <a:r>
+              <a:rPr dirty="0"/>
+              <a:t> </a:t>
+            </a:r>
+            <a:r>
+              <a:rPr dirty="0" err="1"/>
+              <a:t>trợ</a:t>
+            </a:r>
+            <a:r>
+              <a:rPr dirty="0"/>
+              <a:t> </a:t>
+            </a:r>
+            <a:r>
+              <a:rPr dirty="0" err="1"/>
+              <a:t>hiện</a:t>
+            </a:r>
+            <a:r>
+              <a:rPr dirty="0"/>
+              <a:t> </a:t>
+            </a:r>
+            <a:r>
+              <a:rPr dirty="0" err="1"/>
+              <a:t>đại</a:t>
+            </a:r>
+            <a:endParaRPr dirty="0"/>
           </a:p>
           <a:p>
             <a:pPr>
@@ -5294,7 +5901,136 @@
               </a:defRPr>
             </a:pPr>
             <a:r>
-              <a:t>• Câu hỏi hằng ngày: "Hôm nay ăn gì?" gây mất nhiều thời gian đắn đo suy nghĩ.</a:t>
+              <a:rPr dirty="0"/>
+              <a:t>• </a:t>
+            </a:r>
+            <a:r>
+              <a:rPr dirty="0" err="1"/>
+              <a:t>Câu</a:t>
+            </a:r>
+            <a:r>
+              <a:rPr dirty="0"/>
+              <a:t> </a:t>
+            </a:r>
+            <a:r>
+              <a:rPr dirty="0" err="1"/>
+              <a:t>hỏi</a:t>
+            </a:r>
+            <a:r>
+              <a:rPr dirty="0"/>
+              <a:t> </a:t>
+            </a:r>
+            <a:r>
+              <a:rPr dirty="0" err="1"/>
+              <a:t>hằng</a:t>
+            </a:r>
+            <a:r>
+              <a:rPr dirty="0"/>
+              <a:t> </a:t>
+            </a:r>
+            <a:r>
+              <a:rPr dirty="0" err="1"/>
+              <a:t>ngày</a:t>
+            </a:r>
+            <a:r>
+              <a:rPr dirty="0"/>
+              <a:t>: "</a:t>
+            </a:r>
+            <a:r>
+              <a:rPr dirty="0" err="1"/>
+              <a:t>Hôm</a:t>
+            </a:r>
+            <a:r>
+              <a:rPr dirty="0"/>
+              <a:t> nay </a:t>
+            </a:r>
+            <a:r>
+              <a:rPr dirty="0" err="1"/>
+              <a:t>ăn</a:t>
+            </a:r>
+            <a:r>
+              <a:rPr dirty="0"/>
+              <a:t> </a:t>
+            </a:r>
+            <a:r>
+              <a:rPr dirty="0" err="1"/>
+              <a:t>gì</a:t>
+            </a:r>
+            <a:r>
+              <a:rPr dirty="0"/>
+              <a:t>?" </a:t>
+            </a:r>
+            <a:r>
+              <a:rPr dirty="0" err="1"/>
+              <a:t>gây</a:t>
+            </a:r>
+            <a:r>
+              <a:rPr dirty="0"/>
+              <a:t> </a:t>
+            </a:r>
+            <a:r>
+              <a:rPr dirty="0" err="1"/>
+              <a:t>mất</a:t>
+            </a:r>
+            <a:r>
+              <a:rPr dirty="0"/>
+              <a:t> </a:t>
+            </a:r>
+            <a:r>
+              <a:rPr dirty="0" err="1"/>
+              <a:t>nhiều</a:t>
+            </a:r>
+            <a:r>
+              <a:rPr dirty="0"/>
+              <a:t> </a:t>
+            </a:r>
+            <a:r>
+              <a:rPr dirty="0" err="1"/>
+              <a:t>thời</a:t>
+            </a:r>
+            <a:r>
+              <a:rPr dirty="0"/>
+              <a:t> </a:t>
+            </a:r>
+            <a:r>
+              <a:rPr dirty="0" err="1"/>
+              <a:t>gian</a:t>
+            </a:r>
+            <a:r>
+              <a:rPr dirty="0"/>
+              <a:t> </a:t>
+            </a:r>
+            <a:r>
+              <a:rPr dirty="0" err="1"/>
+              <a:t>đắn</a:t>
+            </a:r>
+            <a:r>
+              <a:rPr dirty="0"/>
+              <a:t> </a:t>
+            </a:r>
+            <a:r>
+              <a:rPr dirty="0" err="1"/>
+              <a:t>đo</a:t>
+            </a:r>
+            <a:r>
+              <a:rPr dirty="0"/>
+              <a:t> </a:t>
+            </a:r>
+            <a:r>
+              <a:rPr dirty="0" err="1"/>
+              <a:t>suy</a:t>
+            </a:r>
+            <a:r>
+              <a:rPr dirty="0"/>
+              <a:t> </a:t>
+            </a:r>
+            <a:r>
+              <a:rPr dirty="0" err="1"/>
+              <a:t>nghĩ</a:t>
+            </a:r>
+            <a:r>
+              <a:rPr dirty="0"/>
+              <a:t>.</a:t>
             </a:r>
           </a:p>
           <a:p>
@@ -5309,7 +6045,136 @@
               </a:defRPr>
             </a:pPr>
             <a:r>
-              <a:t>• Nguyên liệu thừa trong tủ lạnh dễ bị quên lãng, hết hạn gây lãng phí thực phẩm.</a:t>
+              <a:rPr dirty="0"/>
+              <a:t>• Nguyên </a:t>
+            </a:r>
+            <a:r>
+              <a:rPr dirty="0" err="1"/>
+              <a:t>liệu</a:t>
+            </a:r>
+            <a:r>
+              <a:rPr dirty="0"/>
+              <a:t> </a:t>
+            </a:r>
+            <a:r>
+              <a:rPr dirty="0" err="1"/>
+              <a:t>thừa</a:t>
+            </a:r>
+            <a:r>
+              <a:rPr dirty="0"/>
+              <a:t> </a:t>
+            </a:r>
+            <a:r>
+              <a:rPr dirty="0" err="1"/>
+              <a:t>trong</a:t>
+            </a:r>
+            <a:r>
+              <a:rPr dirty="0"/>
+              <a:t> </a:t>
+            </a:r>
+            <a:r>
+              <a:rPr dirty="0" err="1"/>
+              <a:t>tủ</a:t>
+            </a:r>
+            <a:r>
+              <a:rPr dirty="0"/>
+              <a:t> </a:t>
+            </a:r>
+            <a:r>
+              <a:rPr dirty="0" err="1"/>
+              <a:t>lạnh</a:t>
+            </a:r>
+            <a:r>
+              <a:rPr dirty="0"/>
+              <a:t> </a:t>
+            </a:r>
+            <a:r>
+              <a:rPr dirty="0" err="1"/>
+              <a:t>dễ</a:t>
+            </a:r>
+            <a:r>
+              <a:rPr dirty="0"/>
+              <a:t> </a:t>
+            </a:r>
+            <a:r>
+              <a:rPr dirty="0" err="1"/>
+              <a:t>bị</a:t>
+            </a:r>
+            <a:r>
+              <a:rPr dirty="0"/>
+              <a:t> </a:t>
+            </a:r>
+            <a:r>
+              <a:rPr dirty="0" err="1"/>
+              <a:t>quên</a:t>
+            </a:r>
+            <a:r>
+              <a:rPr dirty="0"/>
+              <a:t> </a:t>
+            </a:r>
+            <a:r>
+              <a:rPr dirty="0" err="1"/>
+              <a:t>lãng</a:t>
+            </a:r>
+            <a:r>
+              <a:rPr dirty="0"/>
+              <a:t>, </a:t>
+            </a:r>
+            <a:r>
+              <a:rPr dirty="0" err="1"/>
+              <a:t>hết</a:t>
+            </a:r>
+            <a:r>
+              <a:rPr dirty="0"/>
+              <a:t> </a:t>
+            </a:r>
+            <a:r>
+              <a:rPr dirty="0" err="1"/>
+              <a:t>hạn</a:t>
+            </a:r>
+            <a:r>
+              <a:rPr dirty="0"/>
+              <a:t> </a:t>
+            </a:r>
+            <a:r>
+              <a:rPr dirty="0" err="1"/>
+              <a:t>gây</a:t>
+            </a:r>
+            <a:r>
+              <a:rPr dirty="0"/>
+              <a:t> </a:t>
+            </a:r>
+            <a:r>
+              <a:rPr dirty="0" err="1"/>
+              <a:t>lãng</a:t>
+            </a:r>
+            <a:r>
+              <a:rPr dirty="0"/>
+              <a:t> </a:t>
+            </a:r>
+            <a:r>
+              <a:rPr dirty="0" err="1"/>
+              <a:t>phí</a:t>
+            </a:r>
+            <a:r>
+              <a:rPr dirty="0"/>
+              <a:t> </a:t>
+            </a:r>
+            <a:r>
+              <a:rPr dirty="0" err="1"/>
+              <a:t>thực</a:t>
+            </a:r>
+            <a:r>
+              <a:rPr dirty="0"/>
+              <a:t> </a:t>
+            </a:r>
+            <a:r>
+              <a:rPr dirty="0" err="1"/>
+              <a:t>phẩm</a:t>
+            </a:r>
+            <a:r>
+              <a:rPr dirty="0"/>
+              <a:t>.</a:t>
             </a:r>
           </a:p>
           <a:p>
@@ -5324,7 +6189,144 @@
               </a:defRPr>
             </a:pPr>
             <a:r>
-              <a:t>• Mất kết nối Internet trong phòng bếp, tầng hầm khiến việc tra cứu công thức bị gián đoạn.</a:t>
+              <a:rPr dirty="0"/>
+              <a:t>• </a:t>
+            </a:r>
+            <a:r>
+              <a:rPr dirty="0" err="1"/>
+              <a:t>Mất</a:t>
+            </a:r>
+            <a:r>
+              <a:rPr dirty="0"/>
+              <a:t> </a:t>
+            </a:r>
+            <a:r>
+              <a:rPr dirty="0" err="1"/>
+              <a:t>kết</a:t>
+            </a:r>
+            <a:r>
+              <a:rPr dirty="0"/>
+              <a:t> </a:t>
+            </a:r>
+            <a:r>
+              <a:rPr dirty="0" err="1"/>
+              <a:t>nối</a:t>
+            </a:r>
+            <a:r>
+              <a:rPr dirty="0"/>
+              <a:t> Internet </a:t>
+            </a:r>
+            <a:r>
+              <a:rPr dirty="0" err="1"/>
+              <a:t>trong</a:t>
+            </a:r>
+            <a:r>
+              <a:rPr dirty="0"/>
+              <a:t> </a:t>
+            </a:r>
+            <a:r>
+              <a:rPr dirty="0" err="1"/>
+              <a:t>phòng</a:t>
+            </a:r>
+            <a:r>
+              <a:rPr dirty="0"/>
+              <a:t> </a:t>
+            </a:r>
+            <a:r>
+              <a:rPr dirty="0" err="1"/>
+              <a:t>bếp</a:t>
+            </a:r>
+            <a:r>
+              <a:rPr dirty="0"/>
+              <a:t>, </a:t>
+            </a:r>
+            <a:r>
+              <a:rPr dirty="0" err="1"/>
+              <a:t>tầng</a:t>
+            </a:r>
+            <a:r>
+              <a:rPr dirty="0"/>
+              <a:t> </a:t>
+            </a:r>
+            <a:r>
+              <a:rPr dirty="0" err="1"/>
+              <a:t>hầm</a:t>
+            </a:r>
+            <a:r>
+              <a:rPr dirty="0"/>
+              <a:t> </a:t>
+            </a:r>
+            <a:r>
+              <a:rPr dirty="0" err="1"/>
+              <a:t>khiến</a:t>
+            </a:r>
+            <a:r>
+              <a:rPr dirty="0"/>
+              <a:t> </a:t>
+            </a:r>
+            <a:r>
+              <a:rPr dirty="0" err="1"/>
+              <a:t>việc</a:t>
+            </a:r>
+            <a:r>
+              <a:rPr dirty="0"/>
+              <a:t> </a:t>
+            </a:r>
+            <a:r>
+              <a:rPr dirty="0" err="1"/>
+              <a:t>tra</a:t>
+            </a:r>
+            <a:r>
+              <a:rPr dirty="0"/>
+              <a:t> </a:t>
+            </a:r>
+            <a:r>
+              <a:rPr dirty="0" err="1"/>
+              <a:t>cứu</a:t>
+            </a:r>
+            <a:r>
+              <a:rPr dirty="0"/>
+              <a:t> </a:t>
+            </a:r>
+            <a:r>
+              <a:rPr dirty="0" err="1"/>
+              <a:t>công</a:t>
+            </a:r>
+            <a:r>
+              <a:rPr dirty="0"/>
+              <a:t> </a:t>
+            </a:r>
+            <a:r>
+              <a:rPr dirty="0" err="1"/>
+              <a:t>thức</a:t>
+            </a:r>
+            <a:r>
+              <a:rPr dirty="0"/>
+              <a:t> </a:t>
+            </a:r>
+            <a:r>
+              <a:rPr dirty="0" err="1"/>
+              <a:t>bị</a:t>
+            </a:r>
+            <a:r>
+              <a:rPr dirty="0"/>
+              <a:t> </a:t>
+            </a:r>
+            <a:r>
+              <a:rPr dirty="0" err="1"/>
+              <a:t>gián</a:t>
+            </a:r>
+            <a:r>
+              <a:rPr dirty="0"/>
+              <a:t> </a:t>
+            </a:r>
+            <a:r>
+              <a:rPr dirty="0" err="1"/>
+              <a:t>đoạn</a:t>
+            </a:r>
+            <a:r>
+              <a:rPr dirty="0"/>
+              <a:t>.</a:t>
             </a:r>
           </a:p>
           <a:p>
@@ -5339,7 +6341,144 @@
               </a:defRPr>
             </a:pPr>
             <a:r>
-              <a:t>• Các ứng dụng hiện tại tràn ngập quảng cáo, thao tác phức tạp, thiếu tính cá nhân hóa.</a:t>
+              <a:rPr dirty="0"/>
+              <a:t>• Các </a:t>
+            </a:r>
+            <a:r>
+              <a:rPr dirty="0" err="1"/>
+              <a:t>ứng</a:t>
+            </a:r>
+            <a:r>
+              <a:rPr dirty="0"/>
+              <a:t> </a:t>
+            </a:r>
+            <a:r>
+              <a:rPr dirty="0" err="1"/>
+              <a:t>dụng</a:t>
+            </a:r>
+            <a:r>
+              <a:rPr dirty="0"/>
+              <a:t> </a:t>
+            </a:r>
+            <a:r>
+              <a:rPr dirty="0" err="1"/>
+              <a:t>hiện</a:t>
+            </a:r>
+            <a:r>
+              <a:rPr dirty="0"/>
+              <a:t> </a:t>
+            </a:r>
+            <a:r>
+              <a:rPr dirty="0" err="1"/>
+              <a:t>tại</a:t>
+            </a:r>
+            <a:r>
+              <a:rPr dirty="0"/>
+              <a:t> </a:t>
+            </a:r>
+            <a:r>
+              <a:rPr dirty="0" err="1"/>
+              <a:t>tràn</a:t>
+            </a:r>
+            <a:r>
+              <a:rPr dirty="0"/>
+              <a:t> </a:t>
+            </a:r>
+            <a:r>
+              <a:rPr dirty="0" err="1"/>
+              <a:t>ngập</a:t>
+            </a:r>
+            <a:r>
+              <a:rPr dirty="0"/>
+              <a:t> </a:t>
+            </a:r>
+            <a:r>
+              <a:rPr dirty="0" err="1"/>
+              <a:t>quảng</a:t>
+            </a:r>
+            <a:r>
+              <a:rPr dirty="0"/>
+              <a:t> </a:t>
+            </a:r>
+            <a:r>
+              <a:rPr dirty="0" err="1"/>
+              <a:t>cáo</a:t>
+            </a:r>
+            <a:r>
+              <a:rPr dirty="0"/>
+              <a:t>, </a:t>
+            </a:r>
+            <a:r>
+              <a:rPr dirty="0" err="1"/>
+              <a:t>thao</a:t>
+            </a:r>
+            <a:r>
+              <a:rPr dirty="0"/>
+              <a:t> </a:t>
+            </a:r>
+            <a:r>
+              <a:rPr dirty="0" err="1"/>
+              <a:t>tác</a:t>
+            </a:r>
+            <a:r>
+              <a:rPr dirty="0"/>
+              <a:t> </a:t>
+            </a:r>
+            <a:r>
+              <a:rPr dirty="0" err="1"/>
+              <a:t>phức</a:t>
+            </a:r>
+            <a:r>
+              <a:rPr dirty="0"/>
+              <a:t> </a:t>
+            </a:r>
+            <a:r>
+              <a:rPr dirty="0" err="1"/>
+              <a:t>tạp</a:t>
+            </a:r>
+            <a:r>
+              <a:rPr dirty="0"/>
+              <a:t>, </a:t>
+            </a:r>
+            <a:r>
+              <a:rPr dirty="0" err="1"/>
+              <a:t>thiếu</a:t>
+            </a:r>
+            <a:r>
+              <a:rPr dirty="0"/>
+              <a:t> </a:t>
+            </a:r>
+            <a:r>
+              <a:rPr dirty="0" err="1"/>
+              <a:t>tính</a:t>
+            </a:r>
+            <a:r>
+              <a:rPr dirty="0"/>
+              <a:t> </a:t>
+            </a:r>
+            <a:r>
+              <a:rPr dirty="0" err="1"/>
+              <a:t>cá</a:t>
+            </a:r>
+            <a:r>
+              <a:rPr dirty="0"/>
+              <a:t> </a:t>
+            </a:r>
+            <a:r>
+              <a:rPr dirty="0" err="1"/>
+              <a:t>nhân</a:t>
+            </a:r>
+            <a:r>
+              <a:rPr dirty="0"/>
+              <a:t> </a:t>
+            </a:r>
+            <a:r>
+              <a:rPr dirty="0" err="1"/>
+              <a:t>hóa</a:t>
+            </a:r>
+            <a:r>
+              <a:rPr dirty="0"/>
+              <a:t>.</a:t>
             </a:r>
           </a:p>
         </p:txBody>
@@ -5386,6 +6525,7 @@
           <a:lstStyle/>
           <a:p>
             <a:pPr algn="ctr"/>
+            <a:endParaRPr/>
           </a:p>
         </p:txBody>
       </p:sp>
@@ -5398,7 +6538,7 @@
         <p:spPr>
           <a:xfrm>
             <a:off x="6446520" y="1828800"/>
-            <a:ext cx="4754880" cy="4206240"/>
+            <a:ext cx="4754880" cy="2375009"/>
           </a:xfrm>
           <a:prstGeom prst="rect">
             <a:avLst/>
@@ -5415,15 +6555,65 @@
               <a:spcAft>
                 <a:spcPts val="1000"/>
               </a:spcAft>
-              <a:defRPr b="1" sz="1600">
+              <a:defRPr sz="1600" b="1">
                 <a:solidFill>
                   <a:srgbClr val="1B4F72"/>
                 </a:solidFill>
               </a:defRPr>
             </a:pPr>
             <a:r>
-              <a:t>Giải pháp của Cooking Note</a:t>
-            </a:r>
+              <a:rPr dirty="0" err="1"/>
+              <a:t>Giải</a:t>
+            </a:r>
+            <a:r>
+              <a:rPr dirty="0"/>
+              <a:t> </a:t>
+            </a:r>
+            <a:r>
+              <a:rPr dirty="0" err="1"/>
+              <a:t>pháp</a:t>
+            </a:r>
+            <a:r>
+              <a:rPr dirty="0"/>
+              <a:t> </a:t>
+            </a:r>
+            <a:r>
+              <a:rPr dirty="0" err="1"/>
+              <a:t>của</a:t>
+            </a:r>
+            <a:r>
+              <a:rPr dirty="0"/>
+              <a:t> </a:t>
+            </a:r>
+            <a:r>
+              <a:rPr lang="en-US" dirty="0" err="1"/>
+              <a:t>Sổ</a:t>
+            </a:r>
+            <a:r>
+              <a:rPr lang="en-US" dirty="0"/>
+              <a:t> </a:t>
+            </a:r>
+            <a:r>
+              <a:rPr lang="en-US" dirty="0" err="1"/>
+              <a:t>tay</a:t>
+            </a:r>
+            <a:r>
+              <a:rPr lang="en-US" dirty="0"/>
+              <a:t> </a:t>
+            </a:r>
+            <a:r>
+              <a:rPr lang="en-US" dirty="0" err="1"/>
+              <a:t>nấu</a:t>
+            </a:r>
+            <a:r>
+              <a:rPr lang="en-US" dirty="0"/>
+              <a:t> </a:t>
+            </a:r>
+            <a:r>
+              <a:rPr lang="en-US" dirty="0" err="1"/>
+              <a:t>ăn</a:t>
+            </a:r>
+            <a:endParaRPr dirty="0"/>
           </a:p>
           <a:p>
             <a:pPr>
@@ -5437,7 +6627,128 @@
               </a:defRPr>
             </a:pPr>
             <a:r>
-              <a:t>• Sổ tay Offline-First: Lưu trữ toàn bộ dữ liệu trên máy, tra cứu mọi lúc mọi nơi.</a:t>
+              <a:rPr dirty="0"/>
+              <a:t>• </a:t>
+            </a:r>
+            <a:r>
+              <a:rPr dirty="0" err="1"/>
+              <a:t>Sổ</a:t>
+            </a:r>
+            <a:r>
+              <a:rPr dirty="0"/>
+              <a:t> </a:t>
+            </a:r>
+            <a:r>
+              <a:rPr dirty="0" err="1"/>
+              <a:t>tay</a:t>
+            </a:r>
+            <a:r>
+              <a:rPr dirty="0"/>
+              <a:t> Offline-First: Lưu </a:t>
+            </a:r>
+            <a:r>
+              <a:rPr dirty="0" err="1"/>
+              <a:t>trữ</a:t>
+            </a:r>
+            <a:r>
+              <a:rPr dirty="0"/>
+              <a:t> </a:t>
+            </a:r>
+            <a:r>
+              <a:rPr dirty="0" err="1"/>
+              <a:t>toàn</a:t>
+            </a:r>
+            <a:r>
+              <a:rPr dirty="0"/>
+              <a:t> </a:t>
+            </a:r>
+            <a:r>
+              <a:rPr dirty="0" err="1"/>
+              <a:t>bộ</a:t>
+            </a:r>
+            <a:r>
+              <a:rPr dirty="0"/>
+              <a:t> </a:t>
+            </a:r>
+            <a:r>
+              <a:rPr dirty="0" err="1"/>
+              <a:t>dữ</a:t>
+            </a:r>
+            <a:r>
+              <a:rPr dirty="0"/>
+              <a:t> </a:t>
+            </a:r>
+            <a:r>
+              <a:rPr dirty="0" err="1"/>
+              <a:t>liệu</a:t>
+            </a:r>
+            <a:r>
+              <a:rPr dirty="0"/>
+              <a:t> </a:t>
+            </a:r>
+            <a:r>
+              <a:rPr dirty="0" err="1"/>
+              <a:t>trên</a:t>
+            </a:r>
+            <a:r>
+              <a:rPr dirty="0"/>
+              <a:t> </a:t>
+            </a:r>
+            <a:r>
+              <a:rPr dirty="0" err="1"/>
+              <a:t>máy</a:t>
+            </a:r>
+            <a:r>
+              <a:rPr dirty="0"/>
+              <a:t>, </a:t>
+            </a:r>
+            <a:r>
+              <a:rPr dirty="0" err="1"/>
+              <a:t>tra</a:t>
+            </a:r>
+            <a:r>
+              <a:rPr dirty="0"/>
+              <a:t> </a:t>
+            </a:r>
+            <a:r>
+              <a:rPr dirty="0" err="1"/>
+              <a:t>cứu</a:t>
+            </a:r>
+            <a:r>
+              <a:rPr dirty="0"/>
+              <a:t> </a:t>
+            </a:r>
+            <a:r>
+              <a:rPr dirty="0" err="1"/>
+              <a:t>mọi</a:t>
+            </a:r>
+            <a:r>
+              <a:rPr dirty="0"/>
+              <a:t> </a:t>
+            </a:r>
+            <a:r>
+              <a:rPr dirty="0" err="1"/>
+              <a:t>lúc</a:t>
+            </a:r>
+            <a:r>
+              <a:rPr dirty="0"/>
+              <a:t> </a:t>
+            </a:r>
+            <a:r>
+              <a:rPr dirty="0" err="1"/>
+              <a:t>mọi</a:t>
+            </a:r>
+            <a:r>
+              <a:rPr dirty="0"/>
+              <a:t> </a:t>
+            </a:r>
+            <a:r>
+              <a:rPr dirty="0" err="1"/>
+              <a:t>nơi</a:t>
+            </a:r>
+            <a:r>
+              <a:rPr dirty="0"/>
+              <a:t>.</a:t>
             </a:r>
           </a:p>
           <a:p>
@@ -5452,7 +6763,144 @@
               </a:defRPr>
             </a:pPr>
             <a:r>
-              <a:t>• Quản lý tủ lạnh thông minh (Pantry): Kết nối nguyên liệu sẵn có với gợi ý món ăn tương ứng.</a:t>
+              <a:rPr dirty="0"/>
+              <a:t>• Quản </a:t>
+            </a:r>
+            <a:r>
+              <a:rPr dirty="0" err="1"/>
+              <a:t>lý</a:t>
+            </a:r>
+            <a:r>
+              <a:rPr dirty="0"/>
+              <a:t> </a:t>
+            </a:r>
+            <a:r>
+              <a:rPr dirty="0" err="1"/>
+              <a:t>tủ</a:t>
+            </a:r>
+            <a:r>
+              <a:rPr dirty="0"/>
+              <a:t> </a:t>
+            </a:r>
+            <a:r>
+              <a:rPr dirty="0" err="1"/>
+              <a:t>lạnh</a:t>
+            </a:r>
+            <a:r>
+              <a:rPr dirty="0"/>
+              <a:t> </a:t>
+            </a:r>
+            <a:r>
+              <a:rPr dirty="0" err="1"/>
+              <a:t>thông</a:t>
+            </a:r>
+            <a:r>
+              <a:rPr dirty="0"/>
+              <a:t> </a:t>
+            </a:r>
+            <a:r>
+              <a:rPr dirty="0" err="1"/>
+              <a:t>minh</a:t>
+            </a:r>
+            <a:r>
+              <a:rPr dirty="0"/>
+              <a:t> (Pantry): </a:t>
+            </a:r>
+            <a:r>
+              <a:rPr dirty="0" err="1"/>
+              <a:t>Kết</a:t>
+            </a:r>
+            <a:r>
+              <a:rPr dirty="0"/>
+              <a:t> </a:t>
+            </a:r>
+            <a:r>
+              <a:rPr dirty="0" err="1"/>
+              <a:t>nối</a:t>
+            </a:r>
+            <a:r>
+              <a:rPr dirty="0"/>
+              <a:t> </a:t>
+            </a:r>
+            <a:r>
+              <a:rPr dirty="0" err="1"/>
+              <a:t>nguyên</a:t>
+            </a:r>
+            <a:r>
+              <a:rPr dirty="0"/>
+              <a:t> </a:t>
+            </a:r>
+            <a:r>
+              <a:rPr dirty="0" err="1"/>
+              <a:t>liệu</a:t>
+            </a:r>
+            <a:r>
+              <a:rPr dirty="0"/>
+              <a:t> </a:t>
+            </a:r>
+            <a:r>
+              <a:rPr dirty="0" err="1"/>
+              <a:t>sẵn</a:t>
+            </a:r>
+            <a:r>
+              <a:rPr dirty="0"/>
+              <a:t> </a:t>
+            </a:r>
+            <a:r>
+              <a:rPr dirty="0" err="1"/>
+              <a:t>có</a:t>
+            </a:r>
+            <a:r>
+              <a:rPr dirty="0"/>
+              <a:t> </a:t>
+            </a:r>
+            <a:r>
+              <a:rPr dirty="0" err="1"/>
+              <a:t>với</a:t>
+            </a:r>
+            <a:r>
+              <a:rPr dirty="0"/>
+              <a:t> </a:t>
+            </a:r>
+            <a:r>
+              <a:rPr dirty="0" err="1"/>
+              <a:t>gợi</a:t>
+            </a:r>
+            <a:r>
+              <a:rPr dirty="0"/>
+              <a:t> ý </a:t>
+            </a:r>
+            <a:r>
+              <a:rPr dirty="0" err="1"/>
+              <a:t>món</a:t>
+            </a:r>
+            <a:r>
+              <a:rPr dirty="0"/>
+              <a:t> </a:t>
+            </a:r>
+            <a:r>
+              <a:rPr dirty="0" err="1"/>
+              <a:t>ăn</a:t>
+            </a:r>
+            <a:r>
+              <a:rPr dirty="0"/>
+              <a:t> </a:t>
+            </a:r>
+            <a:r>
+              <a:rPr dirty="0" err="1"/>
+              <a:t>tương</a:t>
+            </a:r>
+            <a:r>
+              <a:rPr dirty="0"/>
+              <a:t> </a:t>
+            </a:r>
+            <a:r>
+              <a:rPr dirty="0" err="1"/>
+              <a:t>ứng</a:t>
+            </a:r>
+            <a:r>
+              <a:rPr dirty="0"/>
+              <a:t>.</a:t>
             </a:r>
           </a:p>
           <a:p>
@@ -5467,7 +6915,168 @@
               </a:defRPr>
             </a:pPr>
             <a:r>
-              <a:t>• Trợ lý AI đa nền tảng: Hỗ trợ chat hỏi đáp thực đơn, tự động nạp danh sách đồ trong tủ lạnh.</a:t>
+              <a:rPr dirty="0"/>
+              <a:t>• </a:t>
+            </a:r>
+            <a:r>
+              <a:rPr dirty="0" err="1"/>
+              <a:t>Trợ</a:t>
+            </a:r>
+            <a:r>
+              <a:rPr dirty="0"/>
+              <a:t> </a:t>
+            </a:r>
+            <a:r>
+              <a:rPr dirty="0" err="1"/>
+              <a:t>lý</a:t>
+            </a:r>
+            <a:r>
+              <a:rPr dirty="0"/>
+              <a:t> AI </a:t>
+            </a:r>
+            <a:r>
+              <a:rPr dirty="0" err="1"/>
+              <a:t>đa</a:t>
+            </a:r>
+            <a:r>
+              <a:rPr dirty="0"/>
+              <a:t> </a:t>
+            </a:r>
+            <a:r>
+              <a:rPr dirty="0" err="1"/>
+              <a:t>nền</a:t>
+            </a:r>
+            <a:r>
+              <a:rPr dirty="0"/>
+              <a:t> </a:t>
+            </a:r>
+            <a:r>
+              <a:rPr dirty="0" err="1"/>
+              <a:t>tảng</a:t>
+            </a:r>
+            <a:r>
+              <a:rPr dirty="0"/>
+              <a:t>: </a:t>
+            </a:r>
+            <a:r>
+              <a:rPr dirty="0" err="1"/>
+              <a:t>Hỗ</a:t>
+            </a:r>
+            <a:r>
+              <a:rPr dirty="0"/>
+              <a:t> </a:t>
+            </a:r>
+            <a:r>
+              <a:rPr dirty="0" err="1"/>
+              <a:t>trợ</a:t>
+            </a:r>
+            <a:r>
+              <a:rPr dirty="0"/>
+              <a:t> chat </a:t>
+            </a:r>
+            <a:r>
+              <a:rPr dirty="0" err="1"/>
+              <a:t>hỏi</a:t>
+            </a:r>
+            <a:r>
+              <a:rPr dirty="0"/>
+              <a:t> </a:t>
+            </a:r>
+            <a:r>
+              <a:rPr dirty="0" err="1"/>
+              <a:t>đáp</a:t>
+            </a:r>
+            <a:r>
+              <a:rPr dirty="0"/>
+              <a:t> </a:t>
+            </a:r>
+            <a:r>
+              <a:rPr dirty="0" err="1"/>
+              <a:t>thực</a:t>
+            </a:r>
+            <a:r>
+              <a:rPr dirty="0"/>
+              <a:t> </a:t>
+            </a:r>
+            <a:r>
+              <a:rPr dirty="0" err="1"/>
+              <a:t>đơn</a:t>
+            </a:r>
+            <a:r>
+              <a:rPr dirty="0"/>
+              <a:t>, </a:t>
+            </a:r>
+            <a:r>
+              <a:rPr dirty="0" err="1"/>
+              <a:t>tự</a:t>
+            </a:r>
+            <a:r>
+              <a:rPr dirty="0"/>
+              <a:t> </a:t>
+            </a:r>
+            <a:r>
+              <a:rPr dirty="0" err="1"/>
+              <a:t>động</a:t>
+            </a:r>
+            <a:r>
+              <a:rPr dirty="0"/>
+              <a:t> </a:t>
+            </a:r>
+            <a:r>
+              <a:rPr dirty="0" err="1"/>
+              <a:t>nạp</a:t>
+            </a:r>
+            <a:r>
+              <a:rPr dirty="0"/>
+              <a:t> </a:t>
+            </a:r>
+            <a:r>
+              <a:rPr dirty="0" err="1"/>
+              <a:t>danh</a:t>
+            </a:r>
+            <a:r>
+              <a:rPr dirty="0"/>
+              <a:t> </a:t>
+            </a:r>
+            <a:r>
+              <a:rPr dirty="0" err="1"/>
+              <a:t>sách</a:t>
+            </a:r>
+            <a:r>
+              <a:rPr dirty="0"/>
+              <a:t> </a:t>
+            </a:r>
+            <a:r>
+              <a:rPr dirty="0" err="1"/>
+              <a:t>đồ</a:t>
+            </a:r>
+            <a:r>
+              <a:rPr dirty="0"/>
+              <a:t> </a:t>
+            </a:r>
+            <a:r>
+              <a:rPr dirty="0" err="1"/>
+              <a:t>trong</a:t>
+            </a:r>
+            <a:r>
+              <a:rPr dirty="0"/>
+              <a:t> </a:t>
+            </a:r>
+            <a:r>
+              <a:rPr dirty="0" err="1"/>
+              <a:t>tủ</a:t>
+            </a:r>
+            <a:r>
+              <a:rPr dirty="0"/>
+              <a:t> </a:t>
+            </a:r>
+            <a:r>
+              <a:rPr dirty="0" err="1"/>
+              <a:t>lạnh</a:t>
+            </a:r>
+            <a:r>
+              <a:rPr dirty="0"/>
+              <a:t>.</a:t>
             </a:r>
           </a:p>
           <a:p>
@@ -5482,7 +7091,144 @@
               </a:defRPr>
             </a:pPr>
             <a:r>
-              <a:t>• Thuật toán ngoại tuyến RuleBasedAi: Vẫn gợi ý món ăn chuẩn xác ngay cả khi không có mạng.</a:t>
+              <a:rPr dirty="0"/>
+              <a:t>• </a:t>
+            </a:r>
+            <a:r>
+              <a:rPr dirty="0" err="1"/>
+              <a:t>Thuật</a:t>
+            </a:r>
+            <a:r>
+              <a:rPr dirty="0"/>
+              <a:t> </a:t>
+            </a:r>
+            <a:r>
+              <a:rPr dirty="0" err="1"/>
+              <a:t>toán</a:t>
+            </a:r>
+            <a:r>
+              <a:rPr dirty="0"/>
+              <a:t> </a:t>
+            </a:r>
+            <a:r>
+              <a:rPr dirty="0" err="1"/>
+              <a:t>ngoại</a:t>
+            </a:r>
+            <a:r>
+              <a:rPr dirty="0"/>
+              <a:t> </a:t>
+            </a:r>
+            <a:r>
+              <a:rPr dirty="0" err="1"/>
+              <a:t>tuyến</a:t>
+            </a:r>
+            <a:r>
+              <a:rPr dirty="0"/>
+              <a:t> </a:t>
+            </a:r>
+            <a:r>
+              <a:rPr dirty="0" err="1"/>
+              <a:t>RuleBasedAi</a:t>
+            </a:r>
+            <a:r>
+              <a:rPr dirty="0"/>
+              <a:t>: </a:t>
+            </a:r>
+            <a:r>
+              <a:rPr dirty="0" err="1"/>
+              <a:t>Vẫn</a:t>
+            </a:r>
+            <a:r>
+              <a:rPr dirty="0"/>
+              <a:t> </a:t>
+            </a:r>
+            <a:r>
+              <a:rPr dirty="0" err="1"/>
+              <a:t>gợi</a:t>
+            </a:r>
+            <a:r>
+              <a:rPr dirty="0"/>
+              <a:t> ý </a:t>
+            </a:r>
+            <a:r>
+              <a:rPr dirty="0" err="1"/>
+              <a:t>món</a:t>
+            </a:r>
+            <a:r>
+              <a:rPr dirty="0"/>
+              <a:t> </a:t>
+            </a:r>
+            <a:r>
+              <a:rPr dirty="0" err="1"/>
+              <a:t>ăn</a:t>
+            </a:r>
+            <a:r>
+              <a:rPr dirty="0"/>
+              <a:t> </a:t>
+            </a:r>
+            <a:r>
+              <a:rPr dirty="0" err="1"/>
+              <a:t>chuẩn</a:t>
+            </a:r>
+            <a:r>
+              <a:rPr dirty="0"/>
+              <a:t> </a:t>
+            </a:r>
+            <a:r>
+              <a:rPr dirty="0" err="1"/>
+              <a:t>xác</a:t>
+            </a:r>
+            <a:r>
+              <a:rPr dirty="0"/>
+              <a:t> </a:t>
+            </a:r>
+            <a:r>
+              <a:rPr dirty="0" err="1"/>
+              <a:t>ngay</a:t>
+            </a:r>
+            <a:r>
+              <a:rPr dirty="0"/>
+              <a:t> </a:t>
+            </a:r>
+            <a:r>
+              <a:rPr dirty="0" err="1"/>
+              <a:t>cả</a:t>
+            </a:r>
+            <a:r>
+              <a:rPr dirty="0"/>
+              <a:t> </a:t>
+            </a:r>
+            <a:r>
+              <a:rPr dirty="0" err="1"/>
+              <a:t>khi</a:t>
+            </a:r>
+            <a:r>
+              <a:rPr dirty="0"/>
+              <a:t> </a:t>
+            </a:r>
+            <a:r>
+              <a:rPr dirty="0" err="1"/>
+              <a:t>không</a:t>
+            </a:r>
+            <a:r>
+              <a:rPr dirty="0"/>
+              <a:t> </a:t>
+            </a:r>
+            <a:r>
+              <a:rPr dirty="0" err="1"/>
+              <a:t>có</a:t>
+            </a:r>
+            <a:r>
+              <a:rPr dirty="0"/>
+              <a:t> </a:t>
+            </a:r>
+            <a:r>
+              <a:rPr dirty="0" err="1"/>
+              <a:t>mạng</a:t>
+            </a:r>
+            <a:r>
+              <a:rPr dirty="0"/>
+              <a:t>.</a:t>
             </a:r>
           </a:p>
         </p:txBody>
@@ -5495,8 +7241,8 @@
 </p:sld>
 </file>
 
-<file path=ppt/slides/slide3.xml><?xml version="1.0" encoding="utf-8"?>
-<p:sld xmlns:a="http://schemas.openxmlformats.org/drawingml/2006/main" xmlns:p="http://schemas.openxmlformats.org/presentationml/2006/main" xmlns:r="http://schemas.openxmlformats.org/officeDocument/2006/relationships">
+<file path=ppt/slides/slide4.xml><?xml version="1.0" encoding="utf-8"?>
+<p:sld xmlns:a="http://schemas.openxmlformats.org/drawingml/2006/main" xmlns:r="http://schemas.openxmlformats.org/officeDocument/2006/relationships" xmlns:p="http://schemas.openxmlformats.org/presentationml/2006/main">
   <p:cSld>
     <p:spTree>
       <p:nvGrpSpPr>
@@ -5504,7 +7250,14 @@
         <p:cNvGrpSpPr/>
         <p:nvPr/>
       </p:nvGrpSpPr>
-      <p:grpSpPr/>
+      <p:grpSpPr>
+        <a:xfrm>
+          <a:off x="0" y="0"/>
+          <a:ext cx="0" cy="0"/>
+          <a:chOff x="0" y="0"/>
+          <a:chExt cx="0" cy="0"/>
+        </a:xfrm>
+      </p:grpSpPr>
       <p:sp>
         <p:nvSpPr>
           <p:cNvPr id="2" name="TextBox 1"/>
@@ -5557,14 +7310,14 @@
       </p:sp>
       <p:sp>
         <p:nvSpPr>
-          <p:cNvPr id="3" name="Rounded Rectangle 2"/>
+          <p:cNvPr id="5" name="Rounded Rectangle 4"/>
           <p:cNvSpPr/>
           <p:nvPr/>
         </p:nvSpPr>
         <p:spPr>
           <a:xfrm>
-            <a:off x="731520" y="1645920"/>
-            <a:ext cx="3291840" cy="4572000"/>
+            <a:off x="566928" y="1828800"/>
+            <a:ext cx="5138928" cy="4572000"/>
           </a:xfrm>
           <a:prstGeom prst="roundRect">
             <a:avLst/>
@@ -5597,19 +7350,20 @@
           <a:lstStyle/>
           <a:p>
             <a:pPr algn="ctr"/>
-          </a:p>
-        </p:txBody>
-      </p:sp>
-      <p:sp>
-        <p:nvSpPr>
-          <p:cNvPr id="4" name="TextBox 3"/>
+            <a:endParaRPr/>
+          </a:p>
+        </p:txBody>
+      </p:sp>
+      <p:sp>
+        <p:nvSpPr>
+          <p:cNvPr id="6" name="TextBox 5"/>
           <p:cNvSpPr txBox="1"/>
           <p:nvPr/>
         </p:nvSpPr>
         <p:spPr>
           <a:xfrm>
-            <a:off x="960120" y="1828800"/>
-            <a:ext cx="2834640" cy="4206240"/>
+            <a:off x="1052068" y="2011680"/>
+            <a:ext cx="4425188" cy="1472198"/>
           </a:xfrm>
           <a:prstGeom prst="rect">
             <a:avLst/>
@@ -5626,15 +7380,45 @@
               <a:spcAft>
                 <a:spcPts val="1000"/>
               </a:spcAft>
-              <a:defRPr b="1" sz="1600">
+              <a:defRPr sz="1600" b="1">
                 <a:solidFill>
                   <a:srgbClr val="1B4F72"/>
                 </a:solidFill>
               </a:defRPr>
             </a:pPr>
             <a:r>
-              <a:t>🎨 Trải nghiệm giao diện</a:t>
-            </a:r>
+              <a:rPr dirty="0"/>
+              <a:t>🏗️ </a:t>
+            </a:r>
+            <a:r>
+              <a:rPr dirty="0" err="1"/>
+              <a:t>Kiến</a:t>
+            </a:r>
+            <a:r>
+              <a:rPr dirty="0"/>
+              <a:t> </a:t>
+            </a:r>
+            <a:r>
+              <a:rPr dirty="0" err="1"/>
+              <a:t>trúc</a:t>
+            </a:r>
+            <a:r>
+              <a:rPr dirty="0"/>
+              <a:t> </a:t>
+            </a:r>
+            <a:r>
+              <a:rPr dirty="0" err="1"/>
+              <a:t>chuẩn</a:t>
+            </a:r>
+            <a:r>
+              <a:rPr dirty="0"/>
+              <a:t> </a:t>
+            </a:r>
+            <a:r>
+              <a:rPr dirty="0" err="1"/>
+              <a:t>mực</a:t>
+            </a:r>
+            <a:endParaRPr dirty="0"/>
           </a:p>
           <a:p>
             <a:pPr>
@@ -5648,7 +7432,32 @@
               </a:defRPr>
             </a:pPr>
             <a:r>
-              <a:t>• 100% Jetpack Compose Material 3 hiện đại.</a:t>
+              <a:rPr dirty="0"/>
+              <a:t>• </a:t>
+            </a:r>
+            <a:r>
+              <a:rPr dirty="0" err="1"/>
+              <a:t>Áp</a:t>
+            </a:r>
+            <a:r>
+              <a:rPr dirty="0"/>
+              <a:t> </a:t>
+            </a:r>
+            <a:r>
+              <a:rPr dirty="0" err="1"/>
+              <a:t>dụng</a:t>
+            </a:r>
+            <a:r>
+              <a:rPr dirty="0"/>
+              <a:t> </a:t>
+            </a:r>
+            <a:r>
+              <a:rPr dirty="0" err="1"/>
+              <a:t>chuẩn</a:t>
+            </a:r>
+            <a:r>
+              <a:rPr dirty="0"/>
+              <a:t> MVVM + Unidirectional Data Flow (UDF).</a:t>
             </a:r>
           </a:p>
           <a:p>
@@ -5663,7 +7472,80 @@
               </a:defRPr>
             </a:pPr>
             <a:r>
-              <a:t>• Giao diện ấm cúng, tối ưu hóa thao tác 1 chạm khi đang nấu ăn.</a:t>
+              <a:rPr dirty="0"/>
+              <a:t>• </a:t>
+            </a:r>
+            <a:r>
+              <a:rPr dirty="0" err="1"/>
+              <a:t>Tách</a:t>
+            </a:r>
+            <a:r>
+              <a:rPr dirty="0"/>
+              <a:t> </a:t>
+            </a:r>
+            <a:r>
+              <a:rPr dirty="0" err="1"/>
+              <a:t>biệt</a:t>
+            </a:r>
+            <a:r>
+              <a:rPr dirty="0"/>
+              <a:t> 100% </a:t>
+            </a:r>
+            <a:r>
+              <a:rPr dirty="0" err="1"/>
+              <a:t>tầng</a:t>
+            </a:r>
+            <a:r>
+              <a:rPr dirty="0"/>
+              <a:t> </a:t>
+            </a:r>
+            <a:r>
+              <a:rPr dirty="0" err="1"/>
+              <a:t>giao</a:t>
+            </a:r>
+            <a:r>
+              <a:rPr dirty="0"/>
+              <a:t> </a:t>
+            </a:r>
+            <a:r>
+              <a:rPr dirty="0" err="1"/>
+              <a:t>diện</a:t>
+            </a:r>
+            <a:r>
+              <a:rPr dirty="0"/>
+              <a:t> </a:t>
+            </a:r>
+            <a:r>
+              <a:rPr dirty="0" err="1"/>
+              <a:t>khỏi</a:t>
+            </a:r>
+            <a:r>
+              <a:rPr dirty="0"/>
+              <a:t> </a:t>
+            </a:r>
+            <a:r>
+              <a:rPr dirty="0" err="1"/>
+              <a:t>tầng</a:t>
+            </a:r>
+            <a:r>
+              <a:rPr dirty="0"/>
+              <a:t> </a:t>
+            </a:r>
+            <a:r>
+              <a:rPr dirty="0" err="1"/>
+              <a:t>dữ</a:t>
+            </a:r>
+            <a:r>
+              <a:rPr dirty="0"/>
+              <a:t> </a:t>
+            </a:r>
+            <a:r>
+              <a:rPr dirty="0" err="1"/>
+              <a:t>liệu</a:t>
+            </a:r>
+            <a:r>
+              <a:rPr dirty="0"/>
+              <a:t>.</a:t>
             </a:r>
           </a:p>
           <a:p>
@@ -5678,21 +7560,78 @@
               </a:defRPr>
             </a:pPr>
             <a:r>
-              <a:t>• Hỗ trợ chế độ Sáng/Tối (Light/Dark Theme) mượt mà.</a:t>
-            </a:r>
-          </a:p>
-        </p:txBody>
-      </p:sp>
-      <p:sp>
-        <p:nvSpPr>
-          <p:cNvPr id="5" name="Rounded Rectangle 4"/>
+              <a:rPr dirty="0"/>
+              <a:t>• Thu </a:t>
+            </a:r>
+            <a:r>
+              <a:rPr dirty="0" err="1"/>
+              <a:t>thập</a:t>
+            </a:r>
+            <a:r>
+              <a:rPr dirty="0"/>
+              <a:t> State an </a:t>
+            </a:r>
+            <a:r>
+              <a:rPr dirty="0" err="1"/>
+              <a:t>toàn</a:t>
+            </a:r>
+            <a:r>
+              <a:rPr dirty="0"/>
+              <a:t> </a:t>
+            </a:r>
+            <a:r>
+              <a:rPr dirty="0" err="1"/>
+              <a:t>theo</a:t>
+            </a:r>
+            <a:r>
+              <a:rPr dirty="0"/>
+              <a:t> </a:t>
+            </a:r>
+            <a:r>
+              <a:rPr dirty="0" err="1"/>
+              <a:t>vòng</a:t>
+            </a:r>
+            <a:r>
+              <a:rPr dirty="0"/>
+              <a:t> </a:t>
+            </a:r>
+            <a:r>
+              <a:rPr dirty="0" err="1"/>
+              <a:t>đời</a:t>
+            </a:r>
+            <a:r>
+              <a:rPr dirty="0"/>
+              <a:t> </a:t>
+            </a:r>
+            <a:r>
+              <a:rPr dirty="0" err="1"/>
+              <a:t>với</a:t>
+            </a:r>
+            <a:r>
+              <a:rPr dirty="0"/>
+              <a:t> </a:t>
+            </a:r>
+            <a:r>
+              <a:rPr dirty="0" err="1"/>
+              <a:t>collectAsStateWithLifecycle</a:t>
+            </a:r>
+            <a:r>
+              <a:rPr dirty="0"/>
+              <a:t>().</a:t>
+            </a:r>
+          </a:p>
+        </p:txBody>
+      </p:sp>
+      <p:sp>
+        <p:nvSpPr>
+          <p:cNvPr id="7" name="Rounded Rectangle 6"/>
           <p:cNvSpPr/>
           <p:nvPr/>
         </p:nvSpPr>
         <p:spPr>
           <a:xfrm>
-            <a:off x="4389120" y="1645920"/>
-            <a:ext cx="3291840" cy="4572000"/>
+            <a:off x="6148324" y="1828800"/>
+            <a:ext cx="5281676" cy="4572000"/>
           </a:xfrm>
           <a:prstGeom prst="roundRect">
             <a:avLst/>
@@ -5725,19 +7664,20 @@
           <a:lstStyle/>
           <a:p>
             <a:pPr algn="ctr"/>
-          </a:p>
-        </p:txBody>
-      </p:sp>
-      <p:sp>
-        <p:nvSpPr>
-          <p:cNvPr id="6" name="TextBox 5"/>
+            <a:endParaRPr/>
+          </a:p>
+        </p:txBody>
+      </p:sp>
+      <p:sp>
+        <p:nvSpPr>
+          <p:cNvPr id="8" name="TextBox 7"/>
           <p:cNvSpPr txBox="1"/>
           <p:nvPr/>
         </p:nvSpPr>
         <p:spPr>
           <a:xfrm>
-            <a:off x="4617720" y="1828800"/>
-            <a:ext cx="2834640" cy="4206240"/>
+            <a:off x="6633464" y="2011680"/>
+            <a:ext cx="4567936" cy="1472198"/>
           </a:xfrm>
           <a:prstGeom prst="rect">
             <a:avLst/>
@@ -5754,15 +7694,53 @@
               <a:spcAft>
                 <a:spcPts val="1000"/>
               </a:spcAft>
-              <a:defRPr b="1" sz="1600">
+              <a:defRPr sz="1600" b="1">
                 <a:solidFill>
                   <a:srgbClr val="1B4F72"/>
                 </a:solidFill>
               </a:defRPr>
             </a:pPr>
             <a:r>
-              <a:t>🏗️ Kiến trúc chuẩn mực</a:t>
-            </a:r>
+              <a:rPr dirty="0"/>
+              <a:t>🧠 Trí </a:t>
+            </a:r>
+            <a:r>
+              <a:rPr dirty="0" err="1"/>
+              <a:t>tuệ</a:t>
+            </a:r>
+            <a:r>
+              <a:rPr dirty="0"/>
+              <a:t> </a:t>
+            </a:r>
+            <a:r>
+              <a:rPr dirty="0" err="1"/>
+              <a:t>nhân</a:t>
+            </a:r>
+            <a:r>
+              <a:rPr dirty="0"/>
+              <a:t> </a:t>
+            </a:r>
+            <a:r>
+              <a:rPr dirty="0" err="1"/>
+              <a:t>tạo</a:t>
+            </a:r>
+            <a:r>
+              <a:rPr dirty="0"/>
+              <a:t> </a:t>
+            </a:r>
+            <a:r>
+              <a:rPr dirty="0" err="1"/>
+              <a:t>linh</a:t>
+            </a:r>
+            <a:r>
+              <a:rPr dirty="0"/>
+              <a:t> </a:t>
+            </a:r>
+            <a:r>
+              <a:rPr dirty="0" err="1"/>
+              <a:t>hoạt</a:t>
+            </a:r>
+            <a:endParaRPr dirty="0"/>
           </a:p>
           <a:p>
             <a:pPr>
@@ -5776,7 +7754,32 @@
               </a:defRPr>
             </a:pPr>
             <a:r>
-              <a:t>• Áp dụng chuẩn MVVM + Unidirectional Data Flow (UDF).</a:t>
+              <a:rPr dirty="0"/>
+              <a:t>• </a:t>
+            </a:r>
+            <a:r>
+              <a:rPr dirty="0" err="1"/>
+              <a:t>Tích</a:t>
+            </a:r>
+            <a:r>
+              <a:rPr dirty="0"/>
+              <a:t> </a:t>
+            </a:r>
+            <a:r>
+              <a:rPr dirty="0" err="1"/>
+              <a:t>hợp</a:t>
+            </a:r>
+            <a:r>
+              <a:rPr dirty="0"/>
+              <a:t> 4 API LLM </a:t>
+            </a:r>
+            <a:r>
+              <a:rPr dirty="0" err="1"/>
+              <a:t>lớn</a:t>
+            </a:r>
+            <a:r>
+              <a:rPr dirty="0"/>
+              <a:t>: OpenAI Chat, Responses, Claude, Gemini.</a:t>
             </a:r>
           </a:p>
           <a:p>
@@ -5791,7 +7794,56 @@
               </a:defRPr>
             </a:pPr>
             <a:r>
-              <a:t>• Tách biệt 100% tầng giao diện khỏi tầng dữ liệu.</a:t>
+              <a:rPr dirty="0"/>
+              <a:t>• Bảo </a:t>
+            </a:r>
+            <a:r>
+              <a:rPr dirty="0" err="1"/>
+              <a:t>mật</a:t>
+            </a:r>
+            <a:r>
+              <a:rPr dirty="0"/>
+              <a:t> </a:t>
+            </a:r>
+            <a:r>
+              <a:rPr dirty="0" err="1"/>
+              <a:t>khóa</a:t>
+            </a:r>
+            <a:r>
+              <a:rPr dirty="0"/>
+              <a:t> API </a:t>
+            </a:r>
+            <a:r>
+              <a:rPr dirty="0" err="1"/>
+              <a:t>quân</a:t>
+            </a:r>
+            <a:r>
+              <a:rPr dirty="0"/>
+              <a:t> </a:t>
+            </a:r>
+            <a:r>
+              <a:rPr dirty="0" err="1"/>
+              <a:t>đội</a:t>
+            </a:r>
+            <a:r>
+              <a:rPr dirty="0"/>
+              <a:t> </a:t>
+            </a:r>
+            <a:r>
+              <a:rPr dirty="0" err="1"/>
+              <a:t>bằng</a:t>
+            </a:r>
+            <a:r>
+              <a:rPr dirty="0"/>
+              <a:t> </a:t>
+            </a:r>
+            <a:r>
+              <a:rPr dirty="0" err="1"/>
+              <a:t>EncryptedSharedPreferences</a:t>
+            </a:r>
+            <a:r>
+              <a:rPr dirty="0"/>
+              <a:t>.</a:t>
             </a:r>
           </a:p>
           <a:p>
@@ -5806,135 +7858,96 @@
               </a:defRPr>
             </a:pPr>
             <a:r>
-              <a:t>• Thu thập State an toàn theo vòng đời với collectAsStateWithLifecycle().</a:t>
-            </a:r>
-          </a:p>
-        </p:txBody>
-      </p:sp>
-      <p:sp>
-        <p:nvSpPr>
-          <p:cNvPr id="7" name="Rounded Rectangle 6"/>
-          <p:cNvSpPr/>
-          <p:nvPr/>
-        </p:nvSpPr>
-        <p:spPr>
-          <a:xfrm>
-            <a:off x="8046720" y="1645920"/>
-            <a:ext cx="3383280" cy="4572000"/>
-          </a:xfrm>
-          <a:prstGeom prst="roundRect">
-            <a:avLst/>
-          </a:prstGeom>
-          <a:solidFill>
-            <a:srgbClr val="EEF2F7"/>
-          </a:solidFill>
-          <a:ln w="12700">
-            <a:solidFill>
-              <a:srgbClr val="D0D7DE"/>
-            </a:solidFill>
-          </a:ln>
-        </p:spPr>
-        <p:style>
-          <a:lnRef idx="1">
-            <a:schemeClr val="accent1"/>
-          </a:lnRef>
-          <a:fillRef idx="3">
-            <a:schemeClr val="accent1"/>
-          </a:fillRef>
-          <a:effectRef idx="2">
-            <a:schemeClr val="accent1"/>
-          </a:effectRef>
-          <a:fontRef idx="minor">
-            <a:schemeClr val="lt1"/>
-          </a:fontRef>
-        </p:style>
-        <p:txBody>
-          <a:bodyPr rtlCol="0" anchor="ctr"/>
-          <a:lstStyle/>
-          <a:p>
-            <a:pPr algn="ctr"/>
-          </a:p>
-        </p:txBody>
-      </p:sp>
-      <p:sp>
-        <p:nvSpPr>
-          <p:cNvPr id="8" name="TextBox 7"/>
-          <p:cNvSpPr txBox="1"/>
-          <p:nvPr/>
-        </p:nvSpPr>
-        <p:spPr>
-          <a:xfrm>
-            <a:off x="8275320" y="1828800"/>
-            <a:ext cx="2926080" cy="4206240"/>
-          </a:xfrm>
-          <a:prstGeom prst="rect">
-            <a:avLst/>
-          </a:prstGeom>
-          <a:noFill/>
-        </p:spPr>
-        <p:txBody>
-          <a:bodyPr wrap="square">
-            <a:spAutoFit/>
-          </a:bodyPr>
-          <a:lstStyle/>
-          <a:p>
-            <a:pPr>
-              <a:spcAft>
-                <a:spcPts val="1000"/>
-              </a:spcAft>
-              <a:defRPr b="1" sz="1600">
-                <a:solidFill>
-                  <a:srgbClr val="1B4F72"/>
-                </a:solidFill>
-              </a:defRPr>
-            </a:pPr>
-            <a:r>
-              <a:t>🧠 Trí tuệ nhân tạo linh hoạt</a:t>
-            </a:r>
-          </a:p>
-          <a:p>
-            <a:pPr>
-              <a:spcAft>
-                <a:spcPts val="800"/>
-              </a:spcAft>
-              <a:defRPr sz="1300">
-                <a:solidFill>
-                  <a:srgbClr val="212529"/>
-                </a:solidFill>
-              </a:defRPr>
-            </a:pPr>
-            <a:r>
-              <a:t>• Tích hợp 4 API LLM lớn: OpenAI Chat, Responses, Claude, Gemini.</a:t>
-            </a:r>
-          </a:p>
-          <a:p>
-            <a:pPr>
-              <a:spcAft>
-                <a:spcPts val="800"/>
-              </a:spcAft>
-              <a:defRPr sz="1300">
-                <a:solidFill>
-                  <a:srgbClr val="212529"/>
-                </a:solidFill>
-              </a:defRPr>
-            </a:pPr>
-            <a:r>
-              <a:t>• Bảo mật khóa API quân đội bằng EncryptedSharedPreferences.</a:t>
-            </a:r>
-          </a:p>
-          <a:p>
-            <a:pPr>
-              <a:spcAft>
-                <a:spcPts val="800"/>
-              </a:spcAft>
-              <a:defRPr sz="1300">
-                <a:solidFill>
-                  <a:srgbClr val="212529"/>
-                </a:solidFill>
-              </a:defRPr>
-            </a:pPr>
-            <a:r>
-              <a:t>• Thuật toán cục bộ Rule-Based sẵn sàng thay thế khi mất mạng.</a:t>
+              <a:rPr dirty="0"/>
+              <a:t>• </a:t>
+            </a:r>
+            <a:r>
+              <a:rPr dirty="0" err="1"/>
+              <a:t>Thuật</a:t>
+            </a:r>
+            <a:r>
+              <a:rPr dirty="0"/>
+              <a:t> </a:t>
+            </a:r>
+            <a:r>
+              <a:rPr dirty="0" err="1"/>
+              <a:t>toán</a:t>
+            </a:r>
+            <a:r>
+              <a:rPr dirty="0"/>
+              <a:t> </a:t>
+            </a:r>
+            <a:r>
+              <a:rPr dirty="0" err="1"/>
+              <a:t>cục</a:t>
+            </a:r>
+            <a:r>
+              <a:rPr dirty="0"/>
+              <a:t> </a:t>
+            </a:r>
+            <a:r>
+              <a:rPr dirty="0" err="1"/>
+              <a:t>bộ</a:t>
+            </a:r>
+            <a:r>
+              <a:rPr dirty="0"/>
+              <a:t> Rule-Based </a:t>
+            </a:r>
+            <a:r>
+              <a:rPr dirty="0" err="1"/>
+              <a:t>sẵn</a:t>
+            </a:r>
+            <a:r>
+              <a:rPr dirty="0"/>
+              <a:t> </a:t>
+            </a:r>
+            <a:r>
+              <a:rPr dirty="0" err="1"/>
+              <a:t>sàng</a:t>
+            </a:r>
+            <a:r>
+              <a:rPr dirty="0"/>
+              <a:t> </a:t>
+            </a:r>
+            <a:r>
+              <a:rPr dirty="0" err="1"/>
+              <a:t>thay</a:t>
+            </a:r>
+            <a:r>
+              <a:rPr dirty="0"/>
+              <a:t> </a:t>
+            </a:r>
+            <a:r>
+              <a:rPr dirty="0" err="1"/>
+              <a:t>thế</a:t>
+            </a:r>
+            <a:r>
+              <a:rPr dirty="0"/>
+              <a:t> </a:t>
+            </a:r>
+            <a:r>
+              <a:rPr dirty="0" err="1"/>
+              <a:t>khi</a:t>
+            </a:r>
+            <a:r>
+              <a:rPr dirty="0"/>
+              <a:t> </a:t>
+            </a:r>
+            <a:r>
+              <a:rPr dirty="0" err="1"/>
+              <a:t>mất</a:t>
+            </a:r>
+            <a:r>
+              <a:rPr dirty="0"/>
+              <a:t> </a:t>
+            </a:r>
+            <a:r>
+              <a:rPr dirty="0" err="1"/>
+              <a:t>mạng</a:t>
+            </a:r>
+            <a:r>
+              <a:rPr dirty="0"/>
+              <a:t>.</a:t>
             </a:r>
           </a:p>
         </p:txBody>
@@ -5947,8 +7960,8 @@
 </p:sld>
 </file>
 
-<file path=ppt/slides/slide4.xml><?xml version="1.0" encoding="utf-8"?>
-<p:sld xmlns:a="http://schemas.openxmlformats.org/drawingml/2006/main" xmlns:p="http://schemas.openxmlformats.org/presentationml/2006/main" xmlns:r="http://schemas.openxmlformats.org/officeDocument/2006/relationships">
+<file path=ppt/slides/slide5.xml><?xml version="1.0" encoding="utf-8"?>
+<p:sld xmlns:a="http://schemas.openxmlformats.org/drawingml/2006/main" xmlns:r="http://schemas.openxmlformats.org/officeDocument/2006/relationships" xmlns:p="http://schemas.openxmlformats.org/presentationml/2006/main">
   <p:cSld>
     <p:spTree>
       <p:nvGrpSpPr>
@@ -5956,7 +7969,14 @@
         <p:cNvGrpSpPr/>
         <p:nvPr/>
       </p:nvGrpSpPr>
-      <p:grpSpPr/>
+      <p:grpSpPr>
+        <a:xfrm>
+          <a:off x="0" y="0"/>
+          <a:ext cx="0" cy="0"/>
+          <a:chOff x="0" y="0"/>
+          <a:chExt cx="0" cy="0"/>
+        </a:xfrm>
+      </p:grpSpPr>
       <p:sp>
         <p:nvSpPr>
           <p:cNvPr id="2" name="TextBox 1"/>
@@ -6049,6 +8069,7 @@
           <a:lstStyle/>
           <a:p>
             <a:pPr algn="ctr"/>
+            <a:endParaRPr/>
           </a:p>
         </p:txBody>
       </p:sp>
@@ -6078,7 +8099,7 @@
               <a:spcAft>
                 <a:spcPts val="1000"/>
               </a:spcAft>
-              <a:defRPr b="1" sz="1600">
+              <a:defRPr sz="1600" b="1">
                 <a:solidFill>
                   <a:srgbClr val="1B4F72"/>
                 </a:solidFill>
@@ -6177,6 +8198,7 @@
           <a:lstStyle/>
           <a:p>
             <a:pPr algn="ctr"/>
+            <a:endParaRPr/>
           </a:p>
         </p:txBody>
       </p:sp>
@@ -6206,15 +8228,49 @@
               <a:spcAft>
                 <a:spcPts val="1000"/>
               </a:spcAft>
-              <a:defRPr b="1" sz="1600">
+              <a:defRPr sz="1600" b="1">
                 <a:solidFill>
                   <a:srgbClr val="1B4F72"/>
                 </a:solidFill>
               </a:defRPr>
             </a:pPr>
             <a:r>
-              <a:t>Cơ sở dữ liệu &amp; Lưu trữ</a:t>
-            </a:r>
+              <a:rPr dirty="0" err="1"/>
+              <a:t>Cơ</a:t>
+            </a:r>
+            <a:r>
+              <a:rPr dirty="0"/>
+              <a:t> </a:t>
+            </a:r>
+            <a:r>
+              <a:rPr dirty="0" err="1"/>
+              <a:t>sở</a:t>
+            </a:r>
+            <a:r>
+              <a:rPr dirty="0"/>
+              <a:t> </a:t>
+            </a:r>
+            <a:r>
+              <a:rPr dirty="0" err="1"/>
+              <a:t>dữ</a:t>
+            </a:r>
+            <a:r>
+              <a:rPr dirty="0"/>
+              <a:t> </a:t>
+            </a:r>
+            <a:r>
+              <a:rPr dirty="0" err="1"/>
+              <a:t>liệu</a:t>
+            </a:r>
+            <a:r>
+              <a:rPr dirty="0"/>
+              <a:t> &amp; Lưu </a:t>
+            </a:r>
+            <a:r>
+              <a:rPr dirty="0" err="1"/>
+              <a:t>trữ</a:t>
+            </a:r>
+            <a:endParaRPr dirty="0"/>
           </a:p>
           <a:p>
             <a:pPr>
@@ -6228,8 +8284,54 @@
               </a:defRPr>
             </a:pPr>
             <a:r>
-              <a:t>• Room Database 2.6.1 với bộ xử lý KSP hiện đại</a:t>
-            </a:r>
+              <a:rPr dirty="0"/>
+              <a:t>• Room Database 2.6.1 </a:t>
+            </a:r>
+            <a:r>
+              <a:rPr dirty="0" err="1"/>
+              <a:t>với</a:t>
+            </a:r>
+            <a:r>
+              <a:rPr dirty="0"/>
+              <a:t> </a:t>
+            </a:r>
+            <a:r>
+              <a:rPr dirty="0" err="1"/>
+              <a:t>bộ</a:t>
+            </a:r>
+            <a:r>
+              <a:rPr dirty="0"/>
+              <a:t> </a:t>
+            </a:r>
+            <a:r>
+              <a:rPr dirty="0" err="1"/>
+              <a:t>xử</a:t>
+            </a:r>
+            <a:r>
+              <a:rPr dirty="0"/>
+              <a:t> </a:t>
+            </a:r>
+            <a:r>
+              <a:rPr dirty="0" err="1"/>
+              <a:t>lý</a:t>
+            </a:r>
+            <a:r>
+              <a:rPr dirty="0"/>
+              <a:t> KSP </a:t>
+            </a:r>
+            <a:r>
+              <a:rPr dirty="0" err="1"/>
+              <a:t>hiện</a:t>
+            </a:r>
+            <a:r>
+              <a:rPr dirty="0"/>
+              <a:t> </a:t>
+            </a:r>
+            <a:r>
+              <a:rPr dirty="0" err="1"/>
+              <a:t>đại</a:t>
+            </a:r>
+            <a:endParaRPr dirty="0"/>
           </a:p>
           <a:p>
             <a:pPr>
@@ -6243,8 +8345,62 @@
               </a:defRPr>
             </a:pPr>
             <a:r>
-              <a:t>• DataStore Preferences quản lý cấu hình người dùng</a:t>
-            </a:r>
+              <a:rPr dirty="0"/>
+              <a:t>• </a:t>
+            </a:r>
+            <a:r>
+              <a:rPr dirty="0" err="1"/>
+              <a:t>DataStore</a:t>
+            </a:r>
+            <a:r>
+              <a:rPr dirty="0"/>
+              <a:t> Preferences </a:t>
+            </a:r>
+            <a:r>
+              <a:rPr dirty="0" err="1"/>
+              <a:t>quản</a:t>
+            </a:r>
+            <a:r>
+              <a:rPr dirty="0"/>
+              <a:t> </a:t>
+            </a:r>
+            <a:r>
+              <a:rPr dirty="0" err="1"/>
+              <a:t>lý</a:t>
+            </a:r>
+            <a:r>
+              <a:rPr dirty="0"/>
+              <a:t> </a:t>
+            </a:r>
+            <a:r>
+              <a:rPr dirty="0" err="1"/>
+              <a:t>cấu</a:t>
+            </a:r>
+            <a:r>
+              <a:rPr dirty="0"/>
+              <a:t> </a:t>
+            </a:r>
+            <a:r>
+              <a:rPr dirty="0" err="1"/>
+              <a:t>hình</a:t>
+            </a:r>
+            <a:r>
+              <a:rPr dirty="0"/>
+              <a:t> </a:t>
+            </a:r>
+            <a:r>
+              <a:rPr dirty="0" err="1"/>
+              <a:t>người</a:t>
+            </a:r>
+            <a:r>
+              <a:rPr dirty="0"/>
+              <a:t> </a:t>
+            </a:r>
+            <a:r>
+              <a:rPr dirty="0" err="1"/>
+              <a:t>dùng</a:t>
+            </a:r>
+            <a:endParaRPr dirty="0"/>
           </a:p>
           <a:p>
             <a:pPr>
@@ -6258,7 +8414,32 @@
               </a:defRPr>
             </a:pPr>
             <a:r>
-              <a:t>• EncryptedSharedPreferences (Jetpack Security) mã hóa AES-256</a:t>
+              <a:rPr dirty="0"/>
+              <a:t>• </a:t>
+            </a:r>
+            <a:r>
+              <a:rPr dirty="0" err="1"/>
+              <a:t>EncryptedSharedPreferences</a:t>
+            </a:r>
+            <a:r>
+              <a:rPr dirty="0"/>
+              <a:t> (Jetpack Security) </a:t>
+            </a:r>
+            <a:r>
+              <a:rPr dirty="0" err="1"/>
+              <a:t>mã</a:t>
+            </a:r>
+            <a:r>
+              <a:rPr dirty="0"/>
+              <a:t> </a:t>
+            </a:r>
+            <a:r>
+              <a:rPr dirty="0" err="1"/>
+              <a:t>hóa</a:t>
+            </a:r>
+            <a:r>
+              <a:rPr dirty="0"/>
+              <a:t> AES-256</a:t>
             </a:r>
           </a:p>
         </p:txBody>
@@ -6305,6 +8486,7 @@
           <a:lstStyle/>
           <a:p>
             <a:pPr algn="ctr"/>
+            <a:endParaRPr/>
           </a:p>
         </p:txBody>
       </p:sp>
@@ -6334,7 +8516,7 @@
               <a:spcAft>
                 <a:spcPts val="1000"/>
               </a:spcAft>
-              <a:defRPr b="1" sz="1600">
+              <a:defRPr sz="1600" b="1">
                 <a:solidFill>
                   <a:srgbClr val="1B4F72"/>
                 </a:solidFill>
@@ -6418,6 +8600,7 @@
           <a:lstStyle/>
           <a:p>
             <a:pPr algn="ctr"/>
+            <a:endParaRPr/>
           </a:p>
         </p:txBody>
       </p:sp>
@@ -6447,7 +8630,7 @@
               <a:spcAft>
                 <a:spcPts val="1000"/>
               </a:spcAft>
-              <a:defRPr b="1" sz="1600">
+              <a:defRPr sz="1600" b="1">
                 <a:solidFill>
                   <a:srgbClr val="1B4F72"/>
                 </a:solidFill>
@@ -6497,8 +8680,8 @@
 </p:sld>
 </file>
 
-<file path=ppt/slides/slide5.xml><?xml version="1.0" encoding="utf-8"?>
-<p:sld xmlns:a="http://schemas.openxmlformats.org/drawingml/2006/main" xmlns:p="http://schemas.openxmlformats.org/presentationml/2006/main" xmlns:r="http://schemas.openxmlformats.org/officeDocument/2006/relationships">
+<file path=ppt/slides/slide6.xml><?xml version="1.0" encoding="utf-8"?>
+<p:sld xmlns:a="http://schemas.openxmlformats.org/drawingml/2006/main" xmlns:r="http://schemas.openxmlformats.org/officeDocument/2006/relationships" xmlns:p="http://schemas.openxmlformats.org/presentationml/2006/main">
   <p:cSld>
     <p:spTree>
       <p:nvGrpSpPr>
@@ -6506,7 +8689,14 @@
         <p:cNvGrpSpPr/>
         <p:nvPr/>
       </p:nvGrpSpPr>
-      <p:grpSpPr/>
+      <p:grpSpPr>
+        <a:xfrm>
+          <a:off x="0" y="0"/>
+          <a:ext cx="0" cy="0"/>
+          <a:chOff x="0" y="0"/>
+          <a:chExt cx="0" cy="0"/>
+        </a:xfrm>
+      </p:grpSpPr>
       <p:sp>
         <p:nvSpPr>
           <p:cNvPr id="2" name="TextBox 1"/>
@@ -6599,6 +8789,7 @@
           <a:lstStyle/>
           <a:p>
             <a:pPr algn="ctr"/>
+            <a:endParaRPr/>
           </a:p>
         </p:txBody>
       </p:sp>
@@ -6628,7 +8819,7 @@
               <a:spcAft>
                 <a:spcPts val="1000"/>
               </a:spcAft>
-              <a:defRPr b="1" sz="1600">
+              <a:defRPr sz="1600" b="1">
                 <a:solidFill>
                   <a:srgbClr val="1B4F72"/>
                 </a:solidFill>
@@ -6723,8 +8914,8 @@
 </p:sld>
 </file>
 
-<file path=ppt/slides/slide6.xml><?xml version="1.0" encoding="utf-8"?>
-<p:sld xmlns:a="http://schemas.openxmlformats.org/drawingml/2006/main" xmlns:p="http://schemas.openxmlformats.org/presentationml/2006/main" xmlns:r="http://schemas.openxmlformats.org/officeDocument/2006/relationships">
+<file path=ppt/slides/slide7.xml><?xml version="1.0" encoding="utf-8"?>
+<p:sld xmlns:a="http://schemas.openxmlformats.org/drawingml/2006/main" xmlns:r="http://schemas.openxmlformats.org/officeDocument/2006/relationships" xmlns:p="http://schemas.openxmlformats.org/presentationml/2006/main">
   <p:cSld>
     <p:spTree>
       <p:nvGrpSpPr>
@@ -6732,7 +8923,14 @@
         <p:cNvGrpSpPr/>
         <p:nvPr/>
       </p:nvGrpSpPr>
-      <p:grpSpPr/>
+      <p:grpSpPr>
+        <a:xfrm>
+          <a:off x="0" y="0"/>
+          <a:ext cx="0" cy="0"/>
+          <a:chOff x="0" y="0"/>
+          <a:chExt cx="0" cy="0"/>
+        </a:xfrm>
+      </p:grpSpPr>
       <p:sp>
         <p:nvSpPr>
           <p:cNvPr id="2" name="TextBox 1"/>
@@ -6825,6 +9023,7 @@
           <a:lstStyle/>
           <a:p>
             <a:pPr algn="ctr"/>
+            <a:endParaRPr/>
           </a:p>
         </p:txBody>
       </p:sp>
@@ -6854,7 +9053,7 @@
               <a:spcAft>
                 <a:spcPts val="1000"/>
               </a:spcAft>
-              <a:defRPr b="1" sz="1600">
+              <a:defRPr sz="1600" b="1">
                 <a:solidFill>
                   <a:srgbClr val="1B4F72"/>
                 </a:solidFill>
@@ -6983,6 +9182,7 @@
           <a:lstStyle/>
           <a:p>
             <a:pPr algn="ctr"/>
+            <a:endParaRPr/>
           </a:p>
         </p:txBody>
       </p:sp>
@@ -7012,7 +9212,7 @@
               <a:spcAft>
                 <a:spcPts val="1000"/>
               </a:spcAft>
-              <a:defRPr b="1" sz="1600">
+              <a:defRPr sz="1600" b="1">
                 <a:solidFill>
                   <a:srgbClr val="1B4F72"/>
                 </a:solidFill>
@@ -7077,8 +9277,8 @@
 </p:sld>
 </file>
 
-<file path=ppt/slides/slide7.xml><?xml version="1.0" encoding="utf-8"?>
-<p:sld xmlns:a="http://schemas.openxmlformats.org/drawingml/2006/main" xmlns:p="http://schemas.openxmlformats.org/presentationml/2006/main" xmlns:r="http://schemas.openxmlformats.org/officeDocument/2006/relationships">
+<file path=ppt/slides/slide8.xml><?xml version="1.0" encoding="utf-8"?>
+<p:sld xmlns:a="http://schemas.openxmlformats.org/drawingml/2006/main" xmlns:r="http://schemas.openxmlformats.org/officeDocument/2006/relationships" xmlns:p="http://schemas.openxmlformats.org/presentationml/2006/main">
   <p:cSld>
     <p:spTree>
       <p:nvGrpSpPr>
@@ -7086,7 +9286,14 @@
         <p:cNvGrpSpPr/>
         <p:nvPr/>
       </p:nvGrpSpPr>
-      <p:grpSpPr/>
+      <p:grpSpPr>
+        <a:xfrm>
+          <a:off x="0" y="0"/>
+          <a:ext cx="0" cy="0"/>
+          <a:chOff x="0" y="0"/>
+          <a:chExt cx="0" cy="0"/>
+        </a:xfrm>
+      </p:grpSpPr>
       <p:sp>
         <p:nvSpPr>
           <p:cNvPr id="2" name="TextBox 1"/>
@@ -7179,6 +9386,7 @@
           <a:lstStyle/>
           <a:p>
             <a:pPr algn="ctr"/>
+            <a:endParaRPr/>
           </a:p>
         </p:txBody>
       </p:sp>
@@ -7208,7 +9416,7 @@
               <a:spcAft>
                 <a:spcPts val="1000"/>
               </a:spcAft>
-              <a:defRPr b="1" sz="1600">
+              <a:defRPr sz="1600" b="1">
                 <a:solidFill>
                   <a:srgbClr val="1B4F72"/>
                 </a:solidFill>
@@ -7322,6 +9530,7 @@
           <a:lstStyle/>
           <a:p>
             <a:pPr algn="ctr"/>
+            <a:endParaRPr/>
           </a:p>
         </p:txBody>
       </p:sp>
@@ -7351,7 +9560,7 @@
               <a:spcAft>
                 <a:spcPts val="1000"/>
               </a:spcAft>
-              <a:defRPr b="1" sz="1600">
+              <a:defRPr sz="1600" b="1">
                 <a:solidFill>
                   <a:srgbClr val="1B4F72"/>
                 </a:solidFill>
@@ -7401,8 +9610,8 @@
 </p:sld>
 </file>
 
-<file path=ppt/slides/slide8.xml><?xml version="1.0" encoding="utf-8"?>
-<p:sld xmlns:a="http://schemas.openxmlformats.org/drawingml/2006/main" xmlns:p="http://schemas.openxmlformats.org/presentationml/2006/main" xmlns:r="http://schemas.openxmlformats.org/officeDocument/2006/relationships">
+<file path=ppt/slides/slide9.xml><?xml version="1.0" encoding="utf-8"?>
+<p:sld xmlns:a="http://schemas.openxmlformats.org/drawingml/2006/main" xmlns:r="http://schemas.openxmlformats.org/officeDocument/2006/relationships" xmlns:p="http://schemas.openxmlformats.org/presentationml/2006/main">
   <p:cSld>
     <p:spTree>
       <p:nvGrpSpPr>
@@ -7410,7 +9619,14 @@
         <p:cNvGrpSpPr/>
         <p:nvPr/>
       </p:nvGrpSpPr>
-      <p:grpSpPr/>
+      <p:grpSpPr>
+        <a:xfrm>
+          <a:off x="0" y="0"/>
+          <a:ext cx="0" cy="0"/>
+          <a:chOff x="0" y="0"/>
+          <a:chExt cx="0" cy="0"/>
+        </a:xfrm>
+      </p:grpSpPr>
       <p:sp>
         <p:nvSpPr>
           <p:cNvPr id="2" name="TextBox 1"/>
@@ -7503,6 +9719,7 @@
           <a:lstStyle/>
           <a:p>
             <a:pPr algn="ctr"/>
+            <a:endParaRPr/>
           </a:p>
         </p:txBody>
       </p:sp>
@@ -7532,7 +9749,7 @@
               <a:spcAft>
                 <a:spcPts val="1000"/>
               </a:spcAft>
-              <a:defRPr b="1" sz="1600">
+              <a:defRPr sz="1600" b="1">
                 <a:solidFill>
                   <a:srgbClr val="1B4F72"/>
                 </a:solidFill>
@@ -7646,6 +9863,7 @@
           <a:lstStyle/>
           <a:p>
             <a:pPr algn="ctr"/>
+            <a:endParaRPr/>
           </a:p>
         </p:txBody>
       </p:sp>
@@ -7675,7 +9893,7 @@
               <a:spcAft>
                 <a:spcPts val="1000"/>
               </a:spcAft>
-              <a:defRPr b="1" sz="1600">
+              <a:defRPr sz="1600" b="1">
                 <a:solidFill>
                   <a:srgbClr val="1B4F72"/>
                 </a:solidFill>
@@ -7728,330 +9946,6 @@
             </a:pPr>
             <a:r>
               <a:t>• Tự động đề xuất món ăn phù hợp nhất từ kho dữ liệu nội bộ của ứng dụng.</a:t>
-            </a:r>
-          </a:p>
-        </p:txBody>
-      </p:sp>
-    </p:spTree>
-  </p:cSld>
-  <p:clrMapOvr>
-    <a:masterClrMapping/>
-  </p:clrMapOvr>
-</p:sld>
-</file>
-
-<file path=ppt/slides/slide9.xml><?xml version="1.0" encoding="utf-8"?>
-<p:sld xmlns:a="http://schemas.openxmlformats.org/drawingml/2006/main" xmlns:p="http://schemas.openxmlformats.org/presentationml/2006/main" xmlns:r="http://schemas.openxmlformats.org/officeDocument/2006/relationships">
-  <p:cSld>
-    <p:spTree>
-      <p:nvGrpSpPr>
-        <p:cNvPr id="1" name=""/>
-        <p:cNvGrpSpPr/>
-        <p:nvPr/>
-      </p:nvGrpSpPr>
-      <p:grpSpPr/>
-      <p:sp>
-        <p:nvSpPr>
-          <p:cNvPr id="2" name="TextBox 1"/>
-          <p:cNvSpPr txBox="1"/>
-          <p:nvPr/>
-        </p:nvSpPr>
-        <p:spPr>
-          <a:xfrm>
-            <a:off x="731520" y="365760"/>
-            <a:ext cx="10698480" cy="1097280"/>
-          </a:xfrm>
-          <a:prstGeom prst="rect">
-            <a:avLst/>
-          </a:prstGeom>
-          <a:noFill/>
-        </p:spPr>
-        <p:txBody>
-          <a:bodyPr wrap="square" lIns="0" tIns="0" rIns="0" bIns="0">
-            <a:spAutoFit/>
-          </a:bodyPr>
-          <a:lstStyle/>
-          <a:p>
-            <a:pPr>
-              <a:defRPr sz="1100" b="1">
-                <a:solidFill>
-                  <a:srgbClr val="E65100"/>
-                </a:solidFill>
-              </a:defRPr>
-            </a:pPr>
-            <a:r>
-              <a:t>CHỨC NĂNG CHÍNH</a:t>
-            </a:r>
-          </a:p>
-          <a:p>
-            <a:pPr>
-              <a:spcBef>
-                <a:spcPts val="400"/>
-              </a:spcBef>
-              <a:defRPr sz="2400" b="1">
-                <a:solidFill>
-                  <a:srgbClr val="1B4F72"/>
-                </a:solidFill>
-              </a:defRPr>
-            </a:pPr>
-            <a:r>
-              <a:t>8. Tìm kiếm Tức thì &amp; Lọc Danh mục Thông minh</a:t>
-            </a:r>
-          </a:p>
-        </p:txBody>
-      </p:sp>
-      <p:sp>
-        <p:nvSpPr>
-          <p:cNvPr id="3" name="Rounded Rectangle 2"/>
-          <p:cNvSpPr/>
-          <p:nvPr/>
-        </p:nvSpPr>
-        <p:spPr>
-          <a:xfrm>
-            <a:off x="731520" y="1645920"/>
-            <a:ext cx="5120640" cy="4572000"/>
-          </a:xfrm>
-          <a:prstGeom prst="roundRect">
-            <a:avLst/>
-          </a:prstGeom>
-          <a:solidFill>
-            <a:srgbClr val="EEF2F7"/>
-          </a:solidFill>
-          <a:ln w="12700">
-            <a:solidFill>
-              <a:srgbClr val="D0D7DE"/>
-            </a:solidFill>
-          </a:ln>
-        </p:spPr>
-        <p:style>
-          <a:lnRef idx="1">
-            <a:schemeClr val="accent1"/>
-          </a:lnRef>
-          <a:fillRef idx="3">
-            <a:schemeClr val="accent1"/>
-          </a:fillRef>
-          <a:effectRef idx="2">
-            <a:schemeClr val="accent1"/>
-          </a:effectRef>
-          <a:fontRef idx="minor">
-            <a:schemeClr val="lt1"/>
-          </a:fontRef>
-        </p:style>
-        <p:txBody>
-          <a:bodyPr rtlCol="0" anchor="ctr"/>
-          <a:lstStyle/>
-          <a:p>
-            <a:pPr algn="ctr"/>
-          </a:p>
-        </p:txBody>
-      </p:sp>
-      <p:sp>
-        <p:nvSpPr>
-          <p:cNvPr id="4" name="TextBox 3"/>
-          <p:cNvSpPr txBox="1"/>
-          <p:nvPr/>
-        </p:nvSpPr>
-        <p:spPr>
-          <a:xfrm>
-            <a:off x="960120" y="1828800"/>
-            <a:ext cx="4663440" cy="4206240"/>
-          </a:xfrm>
-          <a:prstGeom prst="rect">
-            <a:avLst/>
-          </a:prstGeom>
-          <a:noFill/>
-        </p:spPr>
-        <p:txBody>
-          <a:bodyPr wrap="square">
-            <a:spAutoFit/>
-          </a:bodyPr>
-          <a:lstStyle/>
-          <a:p>
-            <a:pPr>
-              <a:spcAft>
-                <a:spcPts val="1000"/>
-              </a:spcAft>
-              <a:defRPr b="1" sz="1600">
-                <a:solidFill>
-                  <a:srgbClr val="1B4F72"/>
-                </a:solidFill>
-              </a:defRPr>
-            </a:pPr>
-            <a:r>
-              <a:t>Kỹ thuật Debounce 300ms</a:t>
-            </a:r>
-          </a:p>
-          <a:p>
-            <a:pPr>
-              <a:spcAft>
-                <a:spcPts val="800"/>
-              </a:spcAft>
-              <a:defRPr sz="1300">
-                <a:solidFill>
-                  <a:srgbClr val="212529"/>
-                </a:solidFill>
-              </a:defRPr>
-            </a:pPr>
-            <a:r>
-              <a:t>• Vấn đề: Người dùng gõ phím liên tục nếu truy vấn DB ngay sẽ gây giật lag và tốn pin.</a:t>
-            </a:r>
-          </a:p>
-          <a:p>
-            <a:pPr>
-              <a:spcAft>
-                <a:spcPts val="800"/>
-              </a:spcAft>
-              <a:defRPr sz="1300">
-                <a:solidFill>
-                  <a:srgbClr val="212529"/>
-                </a:solidFill>
-              </a:defRPr>
-            </a:pPr>
-            <a:r>
-              <a:t>• Giải pháp: Áp dụng toán tử debounce(300L) trong Kotlin Flow tại SearchViewModel.</a:t>
-            </a:r>
-          </a:p>
-          <a:p>
-            <a:pPr>
-              <a:spcAft>
-                <a:spcPts val="800"/>
-              </a:spcAft>
-              <a:defRPr sz="1300">
-                <a:solidFill>
-                  <a:srgbClr val="212529"/>
-                </a:solidFill>
-              </a:defRPr>
-            </a:pPr>
-            <a:r>
-              <a:t>• Chỉ thực hiện truy vấn khi người dùng dừng gõ 300ms, giúp UI phản hồi cực kỳ êm ái.</a:t>
-            </a:r>
-          </a:p>
-        </p:txBody>
-      </p:sp>
-      <p:sp>
-        <p:nvSpPr>
-          <p:cNvPr id="5" name="Rounded Rectangle 4"/>
-          <p:cNvSpPr/>
-          <p:nvPr/>
-        </p:nvSpPr>
-        <p:spPr>
-          <a:xfrm>
-            <a:off x="6217920" y="1645920"/>
-            <a:ext cx="5212080" cy="4572000"/>
-          </a:xfrm>
-          <a:prstGeom prst="roundRect">
-            <a:avLst/>
-          </a:prstGeom>
-          <a:solidFill>
-            <a:srgbClr val="EEF2F7"/>
-          </a:solidFill>
-          <a:ln w="12700">
-            <a:solidFill>
-              <a:srgbClr val="D0D7DE"/>
-            </a:solidFill>
-          </a:ln>
-        </p:spPr>
-        <p:style>
-          <a:lnRef idx="1">
-            <a:schemeClr val="accent1"/>
-          </a:lnRef>
-          <a:fillRef idx="3">
-            <a:schemeClr val="accent1"/>
-          </a:fillRef>
-          <a:effectRef idx="2">
-            <a:schemeClr val="accent1"/>
-          </a:effectRef>
-          <a:fontRef idx="minor">
-            <a:schemeClr val="lt1"/>
-          </a:fontRef>
-        </p:style>
-        <p:txBody>
-          <a:bodyPr rtlCol="0" anchor="ctr"/>
-          <a:lstStyle/>
-          <a:p>
-            <a:pPr algn="ctr"/>
-          </a:p>
-        </p:txBody>
-      </p:sp>
-      <p:sp>
-        <p:nvSpPr>
-          <p:cNvPr id="6" name="TextBox 5"/>
-          <p:cNvSpPr txBox="1"/>
-          <p:nvPr/>
-        </p:nvSpPr>
-        <p:spPr>
-          <a:xfrm>
-            <a:off x="6446520" y="1828800"/>
-            <a:ext cx="4754880" cy="4206240"/>
-          </a:xfrm>
-          <a:prstGeom prst="rect">
-            <a:avLst/>
-          </a:prstGeom>
-          <a:noFill/>
-        </p:spPr>
-        <p:txBody>
-          <a:bodyPr wrap="square">
-            <a:spAutoFit/>
-          </a:bodyPr>
-          <a:lstStyle/>
-          <a:p>
-            <a:pPr>
-              <a:spcAft>
-                <a:spcPts val="1000"/>
-              </a:spcAft>
-              <a:defRPr b="1" sz="1600">
-                <a:solidFill>
-                  <a:srgbClr val="1B4F72"/>
-                </a:solidFill>
-              </a:defRPr>
-            </a:pPr>
-            <a:r>
-              <a:t>Truy vấn Đa trường dữ liệu</a:t>
-            </a:r>
-          </a:p>
-          <a:p>
-            <a:pPr>
-              <a:spcAft>
-                <a:spcPts val="800"/>
-              </a:spcAft>
-              <a:defRPr sz="1300">
-                <a:solidFill>
-                  <a:srgbClr val="212529"/>
-                </a:solidFill>
-              </a:defRPr>
-            </a:pPr>
-            <a:r>
-              <a:t>• Tìm kiếm đồng thời trên nhiều trường: Tên món ăn, mô tả, ghi chú và cả tên nguyên liệu bên trong.</a:t>
-            </a:r>
-          </a:p>
-          <a:p>
-            <a:pPr>
-              <a:spcAft>
-                <a:spcPts val="800"/>
-              </a:spcAft>
-              <a:defRPr sz="1300">
-                <a:solidFill>
-                  <a:srgbClr val="212529"/>
-                </a:solidFill>
-              </a:defRPr>
-            </a:pPr>
-            <a:r>
-              <a:t>• Đánh chỉ mục (Index) trên Room Database giúp câu lệnh SQL LIKE phản hồi dưới 20ms.</a:t>
-            </a:r>
-          </a:p>
-          <a:p>
-            <a:pPr>
-              <a:spcAft>
-                <a:spcPts val="800"/>
-              </a:spcAft>
-              <a:defRPr sz="1300">
-                <a:solidFill>
-                  <a:srgbClr val="212529"/>
-                </a:solidFill>
-              </a:defRPr>
-            </a:pPr>
-            <a:r>
-              <a:t>• Trạng thái giao diện phân định rõ: Gợi ý ban đầu, Đang tìm kiếm, Không tìm thấy kết quả.</a:t>
             </a:r>
           </a:p>
         </p:txBody>

--- a/docs/THUYET_TRINH_COOKING_NOTE.pptx
+++ b/docs/THUYET_TRINH_COOKING_NOTE.pptx
@@ -5,24 +5,24 @@
     <p:sldMasterId id="2147483648" r:id="rId1"/>
   </p:sldMasterIdLst>
   <p:sldIdLst>
-    <p:sldId id="256" r:id="rId7"/>
-    <p:sldId id="257" r:id="rId8"/>
-    <p:sldId id="258" r:id="rId9"/>
-    <p:sldId id="259" r:id="rId10"/>
-    <p:sldId id="260" r:id="rId11"/>
-    <p:sldId id="261" r:id="rId12"/>
-    <p:sldId id="262" r:id="rId13"/>
-    <p:sldId id="263" r:id="rId14"/>
-    <p:sldId id="264" r:id="rId15"/>
-    <p:sldId id="265" r:id="rId16"/>
-    <p:sldId id="266" r:id="rId17"/>
-    <p:sldId id="267" r:id="rId18"/>
-    <p:sldId id="268" r:id="rId19"/>
-    <p:sldId id="269" r:id="rId20"/>
-    <p:sldId id="270" r:id="rId21"/>
-    <p:sldId id="271" r:id="rId22"/>
+    <p:sldId id="256" r:id="rId2"/>
+    <p:sldId id="257" r:id="rId3"/>
+    <p:sldId id="258" r:id="rId4"/>
+    <p:sldId id="259" r:id="rId5"/>
+    <p:sldId id="260" r:id="rId6"/>
+    <p:sldId id="261" r:id="rId7"/>
+    <p:sldId id="262" r:id="rId8"/>
+    <p:sldId id="263" r:id="rId9"/>
+    <p:sldId id="264" r:id="rId10"/>
+    <p:sldId id="265" r:id="rId11"/>
+    <p:sldId id="266" r:id="rId12"/>
+    <p:sldId id="267" r:id="rId13"/>
+    <p:sldId id="268" r:id="rId14"/>
+    <p:sldId id="269" r:id="rId15"/>
+    <p:sldId id="270" r:id="rId16"/>
+    <p:sldId id="271" r:id="rId17"/>
   </p:sldIdLst>
-  <p:sldSz cx="12191695" cy="6858000" type="screen4x3"/>
+  <p:sldSz cx="12192000" cy="6858000"/>
   <p:notesSz cx="6858000" cy="9144000"/>
   <p:defaultTextStyle>
     <a:defPPr>
@@ -119,6 +119,22 @@
       </a:defRPr>
     </a:lvl9pPr>
   </p:defaultTextStyle>
+  <p:extLst>
+    <p:ext uri="{EFAFB233-063F-42B5-8137-9DF3F51BA10A}">
+      <p15:sldGuideLst xmlns:p15="http://schemas.microsoft.com/office/powerpoint/2012/main">
+        <p15:guide id="1" orient="horz" pos="2160">
+          <p15:clr>
+            <a:srgbClr val="A4A3A4"/>
+          </p15:clr>
+        </p15:guide>
+        <p15:guide id="2" pos="2880">
+          <p15:clr>
+            <a:srgbClr val="A4A3A4"/>
+          </p15:clr>
+        </p15:guide>
+      </p15:sldGuideLst>
+    </p:ext>
+  </p:extLst>
 </p:presentation>
 </file>
 
@@ -160,10 +176,9 @@
           <a:lstStyle/>
           <a:p>
             <a:r>
-              <a:rPr lang="en-US" smtClean="0"/>
+              <a:rPr lang="en-US"/>
               <a:t>Click to edit Master title style</a:t>
             </a:r>
-            <a:endParaRPr lang="en-US"/>
           </a:p>
         </p:txBody>
       </p:sp>
@@ -279,10 +294,9 @@
           </a:lstStyle>
           <a:p>
             <a:r>
-              <a:rPr lang="en-US" smtClean="0"/>
+              <a:rPr lang="en-US"/>
               <a:t>Click to edit Master subtitle style</a:t>
             </a:r>
-            <a:endParaRPr lang="en-US"/>
           </a:p>
         </p:txBody>
       </p:sp>
@@ -303,7 +317,7 @@
           <a:p>
             <a:fld id="{5BCAD085-E8A6-8845-BD4E-CB4CCA059FC4}" type="datetimeFigureOut">
               <a:rPr lang="en-US" smtClean="0"/>
-              <a:t>1/27/13</a:t>
+              <a:t>10/4/2026</a:t>
             </a:fld>
             <a:endParaRPr lang="en-US"/>
           </a:p>
@@ -397,10 +411,9 @@
           <a:lstStyle/>
           <a:p>
             <a:r>
-              <a:rPr lang="en-US" smtClean="0"/>
+              <a:rPr lang="en-US"/>
               <a:t>Click to edit Master title style</a:t>
             </a:r>
-            <a:endParaRPr lang="en-US"/>
           </a:p>
         </p:txBody>
       </p:sp>
@@ -421,38 +434,37 @@
           <a:p>
             <a:pPr lvl="0"/>
             <a:r>
-              <a:rPr lang="en-US" smtClean="0"/>
+              <a:rPr lang="en-US"/>
               <a:t>Click to edit Master text styles</a:t>
             </a:r>
           </a:p>
           <a:p>
             <a:pPr lvl="1"/>
             <a:r>
-              <a:rPr lang="en-US" smtClean="0"/>
+              <a:rPr lang="en-US"/>
               <a:t>Second level</a:t>
             </a:r>
           </a:p>
           <a:p>
             <a:pPr lvl="2"/>
             <a:r>
-              <a:rPr lang="en-US" smtClean="0"/>
+              <a:rPr lang="en-US"/>
               <a:t>Third level</a:t>
             </a:r>
           </a:p>
           <a:p>
             <a:pPr lvl="3"/>
             <a:r>
-              <a:rPr lang="en-US" smtClean="0"/>
+              <a:rPr lang="en-US"/>
               <a:t>Fourth level</a:t>
             </a:r>
           </a:p>
           <a:p>
             <a:pPr lvl="4"/>
             <a:r>
-              <a:rPr lang="en-US" smtClean="0"/>
+              <a:rPr lang="en-US"/>
               <a:t>Fifth level</a:t>
             </a:r>
-            <a:endParaRPr lang="en-US"/>
           </a:p>
         </p:txBody>
       </p:sp>
@@ -473,7 +485,7 @@
           <a:p>
             <a:fld id="{5BCAD085-E8A6-8845-BD4E-CB4CCA059FC4}" type="datetimeFigureOut">
               <a:rPr lang="en-US" smtClean="0"/>
-              <a:t>1/27/13</a:t>
+              <a:t>10/4/2026</a:t>
             </a:fld>
             <a:endParaRPr lang="en-US"/>
           </a:p>
@@ -572,10 +584,9 @@
           <a:lstStyle/>
           <a:p>
             <a:r>
-              <a:rPr lang="en-US" smtClean="0"/>
+              <a:rPr lang="en-US"/>
               <a:t>Click to edit Master title style</a:t>
             </a:r>
-            <a:endParaRPr lang="en-US"/>
           </a:p>
         </p:txBody>
       </p:sp>
@@ -601,38 +612,37 @@
           <a:p>
             <a:pPr lvl="0"/>
             <a:r>
-              <a:rPr lang="en-US" smtClean="0"/>
+              <a:rPr lang="en-US"/>
               <a:t>Click to edit Master text styles</a:t>
             </a:r>
           </a:p>
           <a:p>
             <a:pPr lvl="1"/>
             <a:r>
-              <a:rPr lang="en-US" smtClean="0"/>
+              <a:rPr lang="en-US"/>
               <a:t>Second level</a:t>
             </a:r>
           </a:p>
           <a:p>
             <a:pPr lvl="2"/>
             <a:r>
-              <a:rPr lang="en-US" smtClean="0"/>
+              <a:rPr lang="en-US"/>
               <a:t>Third level</a:t>
             </a:r>
           </a:p>
           <a:p>
             <a:pPr lvl="3"/>
             <a:r>
-              <a:rPr lang="en-US" smtClean="0"/>
+              <a:rPr lang="en-US"/>
               <a:t>Fourth level</a:t>
             </a:r>
           </a:p>
           <a:p>
             <a:pPr lvl="4"/>
             <a:r>
-              <a:rPr lang="en-US" smtClean="0"/>
+              <a:rPr lang="en-US"/>
               <a:t>Fifth level</a:t>
             </a:r>
-            <a:endParaRPr lang="en-US"/>
           </a:p>
         </p:txBody>
       </p:sp>
@@ -653,7 +663,7 @@
           <a:p>
             <a:fld id="{5BCAD085-E8A6-8845-BD4E-CB4CCA059FC4}" type="datetimeFigureOut">
               <a:rPr lang="en-US" smtClean="0"/>
-              <a:t>1/27/13</a:t>
+              <a:t>10/4/2026</a:t>
             </a:fld>
             <a:endParaRPr lang="en-US"/>
           </a:p>
@@ -747,10 +757,9 @@
           <a:lstStyle/>
           <a:p>
             <a:r>
-              <a:rPr lang="en-US" smtClean="0"/>
+              <a:rPr lang="en-US"/>
               <a:t>Click to edit Master title style</a:t>
             </a:r>
-            <a:endParaRPr lang="en-US"/>
           </a:p>
         </p:txBody>
       </p:sp>
@@ -771,38 +780,37 @@
           <a:p>
             <a:pPr lvl="0"/>
             <a:r>
-              <a:rPr lang="en-US" smtClean="0"/>
+              <a:rPr lang="en-US"/>
               <a:t>Click to edit Master text styles</a:t>
             </a:r>
           </a:p>
           <a:p>
             <a:pPr lvl="1"/>
             <a:r>
-              <a:rPr lang="en-US" smtClean="0"/>
+              <a:rPr lang="en-US"/>
               <a:t>Second level</a:t>
             </a:r>
           </a:p>
           <a:p>
             <a:pPr lvl="2"/>
             <a:r>
-              <a:rPr lang="en-US" smtClean="0"/>
+              <a:rPr lang="en-US"/>
               <a:t>Third level</a:t>
             </a:r>
           </a:p>
           <a:p>
             <a:pPr lvl="3"/>
             <a:r>
-              <a:rPr lang="en-US" smtClean="0"/>
+              <a:rPr lang="en-US"/>
               <a:t>Fourth level</a:t>
             </a:r>
           </a:p>
           <a:p>
             <a:pPr lvl="4"/>
             <a:r>
-              <a:rPr lang="en-US" smtClean="0"/>
+              <a:rPr lang="en-US"/>
               <a:t>Fifth level</a:t>
             </a:r>
-            <a:endParaRPr lang="en-US"/>
           </a:p>
         </p:txBody>
       </p:sp>
@@ -823,7 +831,7 @@
           <a:p>
             <a:fld id="{5BCAD085-E8A6-8845-BD4E-CB4CCA059FC4}" type="datetimeFigureOut">
               <a:rPr lang="en-US" smtClean="0"/>
-              <a:t>1/27/13</a:t>
+              <a:t>10/4/2026</a:t>
             </a:fld>
             <a:endParaRPr lang="en-US"/>
           </a:p>
@@ -926,10 +934,9 @@
           </a:lstStyle>
           <a:p>
             <a:r>
-              <a:rPr lang="en-US" smtClean="0"/>
+              <a:rPr lang="en-US"/>
               <a:t>Click to edit Master title style</a:t>
             </a:r>
-            <a:endParaRPr lang="en-US"/>
           </a:p>
         </p:txBody>
       </p:sp>
@@ -1046,7 +1053,7 @@
           <a:p>
             <a:pPr lvl="0"/>
             <a:r>
-              <a:rPr lang="en-US" smtClean="0"/>
+              <a:rPr lang="en-US"/>
               <a:t>Click to edit Master text styles</a:t>
             </a:r>
           </a:p>
@@ -1069,7 +1076,7 @@
           <a:p>
             <a:fld id="{5BCAD085-E8A6-8845-BD4E-CB4CCA059FC4}" type="datetimeFigureOut">
               <a:rPr lang="en-US" smtClean="0"/>
-              <a:t>1/27/13</a:t>
+              <a:t>10/4/2026</a:t>
             </a:fld>
             <a:endParaRPr lang="en-US"/>
           </a:p>
@@ -1163,10 +1170,9 @@
           <a:lstStyle/>
           <a:p>
             <a:r>
-              <a:rPr lang="en-US" smtClean="0"/>
+              <a:rPr lang="en-US"/>
               <a:t>Click to edit Master title style</a:t>
             </a:r>
-            <a:endParaRPr lang="en-US"/>
           </a:p>
         </p:txBody>
       </p:sp>
@@ -1220,38 +1226,37 @@
           <a:p>
             <a:pPr lvl="0"/>
             <a:r>
-              <a:rPr lang="en-US" smtClean="0"/>
+              <a:rPr lang="en-US"/>
               <a:t>Click to edit Master text styles</a:t>
             </a:r>
           </a:p>
           <a:p>
             <a:pPr lvl="1"/>
             <a:r>
-              <a:rPr lang="en-US" smtClean="0"/>
+              <a:rPr lang="en-US"/>
               <a:t>Second level</a:t>
             </a:r>
           </a:p>
           <a:p>
             <a:pPr lvl="2"/>
             <a:r>
-              <a:rPr lang="en-US" smtClean="0"/>
+              <a:rPr lang="en-US"/>
               <a:t>Third level</a:t>
             </a:r>
           </a:p>
           <a:p>
             <a:pPr lvl="3"/>
             <a:r>
-              <a:rPr lang="en-US" smtClean="0"/>
+              <a:rPr lang="en-US"/>
               <a:t>Fourth level</a:t>
             </a:r>
           </a:p>
           <a:p>
             <a:pPr lvl="4"/>
             <a:r>
-              <a:rPr lang="en-US" smtClean="0"/>
+              <a:rPr lang="en-US"/>
               <a:t>Fifth level</a:t>
             </a:r>
-            <a:endParaRPr lang="en-US"/>
           </a:p>
         </p:txBody>
       </p:sp>
@@ -1305,38 +1310,37 @@
           <a:p>
             <a:pPr lvl="0"/>
             <a:r>
-              <a:rPr lang="en-US" smtClean="0"/>
+              <a:rPr lang="en-US"/>
               <a:t>Click to edit Master text styles</a:t>
             </a:r>
           </a:p>
           <a:p>
             <a:pPr lvl="1"/>
             <a:r>
-              <a:rPr lang="en-US" smtClean="0"/>
+              <a:rPr lang="en-US"/>
               <a:t>Second level</a:t>
             </a:r>
           </a:p>
           <a:p>
             <a:pPr lvl="2"/>
             <a:r>
-              <a:rPr lang="en-US" smtClean="0"/>
+              <a:rPr lang="en-US"/>
               <a:t>Third level</a:t>
             </a:r>
           </a:p>
           <a:p>
             <a:pPr lvl="3"/>
             <a:r>
-              <a:rPr lang="en-US" smtClean="0"/>
+              <a:rPr lang="en-US"/>
               <a:t>Fourth level</a:t>
             </a:r>
           </a:p>
           <a:p>
             <a:pPr lvl="4"/>
             <a:r>
-              <a:rPr lang="en-US" smtClean="0"/>
+              <a:rPr lang="en-US"/>
               <a:t>Fifth level</a:t>
             </a:r>
-            <a:endParaRPr lang="en-US"/>
           </a:p>
         </p:txBody>
       </p:sp>
@@ -1357,7 +1361,7 @@
           <a:p>
             <a:fld id="{5BCAD085-E8A6-8845-BD4E-CB4CCA059FC4}" type="datetimeFigureOut">
               <a:rPr lang="en-US" smtClean="0"/>
-              <a:t>1/27/13</a:t>
+              <a:t>10/4/2026</a:t>
             </a:fld>
             <a:endParaRPr lang="en-US"/>
           </a:p>
@@ -1455,10 +1459,9 @@
           </a:lstStyle>
           <a:p>
             <a:r>
-              <a:rPr lang="en-US" smtClean="0"/>
+              <a:rPr lang="en-US"/>
               <a:t>Click to edit Master title style</a:t>
             </a:r>
-            <a:endParaRPr lang="en-US"/>
           </a:p>
         </p:txBody>
       </p:sp>
@@ -1521,7 +1524,7 @@
           <a:p>
             <a:pPr lvl="0"/>
             <a:r>
-              <a:rPr lang="en-US" smtClean="0"/>
+              <a:rPr lang="en-US"/>
               <a:t>Click to edit Master text styles</a:t>
             </a:r>
           </a:p>
@@ -1577,38 +1580,37 @@
           <a:p>
             <a:pPr lvl="0"/>
             <a:r>
-              <a:rPr lang="en-US" smtClean="0"/>
+              <a:rPr lang="en-US"/>
               <a:t>Click to edit Master text styles</a:t>
             </a:r>
           </a:p>
           <a:p>
             <a:pPr lvl="1"/>
             <a:r>
-              <a:rPr lang="en-US" smtClean="0"/>
+              <a:rPr lang="en-US"/>
               <a:t>Second level</a:t>
             </a:r>
           </a:p>
           <a:p>
             <a:pPr lvl="2"/>
             <a:r>
-              <a:rPr lang="en-US" smtClean="0"/>
+              <a:rPr lang="en-US"/>
               <a:t>Third level</a:t>
             </a:r>
           </a:p>
           <a:p>
             <a:pPr lvl="3"/>
             <a:r>
-              <a:rPr lang="en-US" smtClean="0"/>
+              <a:rPr lang="en-US"/>
               <a:t>Fourth level</a:t>
             </a:r>
           </a:p>
           <a:p>
             <a:pPr lvl="4"/>
             <a:r>
-              <a:rPr lang="en-US" smtClean="0"/>
+              <a:rPr lang="en-US"/>
               <a:t>Fifth level</a:t>
             </a:r>
-            <a:endParaRPr lang="en-US"/>
           </a:p>
         </p:txBody>
       </p:sp>
@@ -1671,7 +1673,7 @@
           <a:p>
             <a:pPr lvl="0"/>
             <a:r>
-              <a:rPr lang="en-US" smtClean="0"/>
+              <a:rPr lang="en-US"/>
               <a:t>Click to edit Master text styles</a:t>
             </a:r>
           </a:p>
@@ -1727,38 +1729,37 @@
           <a:p>
             <a:pPr lvl="0"/>
             <a:r>
-              <a:rPr lang="en-US" smtClean="0"/>
+              <a:rPr lang="en-US"/>
               <a:t>Click to edit Master text styles</a:t>
             </a:r>
           </a:p>
           <a:p>
             <a:pPr lvl="1"/>
             <a:r>
-              <a:rPr lang="en-US" smtClean="0"/>
+              <a:rPr lang="en-US"/>
               <a:t>Second level</a:t>
             </a:r>
           </a:p>
           <a:p>
             <a:pPr lvl="2"/>
             <a:r>
-              <a:rPr lang="en-US" smtClean="0"/>
+              <a:rPr lang="en-US"/>
               <a:t>Third level</a:t>
             </a:r>
           </a:p>
           <a:p>
             <a:pPr lvl="3"/>
             <a:r>
-              <a:rPr lang="en-US" smtClean="0"/>
+              <a:rPr lang="en-US"/>
               <a:t>Fourth level</a:t>
             </a:r>
           </a:p>
           <a:p>
             <a:pPr lvl="4"/>
             <a:r>
-              <a:rPr lang="en-US" smtClean="0"/>
+              <a:rPr lang="en-US"/>
               <a:t>Fifth level</a:t>
             </a:r>
-            <a:endParaRPr lang="en-US"/>
           </a:p>
         </p:txBody>
       </p:sp>
@@ -1779,7 +1780,7 @@
           <a:p>
             <a:fld id="{5BCAD085-E8A6-8845-BD4E-CB4CCA059FC4}" type="datetimeFigureOut">
               <a:rPr lang="en-US" smtClean="0"/>
-              <a:t>1/27/13</a:t>
+              <a:t>10/4/2026</a:t>
             </a:fld>
             <a:endParaRPr lang="en-US"/>
           </a:p>
@@ -1873,10 +1874,9 @@
           <a:lstStyle/>
           <a:p>
             <a:r>
-              <a:rPr lang="en-US" smtClean="0"/>
+              <a:rPr lang="en-US"/>
               <a:t>Click to edit Master title style</a:t>
             </a:r>
-            <a:endParaRPr lang="en-US"/>
           </a:p>
         </p:txBody>
       </p:sp>
@@ -1897,7 +1897,7 @@
           <a:p>
             <a:fld id="{5BCAD085-E8A6-8845-BD4E-CB4CCA059FC4}" type="datetimeFigureOut">
               <a:rPr lang="en-US" smtClean="0"/>
-              <a:t>1/27/13</a:t>
+              <a:t>10/4/2026</a:t>
             </a:fld>
             <a:endParaRPr lang="en-US"/>
           </a:p>
@@ -1992,7 +1992,7 @@
           <a:p>
             <a:fld id="{5BCAD085-E8A6-8845-BD4E-CB4CCA059FC4}" type="datetimeFigureOut">
               <a:rPr lang="en-US" smtClean="0"/>
-              <a:t>1/27/13</a:t>
+              <a:t>10/4/2026</a:t>
             </a:fld>
             <a:endParaRPr lang="en-US"/>
           </a:p>
@@ -2095,10 +2095,9 @@
           </a:lstStyle>
           <a:p>
             <a:r>
-              <a:rPr lang="en-US" smtClean="0"/>
+              <a:rPr lang="en-US"/>
               <a:t>Click to edit Master title style</a:t>
             </a:r>
-            <a:endParaRPr lang="en-US"/>
           </a:p>
         </p:txBody>
       </p:sp>
@@ -2152,38 +2151,37 @@
           <a:p>
             <a:pPr lvl="0"/>
             <a:r>
-              <a:rPr lang="en-US" smtClean="0"/>
+              <a:rPr lang="en-US"/>
               <a:t>Click to edit Master text styles</a:t>
             </a:r>
           </a:p>
           <a:p>
             <a:pPr lvl="1"/>
             <a:r>
-              <a:rPr lang="en-US" smtClean="0"/>
+              <a:rPr lang="en-US"/>
               <a:t>Second level</a:t>
             </a:r>
           </a:p>
           <a:p>
             <a:pPr lvl="2"/>
             <a:r>
-              <a:rPr lang="en-US" smtClean="0"/>
+              <a:rPr lang="en-US"/>
               <a:t>Third level</a:t>
             </a:r>
           </a:p>
           <a:p>
             <a:pPr lvl="3"/>
             <a:r>
-              <a:rPr lang="en-US" smtClean="0"/>
+              <a:rPr lang="en-US"/>
               <a:t>Fourth level</a:t>
             </a:r>
           </a:p>
           <a:p>
             <a:pPr lvl="4"/>
             <a:r>
-              <a:rPr lang="en-US" smtClean="0"/>
+              <a:rPr lang="en-US"/>
               <a:t>Fifth level</a:t>
             </a:r>
-            <a:endParaRPr lang="en-US"/>
           </a:p>
         </p:txBody>
       </p:sp>
@@ -2246,7 +2244,7 @@
           <a:p>
             <a:pPr lvl="0"/>
             <a:r>
-              <a:rPr lang="en-US" smtClean="0"/>
+              <a:rPr lang="en-US"/>
               <a:t>Click to edit Master text styles</a:t>
             </a:r>
           </a:p>
@@ -2269,7 +2267,7 @@
           <a:p>
             <a:fld id="{5BCAD085-E8A6-8845-BD4E-CB4CCA059FC4}" type="datetimeFigureOut">
               <a:rPr lang="en-US" smtClean="0"/>
-              <a:t>1/27/13</a:t>
+              <a:t>10/4/2026</a:t>
             </a:fld>
             <a:endParaRPr lang="en-US"/>
           </a:p>
@@ -2372,10 +2370,9 @@
           </a:lstStyle>
           <a:p>
             <a:r>
-              <a:rPr lang="en-US" smtClean="0"/>
+              <a:rPr lang="en-US"/>
               <a:t>Click to edit Master title style</a:t>
             </a:r>
-            <a:endParaRPr lang="en-US"/>
           </a:p>
         </p:txBody>
       </p:sp>
@@ -2499,7 +2496,7 @@
           <a:p>
             <a:pPr lvl="0"/>
             <a:r>
-              <a:rPr lang="en-US" smtClean="0"/>
+              <a:rPr lang="en-US"/>
               <a:t>Click to edit Master text styles</a:t>
             </a:r>
           </a:p>
@@ -2522,7 +2519,7 @@
           <a:p>
             <a:fld id="{5BCAD085-E8A6-8845-BD4E-CB4CCA059FC4}" type="datetimeFigureOut">
               <a:rPr lang="en-US" smtClean="0"/>
-              <a:t>1/27/13</a:t>
+              <a:t>10/4/2026</a:t>
             </a:fld>
             <a:endParaRPr lang="en-US"/>
           </a:p>
@@ -2631,10 +2628,9 @@
           <a:lstStyle/>
           <a:p>
             <a:r>
-              <a:rPr lang="en-US" smtClean="0"/>
+              <a:rPr lang="en-US"/>
               <a:t>Click to edit Master title style</a:t>
             </a:r>
-            <a:endParaRPr lang="en-US"/>
           </a:p>
         </p:txBody>
       </p:sp>
@@ -2665,38 +2661,37 @@
           <a:p>
             <a:pPr lvl="0"/>
             <a:r>
-              <a:rPr lang="en-US" smtClean="0"/>
+              <a:rPr lang="en-US"/>
               <a:t>Click to edit Master text styles</a:t>
             </a:r>
           </a:p>
           <a:p>
             <a:pPr lvl="1"/>
             <a:r>
-              <a:rPr lang="en-US" smtClean="0"/>
+              <a:rPr lang="en-US"/>
               <a:t>Second level</a:t>
             </a:r>
           </a:p>
           <a:p>
             <a:pPr lvl="2"/>
             <a:r>
-              <a:rPr lang="en-US" smtClean="0"/>
+              <a:rPr lang="en-US"/>
               <a:t>Third level</a:t>
             </a:r>
           </a:p>
           <a:p>
             <a:pPr lvl="3"/>
             <a:r>
-              <a:rPr lang="en-US" smtClean="0"/>
+              <a:rPr lang="en-US"/>
               <a:t>Fourth level</a:t>
             </a:r>
           </a:p>
           <a:p>
             <a:pPr lvl="4"/>
             <a:r>
-              <a:rPr lang="en-US" smtClean="0"/>
+              <a:rPr lang="en-US"/>
               <a:t>Fifth level</a:t>
             </a:r>
-            <a:endParaRPr lang="en-US"/>
           </a:p>
         </p:txBody>
       </p:sp>
@@ -2735,7 +2730,7 @@
           <a:p>
             <a:fld id="{5BCAD085-E8A6-8845-BD4E-CB4CCA059FC4}" type="datetimeFigureOut">
               <a:rPr lang="en-US" smtClean="0"/>
-              <a:t>1/27/13</a:t>
+              <a:t>10/4/2026</a:t>
             </a:fld>
             <a:endParaRPr lang="en-US"/>
           </a:p>
@@ -3094,7 +3089,7 @@
 </file>
 
 <file path=ppt/slides/slide1.xml><?xml version="1.0" encoding="utf-8"?>
-<p:sld xmlns:a="http://schemas.openxmlformats.org/drawingml/2006/main" xmlns:p="http://schemas.openxmlformats.org/presentationml/2006/main" xmlns:r="http://schemas.openxmlformats.org/officeDocument/2006/relationships">
+<p:sld xmlns:a="http://schemas.openxmlformats.org/drawingml/2006/main" xmlns:r="http://schemas.openxmlformats.org/officeDocument/2006/relationships" xmlns:p="http://schemas.openxmlformats.org/presentationml/2006/main">
   <p:cSld>
     <p:spTree>
       <p:nvGrpSpPr>
@@ -3102,7 +3097,14 @@
         <p:cNvGrpSpPr/>
         <p:nvPr/>
       </p:nvGrpSpPr>
-      <p:grpSpPr/>
+      <p:grpSpPr>
+        <a:xfrm>
+          <a:off x="0" y="0"/>
+          <a:ext cx="0" cy="0"/>
+          <a:chOff x="0" y="0"/>
+          <a:chExt cx="0" cy="0"/>
+        </a:xfrm>
+      </p:grpSpPr>
       <p:sp>
         <p:nvSpPr>
           <p:cNvPr id="2" name="Rectangle 1"/>
@@ -3143,6 +3145,7 @@
           <a:lstStyle/>
           <a:p>
             <a:pPr algn="ctr"/>
+            <a:endParaRPr/>
           </a:p>
         </p:txBody>
       </p:sp>
@@ -3186,6 +3189,7 @@
           <a:lstStyle/>
           <a:p>
             <a:pPr algn="ctr"/>
+            <a:endParaRPr/>
           </a:p>
         </p:txBody>
       </p:sp>
@@ -3315,6 +3319,7 @@
           <a:lstStyle/>
           <a:p>
             <a:pPr algn="ctr"/>
+            <a:endParaRPr/>
           </a:p>
         </p:txBody>
       </p:sp>
@@ -3327,7 +3332,7 @@
         <p:spPr>
           <a:xfrm>
             <a:off x="1920240" y="3657600"/>
-            <a:ext cx="8351215" cy="2377440"/>
+            <a:ext cx="8351215" cy="1482457"/>
           </a:xfrm>
           <a:prstGeom prst="rect">
             <a:avLst/>
@@ -3351,7 +3356,44 @@
               </a:defRPr>
             </a:pPr>
             <a:r>
-              <a:t>Giảng viên hướng dẫn:  ThS. Lê Văn Quân</a:t>
+              <a:rPr dirty="0" err="1"/>
+              <a:t>Giảng</a:t>
+            </a:r>
+            <a:r>
+              <a:rPr dirty="0"/>
+              <a:t> </a:t>
+            </a:r>
+            <a:r>
+              <a:rPr dirty="0" err="1"/>
+              <a:t>viên</a:t>
+            </a:r>
+            <a:r>
+              <a:rPr dirty="0"/>
+              <a:t> </a:t>
+            </a:r>
+            <a:r>
+              <a:rPr dirty="0" err="1"/>
+              <a:t>hướng</a:t>
+            </a:r>
+            <a:r>
+              <a:rPr dirty="0"/>
+              <a:t> </a:t>
+            </a:r>
+            <a:r>
+              <a:rPr dirty="0" err="1"/>
+              <a:t>dẫn</a:t>
+            </a:r>
+            <a:r>
+              <a:rPr dirty="0"/>
+              <a:t>:  </a:t>
+            </a:r>
+            <a:r>
+              <a:rPr dirty="0" err="1"/>
+              <a:t>ThS</a:t>
+            </a:r>
+            <a:r>
+              <a:rPr dirty="0"/>
+              <a:t>. Lê Văn Quân</a:t>
             </a:r>
           </a:p>
           <a:p>
@@ -3366,7 +3408,52 @@
               </a:defRPr>
             </a:pPr>
             <a:r>
-              <a:t>Nhóm sinh viên thực hiện — Lớp TT602-K16LT:</a:t>
+              <a:rPr dirty="0" err="1"/>
+              <a:t>Nhóm</a:t>
+            </a:r>
+            <a:r>
+              <a:rPr dirty="0"/>
+              <a:t> </a:t>
+            </a:r>
+            <a:r>
+              <a:rPr dirty="0" err="1"/>
+              <a:t>sinh</a:t>
+            </a:r>
+            <a:r>
+              <a:rPr dirty="0"/>
+              <a:t> </a:t>
+            </a:r>
+            <a:r>
+              <a:rPr dirty="0" err="1"/>
+              <a:t>viên</a:t>
+            </a:r>
+            <a:r>
+              <a:rPr dirty="0"/>
+              <a:t> </a:t>
+            </a:r>
+            <a:r>
+              <a:rPr dirty="0" err="1"/>
+              <a:t>thực</a:t>
+            </a:r>
+            <a:r>
+              <a:rPr dirty="0"/>
+              <a:t> </a:t>
+            </a:r>
+            <a:r>
+              <a:rPr dirty="0" err="1"/>
+              <a:t>hiện</a:t>
+            </a:r>
+            <a:r>
+              <a:rPr dirty="0"/>
+              <a:t> — </a:t>
+            </a:r>
+            <a:r>
+              <a:rPr dirty="0" err="1"/>
+              <a:t>Lớp</a:t>
+            </a:r>
+            <a:r>
+              <a:rPr dirty="0"/>
+              <a:t> TT602-K16LT:</a:t>
             </a:r>
           </a:p>
           <a:p>
@@ -3381,8 +3468,38 @@
               </a:defRPr>
             </a:pPr>
             <a:r>
-              <a:t>1. Vũ Đình Đạo (Nhóm trưởng)                       2. Ngô Gia Bảo</a:t>
-            </a:r>
+              <a:rPr dirty="0"/>
+              <a:t>1. Vũ </a:t>
+            </a:r>
+            <a:r>
+              <a:rPr dirty="0" err="1"/>
+              <a:t>Đình</a:t>
+            </a:r>
+            <a:r>
+              <a:rPr dirty="0"/>
+              <a:t> </a:t>
+            </a:r>
+            <a:r>
+              <a:rPr dirty="0" err="1"/>
+              <a:t>Đạo</a:t>
+            </a:r>
+            <a:r>
+              <a:rPr dirty="0"/>
+              <a:t> </a:t>
+            </a:r>
+            <a:r>
+              <a:rPr lang="en-US" dirty="0"/>
+              <a:t>		</a:t>
+            </a:r>
+            <a:r>
+              <a:rPr dirty="0"/>
+              <a:t>                      2. Ngô Gia Bảo</a:t>
+            </a:r>
+            <a:r>
+              <a:rPr lang="vi-VN" dirty="0"/>
+              <a:t> (Nhóm trưởng) </a:t>
+            </a:r>
+            <a:endParaRPr dirty="0"/>
           </a:p>
           <a:p>
             <a:pPr>
@@ -3396,8 +3513,14 @@
               </a:defRPr>
             </a:pPr>
             <a:r>
-              <a:t>3. Nguyễn Tiến Dũng                                4. Lê Đức Trọng</a:t>
-            </a:r>
+              <a:rPr dirty="0"/>
+              <a:t>3. Nguyễn Tiến Dũng                                4. Lê Đức </a:t>
+            </a:r>
+            <a:r>
+              <a:rPr dirty="0" err="1"/>
+              <a:t>Trọng</a:t>
+            </a:r>
+            <a:endParaRPr dirty="0"/>
           </a:p>
           <a:p>
             <a:pPr>
@@ -3408,6 +3531,7 @@
               </a:defRPr>
             </a:pPr>
             <a:r>
+              <a:rPr dirty="0"/>
               <a:t>✦ Kotlin 2.0  ✦ Jetpack Compose M3  ✦ Room Database v3  ✦ MVVM + UDF  ✦ 100% Offline-First</a:t>
             </a:r>
           </a:p>
@@ -3422,7 +3546,7 @@
 </file>
 
 <file path=ppt/slides/slide10.xml><?xml version="1.0" encoding="utf-8"?>
-<p:sld xmlns:a="http://schemas.openxmlformats.org/drawingml/2006/main" xmlns:p="http://schemas.openxmlformats.org/presentationml/2006/main" xmlns:r="http://schemas.openxmlformats.org/officeDocument/2006/relationships">
+<p:sld xmlns:a="http://schemas.openxmlformats.org/drawingml/2006/main" xmlns:r="http://schemas.openxmlformats.org/officeDocument/2006/relationships" xmlns:p="http://schemas.openxmlformats.org/presentationml/2006/main">
   <p:cSld>
     <p:spTree>
       <p:nvGrpSpPr>
@@ -3430,7 +3554,14 @@
         <p:cNvGrpSpPr/>
         <p:nvPr/>
       </p:nvGrpSpPr>
-      <p:grpSpPr/>
+      <p:grpSpPr>
+        <a:xfrm>
+          <a:off x="0" y="0"/>
+          <a:ext cx="0" cy="0"/>
+          <a:chOff x="0" y="0"/>
+          <a:chExt cx="0" cy="0"/>
+        </a:xfrm>
+      </p:grpSpPr>
       <p:sp>
         <p:nvSpPr>
           <p:cNvPr id="2" name="Rectangle 1"/>
@@ -3471,6 +3602,7 @@
           <a:lstStyle/>
           <a:p>
             <a:pPr algn="ctr"/>
+            <a:endParaRPr/>
           </a:p>
         </p:txBody>
       </p:sp>
@@ -3619,6 +3751,7 @@
           <a:lstStyle/>
           <a:p>
             <a:pPr algn="ctr"/>
+            <a:endParaRPr/>
           </a:p>
         </p:txBody>
       </p:sp>
@@ -3699,6 +3832,7 @@
           <a:lstStyle/>
           <a:p>
             <a:pPr algn="ctr"/>
+            <a:endParaRPr/>
           </a:p>
         </p:txBody>
       </p:sp>
@@ -3725,7 +3859,7 @@
           <a:lstStyle/>
           <a:p>
             <a:pPr algn="ctr">
-              <a:defRPr b="1" sz="1050">
+              <a:defRPr sz="1050" b="1">
                 <a:solidFill>
                   <a:srgbClr val="1B4F72"/>
                 </a:solidFill>
@@ -3803,6 +3937,7 @@
           <a:lstStyle/>
           <a:p>
             <a:pPr algn="ctr"/>
+            <a:endParaRPr/>
           </a:p>
         </p:txBody>
       </p:sp>
@@ -3829,7 +3964,7 @@
           <a:lstStyle/>
           <a:p>
             <a:pPr algn="ctr">
-              <a:defRPr b="1" sz="1050">
+              <a:defRPr sz="1050" b="1">
                 <a:solidFill>
                   <a:srgbClr val="1B4F72"/>
                 </a:solidFill>
@@ -3907,6 +4042,7 @@
           <a:lstStyle/>
           <a:p>
             <a:pPr algn="ctr"/>
+            <a:endParaRPr/>
           </a:p>
         </p:txBody>
       </p:sp>
@@ -3951,7 +4087,7 @@
               <a:spcAft>
                 <a:spcPts val="600"/>
               </a:spcAft>
-              <a:defRPr b="1" sz="1350">
+              <a:defRPr sz="1350" b="1">
                 <a:solidFill>
                   <a:srgbClr val="1B4F72"/>
                 </a:solidFill>
@@ -4065,6 +4201,7 @@
           <a:lstStyle/>
           <a:p>
             <a:pPr algn="ctr"/>
+            <a:endParaRPr/>
           </a:p>
         </p:txBody>
       </p:sp>
@@ -4109,7 +4246,7 @@
               <a:spcAft>
                 <a:spcPts val="600"/>
               </a:spcAft>
-              <a:defRPr b="1" sz="1350">
+              <a:defRPr sz="1350" b="1">
                 <a:solidFill>
                   <a:srgbClr val="0E6655"/>
                 </a:solidFill>
@@ -4190,7 +4327,7 @@
 </file>
 
 <file path=ppt/slides/slide11.xml><?xml version="1.0" encoding="utf-8"?>
-<p:sld xmlns:a="http://schemas.openxmlformats.org/drawingml/2006/main" xmlns:p="http://schemas.openxmlformats.org/presentationml/2006/main" xmlns:r="http://schemas.openxmlformats.org/officeDocument/2006/relationships">
+<p:sld xmlns:a="http://schemas.openxmlformats.org/drawingml/2006/main" xmlns:r="http://schemas.openxmlformats.org/officeDocument/2006/relationships" xmlns:p="http://schemas.openxmlformats.org/presentationml/2006/main">
   <p:cSld>
     <p:spTree>
       <p:nvGrpSpPr>
@@ -4198,7 +4335,14 @@
         <p:cNvGrpSpPr/>
         <p:nvPr/>
       </p:nvGrpSpPr>
-      <p:grpSpPr/>
+      <p:grpSpPr>
+        <a:xfrm>
+          <a:off x="0" y="0"/>
+          <a:ext cx="0" cy="0"/>
+          <a:chOff x="0" y="0"/>
+          <a:chExt cx="0" cy="0"/>
+        </a:xfrm>
+      </p:grpSpPr>
       <p:sp>
         <p:nvSpPr>
           <p:cNvPr id="2" name="Rectangle 1"/>
@@ -4239,6 +4383,7 @@
           <a:lstStyle/>
           <a:p>
             <a:pPr algn="ctr"/>
+            <a:endParaRPr/>
           </a:p>
         </p:txBody>
       </p:sp>
@@ -4387,6 +4532,7 @@
           <a:lstStyle/>
           <a:p>
             <a:pPr algn="ctr"/>
+            <a:endParaRPr/>
           </a:p>
         </p:txBody>
       </p:sp>
@@ -4467,6 +4613,7 @@
           <a:lstStyle/>
           <a:p>
             <a:pPr algn="ctr"/>
+            <a:endParaRPr/>
           </a:p>
         </p:txBody>
       </p:sp>
@@ -4493,7 +4640,7 @@
           <a:lstStyle/>
           <a:p>
             <a:pPr algn="ctr">
-              <a:defRPr b="1" sz="1050">
+              <a:defRPr sz="1050" b="1">
                 <a:solidFill>
                   <a:srgbClr val="1B4F72"/>
                 </a:solidFill>
@@ -4571,6 +4718,7 @@
           <a:lstStyle/>
           <a:p>
             <a:pPr algn="ctr"/>
+            <a:endParaRPr/>
           </a:p>
         </p:txBody>
       </p:sp>
@@ -4597,7 +4745,7 @@
           <a:lstStyle/>
           <a:p>
             <a:pPr algn="ctr">
-              <a:defRPr b="1" sz="1050">
+              <a:defRPr sz="1050" b="1">
                 <a:solidFill>
                   <a:srgbClr val="1B4F72"/>
                 </a:solidFill>
@@ -4675,6 +4823,7 @@
           <a:lstStyle/>
           <a:p>
             <a:pPr algn="ctr"/>
+            <a:endParaRPr/>
           </a:p>
         </p:txBody>
       </p:sp>
@@ -4719,7 +4868,7 @@
               <a:spcAft>
                 <a:spcPts val="600"/>
               </a:spcAft>
-              <a:defRPr b="1" sz="1350">
+              <a:defRPr sz="1350" b="1">
                 <a:solidFill>
                   <a:srgbClr val="1B4F72"/>
                 </a:solidFill>
@@ -4833,6 +4982,7 @@
           <a:lstStyle/>
           <a:p>
             <a:pPr algn="ctr"/>
+            <a:endParaRPr/>
           </a:p>
         </p:txBody>
       </p:sp>
@@ -4877,7 +5027,7 @@
               <a:spcAft>
                 <a:spcPts val="600"/>
               </a:spcAft>
-              <a:defRPr b="1" sz="1350">
+              <a:defRPr sz="1350" b="1">
                 <a:solidFill>
                   <a:srgbClr val="0E6655"/>
                 </a:solidFill>
@@ -4958,7 +5108,7 @@
 </file>
 
 <file path=ppt/slides/slide12.xml><?xml version="1.0" encoding="utf-8"?>
-<p:sld xmlns:a="http://schemas.openxmlformats.org/drawingml/2006/main" xmlns:p="http://schemas.openxmlformats.org/presentationml/2006/main" xmlns:r="http://schemas.openxmlformats.org/officeDocument/2006/relationships">
+<p:sld xmlns:a="http://schemas.openxmlformats.org/drawingml/2006/main" xmlns:r="http://schemas.openxmlformats.org/officeDocument/2006/relationships" xmlns:p="http://schemas.openxmlformats.org/presentationml/2006/main">
   <p:cSld>
     <p:spTree>
       <p:nvGrpSpPr>
@@ -4966,7 +5116,14 @@
         <p:cNvGrpSpPr/>
         <p:nvPr/>
       </p:nvGrpSpPr>
-      <p:grpSpPr/>
+      <p:grpSpPr>
+        <a:xfrm>
+          <a:off x="0" y="0"/>
+          <a:ext cx="0" cy="0"/>
+          <a:chOff x="0" y="0"/>
+          <a:chExt cx="0" cy="0"/>
+        </a:xfrm>
+      </p:grpSpPr>
       <p:sp>
         <p:nvSpPr>
           <p:cNvPr id="2" name="Rectangle 1"/>
@@ -5007,6 +5164,7 @@
           <a:lstStyle/>
           <a:p>
             <a:pPr algn="ctr"/>
+            <a:endParaRPr/>
           </a:p>
         </p:txBody>
       </p:sp>
@@ -5155,6 +5313,7 @@
           <a:lstStyle/>
           <a:p>
             <a:pPr algn="ctr"/>
+            <a:endParaRPr/>
           </a:p>
         </p:txBody>
       </p:sp>
@@ -5235,6 +5394,7 @@
           <a:lstStyle/>
           <a:p>
             <a:pPr algn="ctr"/>
+            <a:endParaRPr/>
           </a:p>
         </p:txBody>
       </p:sp>
@@ -5261,7 +5421,7 @@
           <a:lstStyle/>
           <a:p>
             <a:pPr algn="ctr">
-              <a:defRPr b="1" sz="1050">
+              <a:defRPr sz="1050" b="1">
                 <a:solidFill>
                   <a:srgbClr val="1B4F72"/>
                 </a:solidFill>
@@ -5339,6 +5499,7 @@
           <a:lstStyle/>
           <a:p>
             <a:pPr algn="ctr"/>
+            <a:endParaRPr/>
           </a:p>
         </p:txBody>
       </p:sp>
@@ -5365,7 +5526,7 @@
           <a:lstStyle/>
           <a:p>
             <a:pPr algn="ctr">
-              <a:defRPr b="1" sz="1050">
+              <a:defRPr sz="1050" b="1">
                 <a:solidFill>
                   <a:srgbClr val="1B4F72"/>
                 </a:solidFill>
@@ -5443,6 +5604,7 @@
           <a:lstStyle/>
           <a:p>
             <a:pPr algn="ctr"/>
+            <a:endParaRPr/>
           </a:p>
         </p:txBody>
       </p:sp>
@@ -5487,7 +5649,7 @@
               <a:spcAft>
                 <a:spcPts val="600"/>
               </a:spcAft>
-              <a:defRPr b="1" sz="1350">
+              <a:defRPr sz="1350" b="1">
                 <a:solidFill>
                   <a:srgbClr val="1B4F72"/>
                 </a:solidFill>
@@ -5601,6 +5763,7 @@
           <a:lstStyle/>
           <a:p>
             <a:pPr algn="ctr"/>
+            <a:endParaRPr/>
           </a:p>
         </p:txBody>
       </p:sp>
@@ -5645,7 +5808,7 @@
               <a:spcAft>
                 <a:spcPts val="600"/>
               </a:spcAft>
-              <a:defRPr b="1" sz="1350">
+              <a:defRPr sz="1350" b="1">
                 <a:solidFill>
                   <a:srgbClr val="0E6655"/>
                 </a:solidFill>
@@ -5726,7 +5889,7 @@
 </file>
 
 <file path=ppt/slides/slide13.xml><?xml version="1.0" encoding="utf-8"?>
-<p:sld xmlns:a="http://schemas.openxmlformats.org/drawingml/2006/main" xmlns:p="http://schemas.openxmlformats.org/presentationml/2006/main" xmlns:r="http://schemas.openxmlformats.org/officeDocument/2006/relationships">
+<p:sld xmlns:a="http://schemas.openxmlformats.org/drawingml/2006/main" xmlns:r="http://schemas.openxmlformats.org/officeDocument/2006/relationships" xmlns:p="http://schemas.openxmlformats.org/presentationml/2006/main">
   <p:cSld>
     <p:spTree>
       <p:nvGrpSpPr>
@@ -5734,7 +5897,14 @@
         <p:cNvGrpSpPr/>
         <p:nvPr/>
       </p:nvGrpSpPr>
-      <p:grpSpPr/>
+      <p:grpSpPr>
+        <a:xfrm>
+          <a:off x="0" y="0"/>
+          <a:ext cx="0" cy="0"/>
+          <a:chOff x="0" y="0"/>
+          <a:chExt cx="0" cy="0"/>
+        </a:xfrm>
+      </p:grpSpPr>
       <p:sp>
         <p:nvSpPr>
           <p:cNvPr id="2" name="Rectangle 1"/>
@@ -5775,6 +5945,7 @@
           <a:lstStyle/>
           <a:p>
             <a:pPr algn="ctr"/>
+            <a:endParaRPr/>
           </a:p>
         </p:txBody>
       </p:sp>
@@ -5923,6 +6094,7 @@
           <a:lstStyle/>
           <a:p>
             <a:pPr algn="ctr"/>
+            <a:endParaRPr/>
           </a:p>
         </p:txBody>
       </p:sp>
@@ -6003,6 +6175,7 @@
           <a:lstStyle/>
           <a:p>
             <a:pPr algn="ctr"/>
+            <a:endParaRPr/>
           </a:p>
         </p:txBody>
       </p:sp>
@@ -6029,7 +6202,7 @@
           <a:lstStyle/>
           <a:p>
             <a:pPr algn="ctr">
-              <a:defRPr b="1" sz="2400">
+              <a:defRPr sz="2400" b="1">
                 <a:solidFill>
                   <a:srgbClr val="E65100"/>
                 </a:solidFill>
@@ -6044,7 +6217,7 @@
               <a:spcBef>
                 <a:spcPts val="200"/>
               </a:spcBef>
-              <a:defRPr b="1" sz="1100">
+              <a:defRPr sz="1100" b="1">
                 <a:solidFill>
                   <a:srgbClr val="1B4F72"/>
                 </a:solidFill>
@@ -6113,6 +6286,7 @@
           <a:lstStyle/>
           <a:p>
             <a:pPr algn="ctr"/>
+            <a:endParaRPr/>
           </a:p>
         </p:txBody>
       </p:sp>
@@ -6139,7 +6313,7 @@
           <a:lstStyle/>
           <a:p>
             <a:pPr algn="ctr">
-              <a:defRPr b="1" sz="2400">
+              <a:defRPr sz="2400" b="1">
                 <a:solidFill>
                   <a:srgbClr val="E65100"/>
                 </a:solidFill>
@@ -6154,7 +6328,7 @@
               <a:spcBef>
                 <a:spcPts val="200"/>
               </a:spcBef>
-              <a:defRPr b="1" sz="1100">
+              <a:defRPr sz="1100" b="1">
                 <a:solidFill>
                   <a:srgbClr val="1B4F72"/>
                 </a:solidFill>
@@ -6223,6 +6397,7 @@
           <a:lstStyle/>
           <a:p>
             <a:pPr algn="ctr"/>
+            <a:endParaRPr/>
           </a:p>
         </p:txBody>
       </p:sp>
@@ -6249,7 +6424,7 @@
           <a:lstStyle/>
           <a:p>
             <a:pPr algn="ctr">
-              <a:defRPr b="1" sz="2400">
+              <a:defRPr sz="2400" b="1">
                 <a:solidFill>
                   <a:srgbClr val="E65100"/>
                 </a:solidFill>
@@ -6264,7 +6439,7 @@
               <a:spcBef>
                 <a:spcPts val="200"/>
               </a:spcBef>
-              <a:defRPr b="1" sz="1100">
+              <a:defRPr sz="1100" b="1">
                 <a:solidFill>
                   <a:srgbClr val="1B4F72"/>
                 </a:solidFill>
@@ -6333,6 +6508,7 @@
           <a:lstStyle/>
           <a:p>
             <a:pPr algn="ctr"/>
+            <a:endParaRPr/>
           </a:p>
         </p:txBody>
       </p:sp>
@@ -6359,7 +6535,7 @@
           <a:lstStyle/>
           <a:p>
             <a:pPr algn="ctr">
-              <a:defRPr b="1" sz="2400">
+              <a:defRPr sz="2400" b="1">
                 <a:solidFill>
                   <a:srgbClr val="E65100"/>
                 </a:solidFill>
@@ -6374,7 +6550,7 @@
               <a:spcBef>
                 <a:spcPts val="200"/>
               </a:spcBef>
-              <a:defRPr b="1" sz="1100">
+              <a:defRPr sz="1100" b="1">
                 <a:solidFill>
                   <a:srgbClr val="1B4F72"/>
                 </a:solidFill>
@@ -6443,6 +6619,7 @@
           <a:lstStyle/>
           <a:p>
             <a:pPr algn="ctr"/>
+            <a:endParaRPr/>
           </a:p>
         </p:txBody>
       </p:sp>
@@ -6487,7 +6664,7 @@
               <a:spcAft>
                 <a:spcPts val="600"/>
               </a:spcAft>
-              <a:defRPr b="1" sz="1350">
+              <a:defRPr sz="1350" b="1">
                 <a:solidFill>
                   <a:srgbClr val="1B4F72"/>
                 </a:solidFill>
@@ -6601,6 +6778,7 @@
           <a:lstStyle/>
           <a:p>
             <a:pPr algn="ctr"/>
+            <a:endParaRPr/>
           </a:p>
         </p:txBody>
       </p:sp>
@@ -6645,7 +6823,7 @@
               <a:spcAft>
                 <a:spcPts val="600"/>
               </a:spcAft>
-              <a:defRPr b="1" sz="1350">
+              <a:defRPr sz="1350" b="1">
                 <a:solidFill>
                   <a:srgbClr val="0E6655"/>
                 </a:solidFill>
@@ -6726,7 +6904,7 @@
 </file>
 
 <file path=ppt/slides/slide14.xml><?xml version="1.0" encoding="utf-8"?>
-<p:sld xmlns:a="http://schemas.openxmlformats.org/drawingml/2006/main" xmlns:p="http://schemas.openxmlformats.org/presentationml/2006/main" xmlns:r="http://schemas.openxmlformats.org/officeDocument/2006/relationships">
+<p:sld xmlns:a="http://schemas.openxmlformats.org/drawingml/2006/main" xmlns:r="http://schemas.openxmlformats.org/officeDocument/2006/relationships" xmlns:p="http://schemas.openxmlformats.org/presentationml/2006/main">
   <p:cSld>
     <p:spTree>
       <p:nvGrpSpPr>
@@ -6734,7 +6912,14 @@
         <p:cNvGrpSpPr/>
         <p:nvPr/>
       </p:nvGrpSpPr>
-      <p:grpSpPr/>
+      <p:grpSpPr>
+        <a:xfrm>
+          <a:off x="0" y="0"/>
+          <a:ext cx="0" cy="0"/>
+          <a:chOff x="0" y="0"/>
+          <a:chExt cx="0" cy="0"/>
+        </a:xfrm>
+      </p:grpSpPr>
       <p:sp>
         <p:nvSpPr>
           <p:cNvPr id="2" name="Rectangle 1"/>
@@ -6775,6 +6960,7 @@
           <a:lstStyle/>
           <a:p>
             <a:pPr algn="ctr"/>
+            <a:endParaRPr/>
           </a:p>
         </p:txBody>
       </p:sp>
@@ -6923,6 +7109,7 @@
           <a:lstStyle/>
           <a:p>
             <a:pPr algn="ctr"/>
+            <a:endParaRPr/>
           </a:p>
         </p:txBody>
       </p:sp>
@@ -7003,6 +7190,7 @@
           <a:lstStyle/>
           <a:p>
             <a:pPr algn="ctr"/>
+            <a:endParaRPr/>
           </a:p>
         </p:txBody>
       </p:sp>
@@ -7047,7 +7235,7 @@
               <a:spcAft>
                 <a:spcPts val="600"/>
               </a:spcAft>
-              <a:defRPr b="1" sz="1350">
+              <a:defRPr sz="1350" b="1">
                 <a:solidFill>
                   <a:srgbClr val="0E6655"/>
                 </a:solidFill>
@@ -7176,6 +7364,7 @@
           <a:lstStyle/>
           <a:p>
             <a:pPr algn="ctr"/>
+            <a:endParaRPr/>
           </a:p>
         </p:txBody>
       </p:sp>
@@ -7220,7 +7409,7 @@
               <a:spcAft>
                 <a:spcPts val="600"/>
               </a:spcAft>
-              <a:defRPr b="1" sz="1350">
+              <a:defRPr sz="1350" b="1">
                 <a:solidFill>
                   <a:srgbClr val="E65100"/>
                 </a:solidFill>
@@ -7301,7 +7490,7 @@
 </file>
 
 <file path=ppt/slides/slide15.xml><?xml version="1.0" encoding="utf-8"?>
-<p:sld xmlns:a="http://schemas.openxmlformats.org/drawingml/2006/main" xmlns:p="http://schemas.openxmlformats.org/presentationml/2006/main" xmlns:r="http://schemas.openxmlformats.org/officeDocument/2006/relationships">
+<p:sld xmlns:a="http://schemas.openxmlformats.org/drawingml/2006/main" xmlns:r="http://schemas.openxmlformats.org/officeDocument/2006/relationships" xmlns:p="http://schemas.openxmlformats.org/presentationml/2006/main">
   <p:cSld>
     <p:spTree>
       <p:nvGrpSpPr>
@@ -7309,7 +7498,14 @@
         <p:cNvGrpSpPr/>
         <p:nvPr/>
       </p:nvGrpSpPr>
-      <p:grpSpPr/>
+      <p:grpSpPr>
+        <a:xfrm>
+          <a:off x="0" y="0"/>
+          <a:ext cx="0" cy="0"/>
+          <a:chOff x="0" y="0"/>
+          <a:chExt cx="0" cy="0"/>
+        </a:xfrm>
+      </p:grpSpPr>
       <p:sp>
         <p:nvSpPr>
           <p:cNvPr id="2" name="Rectangle 1"/>
@@ -7350,6 +7546,7 @@
           <a:lstStyle/>
           <a:p>
             <a:pPr algn="ctr"/>
+            <a:endParaRPr/>
           </a:p>
         </p:txBody>
       </p:sp>
@@ -7498,6 +7695,7 @@
           <a:lstStyle/>
           <a:p>
             <a:pPr algn="ctr"/>
+            <a:endParaRPr/>
           </a:p>
         </p:txBody>
       </p:sp>
@@ -7578,6 +7776,7 @@
           <a:lstStyle/>
           <a:p>
             <a:pPr algn="ctr"/>
+            <a:endParaRPr/>
           </a:p>
         </p:txBody>
       </p:sp>
@@ -7590,7 +7789,7 @@
         <p:spPr>
           <a:xfrm>
             <a:off x="960120" y="1645920"/>
-            <a:ext cx="2880360" cy="4389120"/>
+            <a:ext cx="2880360" cy="2090316"/>
           </a:xfrm>
           <a:prstGeom prst="rect">
             <a:avLst/>
@@ -7614,6 +7813,7 @@
               </a:defRPr>
             </a:pPr>
             <a:r>
+              <a:rPr dirty="0"/>
               <a:t>NGẮN HẠN: THỊ GIÁC MÁY TÍNH</a:t>
             </a:r>
           </a:p>
@@ -7622,14 +7822,15 @@
               <a:spcAft>
                 <a:spcPts val="600"/>
               </a:spcAft>
-              <a:defRPr b="1" sz="1350">
+              <a:defRPr sz="1350" b="1">
                 <a:solidFill>
                   <a:srgbClr val="1B4F72"/>
                 </a:solidFill>
               </a:defRPr>
             </a:pPr>
             <a:r>
-              <a:t>📸 AI Camera Vision (1-3 tháng)</a:t>
+              <a:rPr dirty="0"/>
+              <a:t>📸 AI Camera Vision</a:t>
             </a:r>
           </a:p>
           <a:p>
@@ -7644,7 +7845,224 @@
               </a:defRPr>
             </a:pPr>
             <a:r>
-              <a:t>•  Quét hóa đơn mua hàng siêu thị: Tự động trích xuất tên nguyên liệu và hạn dùng để nhập kho tủ lạnh Pantry chỉ với 1 bức ảnh chụp.</a:t>
+              <a:rPr dirty="0"/>
+              <a:t>•  </a:t>
+            </a:r>
+            <a:r>
+              <a:rPr dirty="0" err="1"/>
+              <a:t>Quét</a:t>
+            </a:r>
+            <a:r>
+              <a:rPr dirty="0"/>
+              <a:t> </a:t>
+            </a:r>
+            <a:r>
+              <a:rPr dirty="0" err="1"/>
+              <a:t>hóa</a:t>
+            </a:r>
+            <a:r>
+              <a:rPr dirty="0"/>
+              <a:t> </a:t>
+            </a:r>
+            <a:r>
+              <a:rPr dirty="0" err="1"/>
+              <a:t>đơn</a:t>
+            </a:r>
+            <a:r>
+              <a:rPr dirty="0"/>
+              <a:t> </a:t>
+            </a:r>
+            <a:r>
+              <a:rPr dirty="0" err="1"/>
+              <a:t>mua</a:t>
+            </a:r>
+            <a:r>
+              <a:rPr dirty="0"/>
+              <a:t> </a:t>
+            </a:r>
+            <a:r>
+              <a:rPr dirty="0" err="1"/>
+              <a:t>hàng</a:t>
+            </a:r>
+            <a:r>
+              <a:rPr dirty="0"/>
+              <a:t> </a:t>
+            </a:r>
+            <a:r>
+              <a:rPr dirty="0" err="1"/>
+              <a:t>siêu</a:t>
+            </a:r>
+            <a:r>
+              <a:rPr dirty="0"/>
+              <a:t> </a:t>
+            </a:r>
+            <a:r>
+              <a:rPr dirty="0" err="1"/>
+              <a:t>thị</a:t>
+            </a:r>
+            <a:r>
+              <a:rPr dirty="0"/>
+              <a:t>: </a:t>
+            </a:r>
+            <a:r>
+              <a:rPr dirty="0" err="1"/>
+              <a:t>Tự</a:t>
+            </a:r>
+            <a:r>
+              <a:rPr dirty="0"/>
+              <a:t> </a:t>
+            </a:r>
+            <a:r>
+              <a:rPr dirty="0" err="1"/>
+              <a:t>động</a:t>
+            </a:r>
+            <a:r>
+              <a:rPr dirty="0"/>
+              <a:t> </a:t>
+            </a:r>
+            <a:r>
+              <a:rPr dirty="0" err="1"/>
+              <a:t>trích</a:t>
+            </a:r>
+            <a:r>
+              <a:rPr dirty="0"/>
+              <a:t> </a:t>
+            </a:r>
+            <a:r>
+              <a:rPr dirty="0" err="1"/>
+              <a:t>xuất</a:t>
+            </a:r>
+            <a:r>
+              <a:rPr dirty="0"/>
+              <a:t> </a:t>
+            </a:r>
+            <a:r>
+              <a:rPr dirty="0" err="1"/>
+              <a:t>tên</a:t>
+            </a:r>
+            <a:r>
+              <a:rPr dirty="0"/>
+              <a:t> </a:t>
+            </a:r>
+            <a:r>
+              <a:rPr dirty="0" err="1"/>
+              <a:t>nguyên</a:t>
+            </a:r>
+            <a:r>
+              <a:rPr dirty="0"/>
+              <a:t> </a:t>
+            </a:r>
+            <a:r>
+              <a:rPr dirty="0" err="1"/>
+              <a:t>liệu</a:t>
+            </a:r>
+            <a:r>
+              <a:rPr dirty="0"/>
+              <a:t> </a:t>
+            </a:r>
+            <a:r>
+              <a:rPr dirty="0" err="1"/>
+              <a:t>và</a:t>
+            </a:r>
+            <a:r>
+              <a:rPr dirty="0"/>
+              <a:t> </a:t>
+            </a:r>
+            <a:r>
+              <a:rPr dirty="0" err="1"/>
+              <a:t>hạn</a:t>
+            </a:r>
+            <a:r>
+              <a:rPr dirty="0"/>
+              <a:t> </a:t>
+            </a:r>
+            <a:r>
+              <a:rPr dirty="0" err="1"/>
+              <a:t>dùng</a:t>
+            </a:r>
+            <a:r>
+              <a:rPr dirty="0"/>
+              <a:t> </a:t>
+            </a:r>
+            <a:r>
+              <a:rPr dirty="0" err="1"/>
+              <a:t>để</a:t>
+            </a:r>
+            <a:r>
+              <a:rPr dirty="0"/>
+              <a:t> </a:t>
+            </a:r>
+            <a:r>
+              <a:rPr dirty="0" err="1"/>
+              <a:t>nhập</a:t>
+            </a:r>
+            <a:r>
+              <a:rPr dirty="0"/>
+              <a:t> </a:t>
+            </a:r>
+            <a:r>
+              <a:rPr dirty="0" err="1"/>
+              <a:t>kho</a:t>
+            </a:r>
+            <a:r>
+              <a:rPr dirty="0"/>
+              <a:t> </a:t>
+            </a:r>
+            <a:r>
+              <a:rPr dirty="0" err="1"/>
+              <a:t>tủ</a:t>
+            </a:r>
+            <a:r>
+              <a:rPr dirty="0"/>
+              <a:t> </a:t>
+            </a:r>
+            <a:r>
+              <a:rPr dirty="0" err="1"/>
+              <a:t>lạnh</a:t>
+            </a:r>
+            <a:r>
+              <a:rPr dirty="0"/>
+              <a:t> Pantry </a:t>
+            </a:r>
+            <a:r>
+              <a:rPr dirty="0" err="1"/>
+              <a:t>chỉ</a:t>
+            </a:r>
+            <a:r>
+              <a:rPr dirty="0"/>
+              <a:t> </a:t>
+            </a:r>
+            <a:r>
+              <a:rPr dirty="0" err="1"/>
+              <a:t>với</a:t>
+            </a:r>
+            <a:r>
+              <a:rPr dirty="0"/>
+              <a:t> 1 </a:t>
+            </a:r>
+            <a:r>
+              <a:rPr dirty="0" err="1"/>
+              <a:t>bức</a:t>
+            </a:r>
+            <a:r>
+              <a:rPr dirty="0"/>
+              <a:t> </a:t>
+            </a:r>
+            <a:r>
+              <a:rPr dirty="0" err="1"/>
+              <a:t>ảnh</a:t>
+            </a:r>
+            <a:r>
+              <a:rPr dirty="0"/>
+              <a:t> </a:t>
+            </a:r>
+            <a:r>
+              <a:rPr dirty="0" err="1"/>
+              <a:t>chụp</a:t>
+            </a:r>
+            <a:r>
+              <a:rPr dirty="0"/>
+              <a:t>.</a:t>
             </a:r>
           </a:p>
           <a:p>
@@ -7659,7 +8077,200 @@
               </a:defRPr>
             </a:pPr>
             <a:r>
-              <a:t>•  Nhận diện thực phẩm qua Camera: Hướng camera vào rau củ quả trong tủ lạnh để AI tự động nhận diện và cập nhật danh mục tồn kho.</a:t>
+              <a:rPr dirty="0"/>
+              <a:t>•  </a:t>
+            </a:r>
+            <a:r>
+              <a:rPr dirty="0" err="1"/>
+              <a:t>Nhận</a:t>
+            </a:r>
+            <a:r>
+              <a:rPr dirty="0"/>
+              <a:t> </a:t>
+            </a:r>
+            <a:r>
+              <a:rPr dirty="0" err="1"/>
+              <a:t>diện</a:t>
+            </a:r>
+            <a:r>
+              <a:rPr dirty="0"/>
+              <a:t> </a:t>
+            </a:r>
+            <a:r>
+              <a:rPr dirty="0" err="1"/>
+              <a:t>thực</a:t>
+            </a:r>
+            <a:r>
+              <a:rPr dirty="0"/>
+              <a:t> </a:t>
+            </a:r>
+            <a:r>
+              <a:rPr dirty="0" err="1"/>
+              <a:t>phẩm</a:t>
+            </a:r>
+            <a:r>
+              <a:rPr dirty="0"/>
+              <a:t> qua Camera: </a:t>
+            </a:r>
+            <a:r>
+              <a:rPr dirty="0" err="1"/>
+              <a:t>Hướng</a:t>
+            </a:r>
+            <a:r>
+              <a:rPr dirty="0"/>
+              <a:t> camera </a:t>
+            </a:r>
+            <a:r>
+              <a:rPr dirty="0" err="1"/>
+              <a:t>vào</a:t>
+            </a:r>
+            <a:r>
+              <a:rPr dirty="0"/>
+              <a:t> </a:t>
+            </a:r>
+            <a:r>
+              <a:rPr dirty="0" err="1"/>
+              <a:t>rau</a:t>
+            </a:r>
+            <a:r>
+              <a:rPr dirty="0"/>
+              <a:t> </a:t>
+            </a:r>
+            <a:r>
+              <a:rPr dirty="0" err="1"/>
+              <a:t>củ</a:t>
+            </a:r>
+            <a:r>
+              <a:rPr dirty="0"/>
+              <a:t> </a:t>
+            </a:r>
+            <a:r>
+              <a:rPr dirty="0" err="1"/>
+              <a:t>quả</a:t>
+            </a:r>
+            <a:r>
+              <a:rPr dirty="0"/>
+              <a:t> </a:t>
+            </a:r>
+            <a:r>
+              <a:rPr dirty="0" err="1"/>
+              <a:t>trong</a:t>
+            </a:r>
+            <a:r>
+              <a:rPr dirty="0"/>
+              <a:t> </a:t>
+            </a:r>
+            <a:r>
+              <a:rPr dirty="0" err="1"/>
+              <a:t>tủ</a:t>
+            </a:r>
+            <a:r>
+              <a:rPr dirty="0"/>
+              <a:t> </a:t>
+            </a:r>
+            <a:r>
+              <a:rPr dirty="0" err="1"/>
+              <a:t>lạnh</a:t>
+            </a:r>
+            <a:r>
+              <a:rPr dirty="0"/>
+              <a:t> </a:t>
+            </a:r>
+            <a:r>
+              <a:rPr dirty="0" err="1"/>
+              <a:t>để</a:t>
+            </a:r>
+            <a:r>
+              <a:rPr dirty="0"/>
+              <a:t> AI </a:t>
+            </a:r>
+            <a:r>
+              <a:rPr dirty="0" err="1"/>
+              <a:t>tự</a:t>
+            </a:r>
+            <a:r>
+              <a:rPr dirty="0"/>
+              <a:t> </a:t>
+            </a:r>
+            <a:r>
+              <a:rPr dirty="0" err="1"/>
+              <a:t>động</a:t>
+            </a:r>
+            <a:r>
+              <a:rPr dirty="0"/>
+              <a:t> </a:t>
+            </a:r>
+            <a:r>
+              <a:rPr dirty="0" err="1"/>
+              <a:t>nhận</a:t>
+            </a:r>
+            <a:r>
+              <a:rPr dirty="0"/>
+              <a:t> </a:t>
+            </a:r>
+            <a:r>
+              <a:rPr dirty="0" err="1"/>
+              <a:t>diện</a:t>
+            </a:r>
+            <a:r>
+              <a:rPr dirty="0"/>
+              <a:t> </a:t>
+            </a:r>
+            <a:r>
+              <a:rPr dirty="0" err="1"/>
+              <a:t>và</a:t>
+            </a:r>
+            <a:r>
+              <a:rPr dirty="0"/>
+              <a:t> </a:t>
+            </a:r>
+            <a:r>
+              <a:rPr dirty="0" err="1"/>
+              <a:t>cập</a:t>
+            </a:r>
+            <a:r>
+              <a:rPr dirty="0"/>
+              <a:t> </a:t>
+            </a:r>
+            <a:r>
+              <a:rPr dirty="0" err="1"/>
+              <a:t>nhật</a:t>
+            </a:r>
+            <a:r>
+              <a:rPr dirty="0"/>
+              <a:t> </a:t>
+            </a:r>
+            <a:r>
+              <a:rPr dirty="0" err="1"/>
+              <a:t>danh</a:t>
+            </a:r>
+            <a:r>
+              <a:rPr dirty="0"/>
+              <a:t> </a:t>
+            </a:r>
+            <a:r>
+              <a:rPr dirty="0" err="1"/>
+              <a:t>mục</a:t>
+            </a:r>
+            <a:r>
+              <a:rPr dirty="0"/>
+              <a:t> </a:t>
+            </a:r>
+            <a:r>
+              <a:rPr dirty="0" err="1"/>
+              <a:t>tồn</a:t>
+            </a:r>
+            <a:r>
+              <a:rPr dirty="0"/>
+              <a:t> </a:t>
+            </a:r>
+            <a:r>
+              <a:rPr dirty="0" err="1"/>
+              <a:t>kho</a:t>
+            </a:r>
+            <a:r>
+              <a:rPr dirty="0"/>
+              <a:t>.</a:t>
             </a:r>
           </a:p>
           <a:p>
@@ -7674,7 +8285,208 @@
               </a:defRPr>
             </a:pPr>
             <a:r>
-              <a:t>•  Chụp ảnh món ăn hoàn thiện: AI đánh giá màu sắc, độ chín và tự động chấm điểm trang trí món ăn cho người nội trợ.</a:t>
+              <a:rPr dirty="0"/>
+              <a:t>•  </a:t>
+            </a:r>
+            <a:r>
+              <a:rPr dirty="0" err="1"/>
+              <a:t>Chụp</a:t>
+            </a:r>
+            <a:r>
+              <a:rPr dirty="0"/>
+              <a:t> </a:t>
+            </a:r>
+            <a:r>
+              <a:rPr dirty="0" err="1"/>
+              <a:t>ảnh</a:t>
+            </a:r>
+            <a:r>
+              <a:rPr dirty="0"/>
+              <a:t> </a:t>
+            </a:r>
+            <a:r>
+              <a:rPr dirty="0" err="1"/>
+              <a:t>món</a:t>
+            </a:r>
+            <a:r>
+              <a:rPr dirty="0"/>
+              <a:t> </a:t>
+            </a:r>
+            <a:r>
+              <a:rPr dirty="0" err="1"/>
+              <a:t>ăn</a:t>
+            </a:r>
+            <a:r>
+              <a:rPr dirty="0"/>
+              <a:t> </a:t>
+            </a:r>
+            <a:r>
+              <a:rPr dirty="0" err="1"/>
+              <a:t>hoàn</a:t>
+            </a:r>
+            <a:r>
+              <a:rPr dirty="0"/>
+              <a:t> </a:t>
+            </a:r>
+            <a:r>
+              <a:rPr dirty="0" err="1"/>
+              <a:t>thiện</a:t>
+            </a:r>
+            <a:r>
+              <a:rPr dirty="0"/>
+              <a:t>: AI </a:t>
+            </a:r>
+            <a:r>
+              <a:rPr dirty="0" err="1"/>
+              <a:t>đánh</a:t>
+            </a:r>
+            <a:r>
+              <a:rPr dirty="0"/>
+              <a:t> </a:t>
+            </a:r>
+            <a:r>
+              <a:rPr dirty="0" err="1"/>
+              <a:t>giá</a:t>
+            </a:r>
+            <a:r>
+              <a:rPr dirty="0"/>
+              <a:t> </a:t>
+            </a:r>
+            <a:r>
+              <a:rPr dirty="0" err="1"/>
+              <a:t>màu</a:t>
+            </a:r>
+            <a:r>
+              <a:rPr dirty="0"/>
+              <a:t> </a:t>
+            </a:r>
+            <a:r>
+              <a:rPr dirty="0" err="1"/>
+              <a:t>sắc</a:t>
+            </a:r>
+            <a:r>
+              <a:rPr dirty="0"/>
+              <a:t>, </a:t>
+            </a:r>
+            <a:r>
+              <a:rPr dirty="0" err="1"/>
+              <a:t>độ</a:t>
+            </a:r>
+            <a:r>
+              <a:rPr dirty="0"/>
+              <a:t> </a:t>
+            </a:r>
+            <a:r>
+              <a:rPr dirty="0" err="1"/>
+              <a:t>chín</a:t>
+            </a:r>
+            <a:r>
+              <a:rPr dirty="0"/>
+              <a:t> </a:t>
+            </a:r>
+            <a:r>
+              <a:rPr dirty="0" err="1"/>
+              <a:t>và</a:t>
+            </a:r>
+            <a:r>
+              <a:rPr dirty="0"/>
+              <a:t> </a:t>
+            </a:r>
+            <a:r>
+              <a:rPr dirty="0" err="1"/>
+              <a:t>tự</a:t>
+            </a:r>
+            <a:r>
+              <a:rPr dirty="0"/>
+              <a:t> </a:t>
+            </a:r>
+            <a:r>
+              <a:rPr dirty="0" err="1"/>
+              <a:t>động</a:t>
+            </a:r>
+            <a:r>
+              <a:rPr dirty="0"/>
+              <a:t> </a:t>
+            </a:r>
+            <a:r>
+              <a:rPr dirty="0" err="1"/>
+              <a:t>chấm</a:t>
+            </a:r>
+            <a:r>
+              <a:rPr dirty="0"/>
+              <a:t> </a:t>
+            </a:r>
+            <a:r>
+              <a:rPr dirty="0" err="1"/>
+              <a:t>điểm</a:t>
+            </a:r>
+            <a:r>
+              <a:rPr dirty="0"/>
+              <a:t> </a:t>
+            </a:r>
+            <a:r>
+              <a:rPr dirty="0" err="1"/>
+              <a:t>trang</a:t>
+            </a:r>
+            <a:r>
+              <a:rPr dirty="0"/>
+              <a:t> </a:t>
+            </a:r>
+            <a:r>
+              <a:rPr dirty="0" err="1"/>
+              <a:t>trí</a:t>
+            </a:r>
+            <a:r>
+              <a:rPr dirty="0"/>
+              <a:t> </a:t>
+            </a:r>
+            <a:r>
+              <a:rPr dirty="0" err="1"/>
+              <a:t>món</a:t>
+            </a:r>
+            <a:r>
+              <a:rPr dirty="0"/>
+              <a:t> </a:t>
+            </a:r>
+            <a:r>
+              <a:rPr dirty="0" err="1"/>
+              <a:t>ăn</a:t>
+            </a:r>
+            <a:r>
+              <a:rPr dirty="0"/>
+              <a:t> </a:t>
+            </a:r>
+            <a:r>
+              <a:rPr dirty="0" err="1"/>
+              <a:t>cho</a:t>
+            </a:r>
+            <a:r>
+              <a:rPr dirty="0"/>
+              <a:t> </a:t>
+            </a:r>
+            <a:r>
+              <a:rPr dirty="0" err="1"/>
+              <a:t>người</a:t>
+            </a:r>
+            <a:r>
+              <a:rPr dirty="0"/>
+              <a:t> </a:t>
+            </a:r>
+            <a:r>
+              <a:rPr dirty="0" err="1"/>
+              <a:t>nội</a:t>
+            </a:r>
+            <a:r>
+              <a:rPr dirty="0"/>
+              <a:t> </a:t>
+            </a:r>
+            <a:r>
+              <a:rPr dirty="0" err="1"/>
+              <a:t>trợ</a:t>
+            </a:r>
+            <a:r>
+              <a:rPr dirty="0"/>
+              <a:t>.</a:t>
             </a:r>
           </a:p>
         </p:txBody>
@@ -7721,6 +8533,7 @@
           <a:lstStyle/>
           <a:p>
             <a:pPr algn="ctr"/>
+            <a:endParaRPr/>
           </a:p>
         </p:txBody>
       </p:sp>
@@ -7733,7 +8546,7 @@
         <p:spPr>
           <a:xfrm>
             <a:off x="4654296" y="1645920"/>
-            <a:ext cx="2880360" cy="4389120"/>
+            <a:ext cx="2880360" cy="2259593"/>
           </a:xfrm>
           <a:prstGeom prst="rect">
             <a:avLst/>
@@ -7757,6 +8570,7 @@
               </a:defRPr>
             </a:pPr>
             <a:r>
+              <a:rPr dirty="0"/>
               <a:t>TRUNG HẠN: TƯƠNG TÁC TỰ NHIÊN</a:t>
             </a:r>
           </a:p>
@@ -7765,15 +8579,45 @@
               <a:spcAft>
                 <a:spcPts val="600"/>
               </a:spcAft>
-              <a:defRPr b="1" sz="1350">
+              <a:defRPr sz="1350" b="1">
                 <a:solidFill>
                   <a:srgbClr val="0E6655"/>
                 </a:solidFill>
               </a:defRPr>
             </a:pPr>
             <a:r>
-              <a:t>🎙️ Trợ lý Rảnh tay (3-6 tháng)</a:t>
-            </a:r>
+              <a:rPr dirty="0"/>
+              <a:t>🎙️ </a:t>
+            </a:r>
+            <a:r>
+              <a:rPr dirty="0" err="1"/>
+              <a:t>Trợ</a:t>
+            </a:r>
+            <a:r>
+              <a:rPr dirty="0"/>
+              <a:t> </a:t>
+            </a:r>
+            <a:r>
+              <a:rPr dirty="0" err="1"/>
+              <a:t>lý</a:t>
+            </a:r>
+            <a:r>
+              <a:rPr dirty="0"/>
+              <a:t> </a:t>
+            </a:r>
+            <a:r>
+              <a:rPr dirty="0" err="1"/>
+              <a:t>Rảnh</a:t>
+            </a:r>
+            <a:r>
+              <a:rPr dirty="0"/>
+              <a:t> </a:t>
+            </a:r>
+            <a:r>
+              <a:rPr lang="en-US" dirty="0" err="1"/>
+              <a:t>tay</a:t>
+            </a:r>
+            <a:endParaRPr dirty="0"/>
           </a:p>
           <a:p>
             <a:pPr>
@@ -7787,7 +8631,216 @@
               </a:defRPr>
             </a:pPr>
             <a:r>
-              <a:t>•  Điều khiển bằng giọng nói (Voice Command): Đọc bước tiếp theo, tạm dừng hoặc hẹn giờ nấu nướng mà không cần chạm tay ướt/bẩn vào màn hình.</a:t>
+              <a:rPr dirty="0"/>
+              <a:t>•  </a:t>
+            </a:r>
+            <a:r>
+              <a:rPr dirty="0" err="1"/>
+              <a:t>Điều</a:t>
+            </a:r>
+            <a:r>
+              <a:rPr dirty="0"/>
+              <a:t> </a:t>
+            </a:r>
+            <a:r>
+              <a:rPr dirty="0" err="1"/>
+              <a:t>khiển</a:t>
+            </a:r>
+            <a:r>
+              <a:rPr dirty="0"/>
+              <a:t> </a:t>
+            </a:r>
+            <a:r>
+              <a:rPr dirty="0" err="1"/>
+              <a:t>bằng</a:t>
+            </a:r>
+            <a:r>
+              <a:rPr dirty="0"/>
+              <a:t> </a:t>
+            </a:r>
+            <a:r>
+              <a:rPr dirty="0" err="1"/>
+              <a:t>giọng</a:t>
+            </a:r>
+            <a:r>
+              <a:rPr dirty="0"/>
+              <a:t> </a:t>
+            </a:r>
+            <a:r>
+              <a:rPr dirty="0" err="1"/>
+              <a:t>nói</a:t>
+            </a:r>
+            <a:r>
+              <a:rPr dirty="0"/>
+              <a:t> (Voice Command): </a:t>
+            </a:r>
+            <a:r>
+              <a:rPr dirty="0" err="1"/>
+              <a:t>Đọc</a:t>
+            </a:r>
+            <a:r>
+              <a:rPr dirty="0"/>
+              <a:t> </a:t>
+            </a:r>
+            <a:r>
+              <a:rPr dirty="0" err="1"/>
+              <a:t>bước</a:t>
+            </a:r>
+            <a:r>
+              <a:rPr dirty="0"/>
+              <a:t> </a:t>
+            </a:r>
+            <a:r>
+              <a:rPr dirty="0" err="1"/>
+              <a:t>tiếp</a:t>
+            </a:r>
+            <a:r>
+              <a:rPr dirty="0"/>
+              <a:t> </a:t>
+            </a:r>
+            <a:r>
+              <a:rPr dirty="0" err="1"/>
+              <a:t>theo</a:t>
+            </a:r>
+            <a:r>
+              <a:rPr dirty="0"/>
+              <a:t>, </a:t>
+            </a:r>
+            <a:r>
+              <a:rPr dirty="0" err="1"/>
+              <a:t>tạm</a:t>
+            </a:r>
+            <a:r>
+              <a:rPr dirty="0"/>
+              <a:t> </a:t>
+            </a:r>
+            <a:r>
+              <a:rPr dirty="0" err="1"/>
+              <a:t>dừng</a:t>
+            </a:r>
+            <a:r>
+              <a:rPr dirty="0"/>
+              <a:t> </a:t>
+            </a:r>
+            <a:r>
+              <a:rPr dirty="0" err="1"/>
+              <a:t>hoặc</a:t>
+            </a:r>
+            <a:r>
+              <a:rPr dirty="0"/>
+              <a:t> </a:t>
+            </a:r>
+            <a:r>
+              <a:rPr dirty="0" err="1"/>
+              <a:t>hẹn</a:t>
+            </a:r>
+            <a:r>
+              <a:rPr dirty="0"/>
+              <a:t> </a:t>
+            </a:r>
+            <a:r>
+              <a:rPr dirty="0" err="1"/>
+              <a:t>giờ</a:t>
+            </a:r>
+            <a:r>
+              <a:rPr dirty="0"/>
+              <a:t> </a:t>
+            </a:r>
+            <a:r>
+              <a:rPr dirty="0" err="1"/>
+              <a:t>nấu</a:t>
+            </a:r>
+            <a:r>
+              <a:rPr dirty="0"/>
+              <a:t> </a:t>
+            </a:r>
+            <a:r>
+              <a:rPr dirty="0" err="1"/>
+              <a:t>nướng</a:t>
+            </a:r>
+            <a:r>
+              <a:rPr dirty="0"/>
+              <a:t> </a:t>
+            </a:r>
+            <a:r>
+              <a:rPr dirty="0" err="1"/>
+              <a:t>mà</a:t>
+            </a:r>
+            <a:r>
+              <a:rPr dirty="0"/>
+              <a:t> </a:t>
+            </a:r>
+            <a:r>
+              <a:rPr dirty="0" err="1"/>
+              <a:t>không</a:t>
+            </a:r>
+            <a:r>
+              <a:rPr dirty="0"/>
+              <a:t> </a:t>
+            </a:r>
+            <a:r>
+              <a:rPr dirty="0" err="1"/>
+              <a:t>cần</a:t>
+            </a:r>
+            <a:r>
+              <a:rPr dirty="0"/>
+              <a:t> </a:t>
+            </a:r>
+            <a:r>
+              <a:rPr dirty="0" err="1"/>
+              <a:t>chạm</a:t>
+            </a:r>
+            <a:r>
+              <a:rPr dirty="0"/>
+              <a:t> </a:t>
+            </a:r>
+            <a:r>
+              <a:rPr dirty="0" err="1"/>
+              <a:t>tay</a:t>
+            </a:r>
+            <a:r>
+              <a:rPr dirty="0"/>
+              <a:t> </a:t>
+            </a:r>
+            <a:r>
+              <a:rPr dirty="0" err="1"/>
+              <a:t>ướt</a:t>
+            </a:r>
+            <a:r>
+              <a:rPr dirty="0"/>
+              <a:t>/</a:t>
+            </a:r>
+            <a:r>
+              <a:rPr dirty="0" err="1"/>
+              <a:t>bẩn</a:t>
+            </a:r>
+            <a:r>
+              <a:rPr dirty="0"/>
+              <a:t> </a:t>
+            </a:r>
+            <a:r>
+              <a:rPr dirty="0" err="1"/>
+              <a:t>vào</a:t>
+            </a:r>
+            <a:r>
+              <a:rPr dirty="0"/>
+              <a:t> </a:t>
+            </a:r>
+            <a:r>
+              <a:rPr dirty="0" err="1"/>
+              <a:t>màn</a:t>
+            </a:r>
+            <a:r>
+              <a:rPr dirty="0"/>
+              <a:t> </a:t>
+            </a:r>
+            <a:r>
+              <a:rPr dirty="0" err="1"/>
+              <a:t>hình</a:t>
+            </a:r>
+            <a:r>
+              <a:rPr dirty="0"/>
+              <a:t>.</a:t>
             </a:r>
           </a:p>
           <a:p>
@@ -7802,7 +8855,160 @@
               </a:defRPr>
             </a:pPr>
             <a:r>
-              <a:t>•  Đọc to công thức (Text-to-Speech): Trợ lý ảo đọc to từng bước nấu nướng với giọng đọc tiếng Việt truyền cảm, thân thiện.</a:t>
+              <a:rPr dirty="0"/>
+              <a:t>•  </a:t>
+            </a:r>
+            <a:r>
+              <a:rPr dirty="0" err="1"/>
+              <a:t>Đọc</a:t>
+            </a:r>
+            <a:r>
+              <a:rPr dirty="0"/>
+              <a:t> to </a:t>
+            </a:r>
+            <a:r>
+              <a:rPr dirty="0" err="1"/>
+              <a:t>công</a:t>
+            </a:r>
+            <a:r>
+              <a:rPr dirty="0"/>
+              <a:t> </a:t>
+            </a:r>
+            <a:r>
+              <a:rPr dirty="0" err="1"/>
+              <a:t>thức</a:t>
+            </a:r>
+            <a:r>
+              <a:rPr dirty="0"/>
+              <a:t> (Text-to-Speech): </a:t>
+            </a:r>
+            <a:r>
+              <a:rPr dirty="0" err="1"/>
+              <a:t>Trợ</a:t>
+            </a:r>
+            <a:r>
+              <a:rPr dirty="0"/>
+              <a:t> </a:t>
+            </a:r>
+            <a:r>
+              <a:rPr dirty="0" err="1"/>
+              <a:t>lý</a:t>
+            </a:r>
+            <a:r>
+              <a:rPr dirty="0"/>
+              <a:t> </a:t>
+            </a:r>
+            <a:r>
+              <a:rPr dirty="0" err="1"/>
+              <a:t>ảo</a:t>
+            </a:r>
+            <a:r>
+              <a:rPr dirty="0"/>
+              <a:t> </a:t>
+            </a:r>
+            <a:r>
+              <a:rPr dirty="0" err="1"/>
+              <a:t>đọc</a:t>
+            </a:r>
+            <a:r>
+              <a:rPr dirty="0"/>
+              <a:t> to </a:t>
+            </a:r>
+            <a:r>
+              <a:rPr dirty="0" err="1"/>
+              <a:t>từng</a:t>
+            </a:r>
+            <a:r>
+              <a:rPr dirty="0"/>
+              <a:t> </a:t>
+            </a:r>
+            <a:r>
+              <a:rPr dirty="0" err="1"/>
+              <a:t>bước</a:t>
+            </a:r>
+            <a:r>
+              <a:rPr dirty="0"/>
+              <a:t> </a:t>
+            </a:r>
+            <a:r>
+              <a:rPr dirty="0" err="1"/>
+              <a:t>nấu</a:t>
+            </a:r>
+            <a:r>
+              <a:rPr dirty="0"/>
+              <a:t> </a:t>
+            </a:r>
+            <a:r>
+              <a:rPr dirty="0" err="1"/>
+              <a:t>nướng</a:t>
+            </a:r>
+            <a:r>
+              <a:rPr dirty="0"/>
+              <a:t> </a:t>
+            </a:r>
+            <a:r>
+              <a:rPr dirty="0" err="1"/>
+              <a:t>với</a:t>
+            </a:r>
+            <a:r>
+              <a:rPr dirty="0"/>
+              <a:t> </a:t>
+            </a:r>
+            <a:r>
+              <a:rPr dirty="0" err="1"/>
+              <a:t>giọng</a:t>
+            </a:r>
+            <a:r>
+              <a:rPr dirty="0"/>
+              <a:t> </a:t>
+            </a:r>
+            <a:r>
+              <a:rPr dirty="0" err="1"/>
+              <a:t>đọc</a:t>
+            </a:r>
+            <a:r>
+              <a:rPr dirty="0"/>
+              <a:t> </a:t>
+            </a:r>
+            <a:r>
+              <a:rPr dirty="0" err="1"/>
+              <a:t>tiếng</a:t>
+            </a:r>
+            <a:r>
+              <a:rPr dirty="0"/>
+              <a:t> Việt </a:t>
+            </a:r>
+            <a:r>
+              <a:rPr dirty="0" err="1"/>
+              <a:t>truyền</a:t>
+            </a:r>
+            <a:r>
+              <a:rPr dirty="0"/>
+              <a:t> </a:t>
+            </a:r>
+            <a:r>
+              <a:rPr dirty="0" err="1"/>
+              <a:t>cảm</a:t>
+            </a:r>
+            <a:r>
+              <a:rPr dirty="0"/>
+              <a:t>, </a:t>
+            </a:r>
+            <a:r>
+              <a:rPr dirty="0" err="1"/>
+              <a:t>thân</a:t>
+            </a:r>
+            <a:r>
+              <a:rPr dirty="0"/>
+              <a:t> </a:t>
+            </a:r>
+            <a:r>
+              <a:rPr dirty="0" err="1"/>
+              <a:t>thiện</a:t>
+            </a:r>
+            <a:r>
+              <a:rPr dirty="0"/>
+              <a:t>.</a:t>
             </a:r>
           </a:p>
           <a:p>
@@ -7817,7 +9023,200 @@
               </a:defRPr>
             </a:pPr>
             <a:r>
-              <a:t>•  Gợi ý thực đơn cá nhân hóa: Lập kế hoạch bữa ăn thông minh cả tuần theo chế độ ăn kiêng (Keto, Low-Carb, Ăn chay, Tiểu đường).</a:t>
+              <a:rPr dirty="0"/>
+              <a:t>•  </a:t>
+            </a:r>
+            <a:r>
+              <a:rPr dirty="0" err="1"/>
+              <a:t>Gợi</a:t>
+            </a:r>
+            <a:r>
+              <a:rPr dirty="0"/>
+              <a:t> ý </a:t>
+            </a:r>
+            <a:r>
+              <a:rPr dirty="0" err="1"/>
+              <a:t>thực</a:t>
+            </a:r>
+            <a:r>
+              <a:rPr dirty="0"/>
+              <a:t> </a:t>
+            </a:r>
+            <a:r>
+              <a:rPr dirty="0" err="1"/>
+              <a:t>đơn</a:t>
+            </a:r>
+            <a:r>
+              <a:rPr dirty="0"/>
+              <a:t> </a:t>
+            </a:r>
+            <a:r>
+              <a:rPr dirty="0" err="1"/>
+              <a:t>cá</a:t>
+            </a:r>
+            <a:r>
+              <a:rPr dirty="0"/>
+              <a:t> </a:t>
+            </a:r>
+            <a:r>
+              <a:rPr dirty="0" err="1"/>
+              <a:t>nhân</a:t>
+            </a:r>
+            <a:r>
+              <a:rPr dirty="0"/>
+              <a:t> </a:t>
+            </a:r>
+            <a:r>
+              <a:rPr dirty="0" err="1"/>
+              <a:t>hóa</a:t>
+            </a:r>
+            <a:r>
+              <a:rPr dirty="0"/>
+              <a:t>: </a:t>
+            </a:r>
+            <a:r>
+              <a:rPr dirty="0" err="1"/>
+              <a:t>Lập</a:t>
+            </a:r>
+            <a:r>
+              <a:rPr dirty="0"/>
+              <a:t> </a:t>
+            </a:r>
+            <a:r>
+              <a:rPr dirty="0" err="1"/>
+              <a:t>kế</a:t>
+            </a:r>
+            <a:r>
+              <a:rPr dirty="0"/>
+              <a:t> </a:t>
+            </a:r>
+            <a:r>
+              <a:rPr dirty="0" err="1"/>
+              <a:t>hoạch</a:t>
+            </a:r>
+            <a:r>
+              <a:rPr dirty="0"/>
+              <a:t> </a:t>
+            </a:r>
+            <a:r>
+              <a:rPr dirty="0" err="1"/>
+              <a:t>bữa</a:t>
+            </a:r>
+            <a:r>
+              <a:rPr dirty="0"/>
+              <a:t> </a:t>
+            </a:r>
+            <a:r>
+              <a:rPr dirty="0" err="1"/>
+              <a:t>ăn</a:t>
+            </a:r>
+            <a:r>
+              <a:rPr dirty="0"/>
+              <a:t> </a:t>
+            </a:r>
+            <a:r>
+              <a:rPr dirty="0" err="1"/>
+              <a:t>thông</a:t>
+            </a:r>
+            <a:r>
+              <a:rPr dirty="0"/>
+              <a:t> </a:t>
+            </a:r>
+            <a:r>
+              <a:rPr dirty="0" err="1"/>
+              <a:t>minh</a:t>
+            </a:r>
+            <a:r>
+              <a:rPr dirty="0"/>
+              <a:t> </a:t>
+            </a:r>
+            <a:r>
+              <a:rPr dirty="0" err="1"/>
+              <a:t>cả</a:t>
+            </a:r>
+            <a:r>
+              <a:rPr dirty="0"/>
+              <a:t> </a:t>
+            </a:r>
+            <a:r>
+              <a:rPr dirty="0" err="1"/>
+              <a:t>tuần</a:t>
+            </a:r>
+            <a:r>
+              <a:rPr dirty="0"/>
+              <a:t> </a:t>
+            </a:r>
+            <a:r>
+              <a:rPr dirty="0" err="1"/>
+              <a:t>theo</a:t>
+            </a:r>
+            <a:r>
+              <a:rPr dirty="0"/>
+              <a:t> </a:t>
+            </a:r>
+            <a:r>
+              <a:rPr dirty="0" err="1"/>
+              <a:t>chế</a:t>
+            </a:r>
+            <a:r>
+              <a:rPr dirty="0"/>
+              <a:t> </a:t>
+            </a:r>
+            <a:r>
+              <a:rPr dirty="0" err="1"/>
+              <a:t>độ</a:t>
+            </a:r>
+            <a:r>
+              <a:rPr dirty="0"/>
+              <a:t> </a:t>
+            </a:r>
+            <a:r>
+              <a:rPr dirty="0" err="1"/>
+              <a:t>ăn</a:t>
+            </a:r>
+            <a:r>
+              <a:rPr dirty="0"/>
+              <a:t> </a:t>
+            </a:r>
+            <a:r>
+              <a:rPr dirty="0" err="1"/>
+              <a:t>kiêng</a:t>
+            </a:r>
+            <a:r>
+              <a:rPr dirty="0"/>
+              <a:t> (Keto, Low-Carb, </a:t>
+            </a:r>
+            <a:r>
+              <a:rPr dirty="0" err="1"/>
+              <a:t>Ăn</a:t>
+            </a:r>
+            <a:r>
+              <a:rPr dirty="0"/>
+              <a:t> </a:t>
+            </a:r>
+            <a:r>
+              <a:rPr dirty="0" err="1"/>
+              <a:t>chay</a:t>
+            </a:r>
+            <a:r>
+              <a:rPr dirty="0"/>
+              <a:t>, </a:t>
+            </a:r>
+            <a:r>
+              <a:rPr dirty="0" err="1"/>
+              <a:t>Tiểu</a:t>
+            </a:r>
+            <a:r>
+              <a:rPr dirty="0"/>
+              <a:t> </a:t>
+            </a:r>
+            <a:r>
+              <a:rPr dirty="0" err="1"/>
+              <a:t>đường</a:t>
+            </a:r>
+            <a:r>
+              <a:rPr dirty="0"/>
+              <a:t>).</a:t>
             </a:r>
           </a:p>
         </p:txBody>
@@ -7864,6 +9263,7 @@
           <a:lstStyle/>
           <a:p>
             <a:pPr algn="ctr"/>
+            <a:endParaRPr/>
           </a:p>
         </p:txBody>
       </p:sp>
@@ -7876,7 +9276,7 @@
         <p:spPr>
           <a:xfrm>
             <a:off x="8348472" y="1645920"/>
-            <a:ext cx="2880360" cy="4389120"/>
+            <a:ext cx="2880360" cy="2090316"/>
           </a:xfrm>
           <a:prstGeom prst="rect">
             <a:avLst/>
@@ -7900,6 +9300,7 @@
               </a:defRPr>
             </a:pPr>
             <a:r>
+              <a:rPr dirty="0"/>
               <a:t>DÀI HẠN: NỀN TẢNG TOÀN DIỆN</a:t>
             </a:r>
           </a:p>
@@ -7908,14 +9309,39 @@
               <a:spcAft>
                 <a:spcPts val="600"/>
               </a:spcAft>
-              <a:defRPr b="1" sz="1350">
+              <a:defRPr sz="1350" b="1">
                 <a:solidFill>
                   <a:srgbClr val="E65100"/>
                 </a:solidFill>
               </a:defRPr>
             </a:pPr>
             <a:r>
-              <a:t>☁️ Đồng bộ &amp; Dinh dưỡng (6-12 tháng)</a:t>
+              <a:rPr dirty="0"/>
+              <a:t>☁️ </a:t>
+            </a:r>
+            <a:r>
+              <a:rPr dirty="0" err="1"/>
+              <a:t>Đồng</a:t>
+            </a:r>
+            <a:r>
+              <a:rPr dirty="0"/>
+              <a:t> </a:t>
+            </a:r>
+            <a:r>
+              <a:rPr dirty="0" err="1"/>
+              <a:t>bộ</a:t>
+            </a:r>
+            <a:r>
+              <a:rPr dirty="0"/>
+              <a:t> &amp; Dinh </a:t>
+            </a:r>
+            <a:r>
+              <a:rPr dirty="0" err="1"/>
+              <a:t>dưỡng</a:t>
+            </a:r>
+            <a:r>
+              <a:rPr dirty="0"/>
+              <a:t> </a:t>
             </a:r>
           </a:p>
           <a:p>
@@ -7930,7 +9356,200 @@
               </a:defRPr>
             </a:pPr>
             <a:r>
-              <a:t>•  Đồng bộ đám mây thời gian thực (Real-time Cloud Sync): Chia sẻ thực đơn và tủ lạnh chung cho mọi thành viên trong gia đình cùng theo dõi.</a:t>
+              <a:rPr dirty="0"/>
+              <a:t>•  </a:t>
+            </a:r>
+            <a:r>
+              <a:rPr dirty="0" err="1"/>
+              <a:t>Đồng</a:t>
+            </a:r>
+            <a:r>
+              <a:rPr dirty="0"/>
+              <a:t> </a:t>
+            </a:r>
+            <a:r>
+              <a:rPr dirty="0" err="1"/>
+              <a:t>bộ</a:t>
+            </a:r>
+            <a:r>
+              <a:rPr dirty="0"/>
+              <a:t> </a:t>
+            </a:r>
+            <a:r>
+              <a:rPr dirty="0" err="1"/>
+              <a:t>đám</a:t>
+            </a:r>
+            <a:r>
+              <a:rPr dirty="0"/>
+              <a:t> </a:t>
+            </a:r>
+            <a:r>
+              <a:rPr dirty="0" err="1"/>
+              <a:t>mây</a:t>
+            </a:r>
+            <a:r>
+              <a:rPr dirty="0"/>
+              <a:t> </a:t>
+            </a:r>
+            <a:r>
+              <a:rPr dirty="0" err="1"/>
+              <a:t>thời</a:t>
+            </a:r>
+            <a:r>
+              <a:rPr dirty="0"/>
+              <a:t> </a:t>
+            </a:r>
+            <a:r>
+              <a:rPr dirty="0" err="1"/>
+              <a:t>gian</a:t>
+            </a:r>
+            <a:r>
+              <a:rPr dirty="0"/>
+              <a:t> </a:t>
+            </a:r>
+            <a:r>
+              <a:rPr dirty="0" err="1"/>
+              <a:t>thực</a:t>
+            </a:r>
+            <a:r>
+              <a:rPr dirty="0"/>
+              <a:t> (Real-time Cloud Sync): Chia </a:t>
+            </a:r>
+            <a:r>
+              <a:rPr dirty="0" err="1"/>
+              <a:t>sẻ</a:t>
+            </a:r>
+            <a:r>
+              <a:rPr dirty="0"/>
+              <a:t> </a:t>
+            </a:r>
+            <a:r>
+              <a:rPr dirty="0" err="1"/>
+              <a:t>thực</a:t>
+            </a:r>
+            <a:r>
+              <a:rPr dirty="0"/>
+              <a:t> </a:t>
+            </a:r>
+            <a:r>
+              <a:rPr dirty="0" err="1"/>
+              <a:t>đơn</a:t>
+            </a:r>
+            <a:r>
+              <a:rPr dirty="0"/>
+              <a:t> </a:t>
+            </a:r>
+            <a:r>
+              <a:rPr dirty="0" err="1"/>
+              <a:t>và</a:t>
+            </a:r>
+            <a:r>
+              <a:rPr dirty="0"/>
+              <a:t> </a:t>
+            </a:r>
+            <a:r>
+              <a:rPr dirty="0" err="1"/>
+              <a:t>tủ</a:t>
+            </a:r>
+            <a:r>
+              <a:rPr dirty="0"/>
+              <a:t> </a:t>
+            </a:r>
+            <a:r>
+              <a:rPr dirty="0" err="1"/>
+              <a:t>lạnh</a:t>
+            </a:r>
+            <a:r>
+              <a:rPr dirty="0"/>
+              <a:t> </a:t>
+            </a:r>
+            <a:r>
+              <a:rPr dirty="0" err="1"/>
+              <a:t>chung</a:t>
+            </a:r>
+            <a:r>
+              <a:rPr dirty="0"/>
+              <a:t> </a:t>
+            </a:r>
+            <a:r>
+              <a:rPr dirty="0" err="1"/>
+              <a:t>cho</a:t>
+            </a:r>
+            <a:r>
+              <a:rPr dirty="0"/>
+              <a:t> </a:t>
+            </a:r>
+            <a:r>
+              <a:rPr dirty="0" err="1"/>
+              <a:t>mọi</a:t>
+            </a:r>
+            <a:r>
+              <a:rPr dirty="0"/>
+              <a:t> </a:t>
+            </a:r>
+            <a:r>
+              <a:rPr dirty="0" err="1"/>
+              <a:t>thành</a:t>
+            </a:r>
+            <a:r>
+              <a:rPr dirty="0"/>
+              <a:t> </a:t>
+            </a:r>
+            <a:r>
+              <a:rPr dirty="0" err="1"/>
+              <a:t>viên</a:t>
+            </a:r>
+            <a:r>
+              <a:rPr dirty="0"/>
+              <a:t> </a:t>
+            </a:r>
+            <a:r>
+              <a:rPr dirty="0" err="1"/>
+              <a:t>trong</a:t>
+            </a:r>
+            <a:r>
+              <a:rPr dirty="0"/>
+              <a:t> </a:t>
+            </a:r>
+            <a:r>
+              <a:rPr dirty="0" err="1"/>
+              <a:t>gia</a:t>
+            </a:r>
+            <a:r>
+              <a:rPr dirty="0"/>
+              <a:t> </a:t>
+            </a:r>
+            <a:r>
+              <a:rPr dirty="0" err="1"/>
+              <a:t>đình</a:t>
+            </a:r>
+            <a:r>
+              <a:rPr dirty="0"/>
+              <a:t> </a:t>
+            </a:r>
+            <a:r>
+              <a:rPr dirty="0" err="1"/>
+              <a:t>cùng</a:t>
+            </a:r>
+            <a:r>
+              <a:rPr dirty="0"/>
+              <a:t> </a:t>
+            </a:r>
+            <a:r>
+              <a:rPr dirty="0" err="1"/>
+              <a:t>theo</a:t>
+            </a:r>
+            <a:r>
+              <a:rPr dirty="0"/>
+              <a:t> </a:t>
+            </a:r>
+            <a:r>
+              <a:rPr dirty="0" err="1"/>
+              <a:t>dõi</a:t>
+            </a:r>
+            <a:r>
+              <a:rPr dirty="0"/>
+              <a:t>.</a:t>
             </a:r>
           </a:p>
           <a:p>
@@ -7945,7 +9564,176 @@
               </a:defRPr>
             </a:pPr>
             <a:r>
-              <a:t>•  Phân tích dinh dưỡng chuyên sâu: Tự động tính toán tổng lượng Calo, Protein, Carb, Fat dựa trên khối lượng nguyên liệu trong món ăn.</a:t>
+              <a:rPr dirty="0"/>
+              <a:t>•  </a:t>
+            </a:r>
+            <a:r>
+              <a:rPr dirty="0" err="1"/>
+              <a:t>Phân</a:t>
+            </a:r>
+            <a:r>
+              <a:rPr dirty="0"/>
+              <a:t> </a:t>
+            </a:r>
+            <a:r>
+              <a:rPr dirty="0" err="1"/>
+              <a:t>tích</a:t>
+            </a:r>
+            <a:r>
+              <a:rPr dirty="0"/>
+              <a:t> </a:t>
+            </a:r>
+            <a:r>
+              <a:rPr dirty="0" err="1"/>
+              <a:t>dinh</a:t>
+            </a:r>
+            <a:r>
+              <a:rPr dirty="0"/>
+              <a:t> </a:t>
+            </a:r>
+            <a:r>
+              <a:rPr dirty="0" err="1"/>
+              <a:t>dưỡng</a:t>
+            </a:r>
+            <a:r>
+              <a:rPr dirty="0"/>
+              <a:t> </a:t>
+            </a:r>
+            <a:r>
+              <a:rPr dirty="0" err="1"/>
+              <a:t>chuyên</a:t>
+            </a:r>
+            <a:r>
+              <a:rPr dirty="0"/>
+              <a:t> </a:t>
+            </a:r>
+            <a:r>
+              <a:rPr dirty="0" err="1"/>
+              <a:t>sâu</a:t>
+            </a:r>
+            <a:r>
+              <a:rPr dirty="0"/>
+              <a:t>: </a:t>
+            </a:r>
+            <a:r>
+              <a:rPr dirty="0" err="1"/>
+              <a:t>Tự</a:t>
+            </a:r>
+            <a:r>
+              <a:rPr dirty="0"/>
+              <a:t> </a:t>
+            </a:r>
+            <a:r>
+              <a:rPr dirty="0" err="1"/>
+              <a:t>động</a:t>
+            </a:r>
+            <a:r>
+              <a:rPr dirty="0"/>
+              <a:t> </a:t>
+            </a:r>
+            <a:r>
+              <a:rPr dirty="0" err="1"/>
+              <a:t>tính</a:t>
+            </a:r>
+            <a:r>
+              <a:rPr dirty="0"/>
+              <a:t> </a:t>
+            </a:r>
+            <a:r>
+              <a:rPr dirty="0" err="1"/>
+              <a:t>toán</a:t>
+            </a:r>
+            <a:r>
+              <a:rPr dirty="0"/>
+              <a:t> </a:t>
+            </a:r>
+            <a:r>
+              <a:rPr dirty="0" err="1"/>
+              <a:t>tổng</a:t>
+            </a:r>
+            <a:r>
+              <a:rPr dirty="0"/>
+              <a:t> </a:t>
+            </a:r>
+            <a:r>
+              <a:rPr dirty="0" err="1"/>
+              <a:t>lượng</a:t>
+            </a:r>
+            <a:r>
+              <a:rPr dirty="0"/>
+              <a:t> Calo, Protein, Carb, Fat </a:t>
+            </a:r>
+            <a:r>
+              <a:rPr dirty="0" err="1"/>
+              <a:t>dựa</a:t>
+            </a:r>
+            <a:r>
+              <a:rPr dirty="0"/>
+              <a:t> </a:t>
+            </a:r>
+            <a:r>
+              <a:rPr dirty="0" err="1"/>
+              <a:t>trên</a:t>
+            </a:r>
+            <a:r>
+              <a:rPr dirty="0"/>
+              <a:t> </a:t>
+            </a:r>
+            <a:r>
+              <a:rPr dirty="0" err="1"/>
+              <a:t>khối</a:t>
+            </a:r>
+            <a:r>
+              <a:rPr dirty="0"/>
+              <a:t> </a:t>
+            </a:r>
+            <a:r>
+              <a:rPr dirty="0" err="1"/>
+              <a:t>lượng</a:t>
+            </a:r>
+            <a:r>
+              <a:rPr dirty="0"/>
+              <a:t> </a:t>
+            </a:r>
+            <a:r>
+              <a:rPr dirty="0" err="1"/>
+              <a:t>nguyên</a:t>
+            </a:r>
+            <a:r>
+              <a:rPr dirty="0"/>
+              <a:t> </a:t>
+            </a:r>
+            <a:r>
+              <a:rPr dirty="0" err="1"/>
+              <a:t>liệu</a:t>
+            </a:r>
+            <a:r>
+              <a:rPr dirty="0"/>
+              <a:t> </a:t>
+            </a:r>
+            <a:r>
+              <a:rPr dirty="0" err="1"/>
+              <a:t>trong</a:t>
+            </a:r>
+            <a:r>
+              <a:rPr dirty="0"/>
+              <a:t> </a:t>
+            </a:r>
+            <a:r>
+              <a:rPr dirty="0" err="1"/>
+              <a:t>món</a:t>
+            </a:r>
+            <a:r>
+              <a:rPr dirty="0"/>
+              <a:t> </a:t>
+            </a:r>
+            <a:r>
+              <a:rPr dirty="0" err="1"/>
+              <a:t>ăn</a:t>
+            </a:r>
+            <a:r>
+              <a:rPr dirty="0"/>
+              <a:t>.</a:t>
             </a:r>
           </a:p>
           <a:p>
@@ -7960,7 +9748,208 @@
               </a:defRPr>
             </a:pPr>
             <a:r>
-              <a:t>•  Xây dựng mạng xã hội ẩm thực: Cho phép người dùng xuất bản, chia sẻ và đánh giá công thức nấu nướng của cộng đồng nội trợ.</a:t>
+              <a:rPr dirty="0"/>
+              <a:t>•  </a:t>
+            </a:r>
+            <a:r>
+              <a:rPr dirty="0" err="1"/>
+              <a:t>Xây</a:t>
+            </a:r>
+            <a:r>
+              <a:rPr dirty="0"/>
+              <a:t> </a:t>
+            </a:r>
+            <a:r>
+              <a:rPr dirty="0" err="1"/>
+              <a:t>dựng</a:t>
+            </a:r>
+            <a:r>
+              <a:rPr dirty="0"/>
+              <a:t> </a:t>
+            </a:r>
+            <a:r>
+              <a:rPr dirty="0" err="1"/>
+              <a:t>mạng</a:t>
+            </a:r>
+            <a:r>
+              <a:rPr dirty="0"/>
+              <a:t> </a:t>
+            </a:r>
+            <a:r>
+              <a:rPr dirty="0" err="1"/>
+              <a:t>xã</a:t>
+            </a:r>
+            <a:r>
+              <a:rPr dirty="0"/>
+              <a:t> </a:t>
+            </a:r>
+            <a:r>
+              <a:rPr dirty="0" err="1"/>
+              <a:t>hội</a:t>
+            </a:r>
+            <a:r>
+              <a:rPr dirty="0"/>
+              <a:t> </a:t>
+            </a:r>
+            <a:r>
+              <a:rPr dirty="0" err="1"/>
+              <a:t>ẩm</a:t>
+            </a:r>
+            <a:r>
+              <a:rPr dirty="0"/>
+              <a:t> </a:t>
+            </a:r>
+            <a:r>
+              <a:rPr dirty="0" err="1"/>
+              <a:t>thực</a:t>
+            </a:r>
+            <a:r>
+              <a:rPr dirty="0"/>
+              <a:t>: Cho </a:t>
+            </a:r>
+            <a:r>
+              <a:rPr dirty="0" err="1"/>
+              <a:t>phép</a:t>
+            </a:r>
+            <a:r>
+              <a:rPr dirty="0"/>
+              <a:t> </a:t>
+            </a:r>
+            <a:r>
+              <a:rPr dirty="0" err="1"/>
+              <a:t>người</a:t>
+            </a:r>
+            <a:r>
+              <a:rPr dirty="0"/>
+              <a:t> </a:t>
+            </a:r>
+            <a:r>
+              <a:rPr dirty="0" err="1"/>
+              <a:t>dùng</a:t>
+            </a:r>
+            <a:r>
+              <a:rPr dirty="0"/>
+              <a:t> </a:t>
+            </a:r>
+            <a:r>
+              <a:rPr dirty="0" err="1"/>
+              <a:t>xuất</a:t>
+            </a:r>
+            <a:r>
+              <a:rPr dirty="0"/>
+              <a:t> </a:t>
+            </a:r>
+            <a:r>
+              <a:rPr dirty="0" err="1"/>
+              <a:t>bản</a:t>
+            </a:r>
+            <a:r>
+              <a:rPr dirty="0"/>
+              <a:t>, chia </a:t>
+            </a:r>
+            <a:r>
+              <a:rPr dirty="0" err="1"/>
+              <a:t>sẻ</a:t>
+            </a:r>
+            <a:r>
+              <a:rPr dirty="0"/>
+              <a:t> </a:t>
+            </a:r>
+            <a:r>
+              <a:rPr dirty="0" err="1"/>
+              <a:t>và</a:t>
+            </a:r>
+            <a:r>
+              <a:rPr dirty="0"/>
+              <a:t> </a:t>
+            </a:r>
+            <a:r>
+              <a:rPr dirty="0" err="1"/>
+              <a:t>đánh</a:t>
+            </a:r>
+            <a:r>
+              <a:rPr dirty="0"/>
+              <a:t> </a:t>
+            </a:r>
+            <a:r>
+              <a:rPr dirty="0" err="1"/>
+              <a:t>giá</a:t>
+            </a:r>
+            <a:r>
+              <a:rPr dirty="0"/>
+              <a:t> </a:t>
+            </a:r>
+            <a:r>
+              <a:rPr dirty="0" err="1"/>
+              <a:t>công</a:t>
+            </a:r>
+            <a:r>
+              <a:rPr dirty="0"/>
+              <a:t> </a:t>
+            </a:r>
+            <a:r>
+              <a:rPr dirty="0" err="1"/>
+              <a:t>thức</a:t>
+            </a:r>
+            <a:r>
+              <a:rPr dirty="0"/>
+              <a:t> </a:t>
+            </a:r>
+            <a:r>
+              <a:rPr dirty="0" err="1"/>
+              <a:t>nấu</a:t>
+            </a:r>
+            <a:r>
+              <a:rPr dirty="0"/>
+              <a:t> </a:t>
+            </a:r>
+            <a:r>
+              <a:rPr dirty="0" err="1"/>
+              <a:t>nướng</a:t>
+            </a:r>
+            <a:r>
+              <a:rPr dirty="0"/>
+              <a:t> </a:t>
+            </a:r>
+            <a:r>
+              <a:rPr dirty="0" err="1"/>
+              <a:t>của</a:t>
+            </a:r>
+            <a:r>
+              <a:rPr dirty="0"/>
+              <a:t> </a:t>
+            </a:r>
+            <a:r>
+              <a:rPr dirty="0" err="1"/>
+              <a:t>cộng</a:t>
+            </a:r>
+            <a:r>
+              <a:rPr dirty="0"/>
+              <a:t> </a:t>
+            </a:r>
+            <a:r>
+              <a:rPr dirty="0" err="1"/>
+              <a:t>đồng</a:t>
+            </a:r>
+            <a:r>
+              <a:rPr dirty="0"/>
+              <a:t> </a:t>
+            </a:r>
+            <a:r>
+              <a:rPr dirty="0" err="1"/>
+              <a:t>nội</a:t>
+            </a:r>
+            <a:r>
+              <a:rPr dirty="0"/>
+              <a:t> </a:t>
+            </a:r>
+            <a:r>
+              <a:rPr dirty="0" err="1"/>
+              <a:t>trợ</a:t>
+            </a:r>
+            <a:r>
+              <a:rPr dirty="0"/>
+              <a:t>.</a:t>
             </a:r>
           </a:p>
         </p:txBody>
@@ -7974,7 +9963,7 @@
 </file>
 
 <file path=ppt/slides/slide16.xml><?xml version="1.0" encoding="utf-8"?>
-<p:sld xmlns:a="http://schemas.openxmlformats.org/drawingml/2006/main" xmlns:p="http://schemas.openxmlformats.org/presentationml/2006/main" xmlns:r="http://schemas.openxmlformats.org/officeDocument/2006/relationships">
+<p:sld xmlns:a="http://schemas.openxmlformats.org/drawingml/2006/main" xmlns:r="http://schemas.openxmlformats.org/officeDocument/2006/relationships" xmlns:p="http://schemas.openxmlformats.org/presentationml/2006/main">
   <p:cSld>
     <p:spTree>
       <p:nvGrpSpPr>
@@ -7982,7 +9971,14 @@
         <p:cNvGrpSpPr/>
         <p:nvPr/>
       </p:nvGrpSpPr>
-      <p:grpSpPr/>
+      <p:grpSpPr>
+        <a:xfrm>
+          <a:off x="0" y="0"/>
+          <a:ext cx="0" cy="0"/>
+          <a:chOff x="0" y="0"/>
+          <a:chExt cx="0" cy="0"/>
+        </a:xfrm>
+      </p:grpSpPr>
       <p:sp>
         <p:nvSpPr>
           <p:cNvPr id="2" name="Rectangle 1"/>
@@ -8023,6 +10019,7 @@
           <a:lstStyle/>
           <a:p>
             <a:pPr algn="ctr"/>
+            <a:endParaRPr/>
           </a:p>
         </p:txBody>
       </p:sp>
@@ -8066,6 +10063,7 @@
           <a:lstStyle/>
           <a:p>
             <a:pPr algn="ctr"/>
+            <a:endParaRPr/>
           </a:p>
         </p:txBody>
       </p:sp>
@@ -8077,8 +10075,8 @@
         </p:nvSpPr>
         <p:spPr>
           <a:xfrm>
-            <a:off x="731520" y="731520"/>
-            <a:ext cx="10728655" cy="2011680"/>
+            <a:off x="612648" y="2898648"/>
+            <a:ext cx="10728655" cy="1056700"/>
           </a:xfrm>
           <a:prstGeom prst="rect">
             <a:avLst/>
@@ -8102,138 +10100,27 @@
               </a:defRPr>
             </a:pPr>
             <a:r>
-              <a:t>XIN CHÂN THÀNH CẢM ƠN HỘI ĐỒNG &amp; QUÝ THẦY CÔ!</a:t>
-            </a:r>
+              <a:rPr dirty="0"/>
+              <a:t>XIN CHÂN THÀNH CẢM ƠN THẦY CÔ!</a:t>
+            </a:r>
+            <a:endParaRPr lang="en-US" dirty="0"/>
           </a:p>
           <a:p>
             <a:pPr algn="ctr">
-              <a:defRPr sz="1400">
-                <a:solidFill>
-                  <a:srgbClr val="93C5FD"/>
-                </a:solidFill>
-              </a:defRPr>
-            </a:pPr>
-            <a:r>
-              <a:t>Nhóm xin gửi lời tri ân sâu sắc tới ThS. Lê Văn Quân đã tận tình hướng dẫn và định hướng chuyên môn cho đồ án Cooking Note.</a:t>
-            </a:r>
-          </a:p>
-        </p:txBody>
-      </p:sp>
-      <p:sp>
-        <p:nvSpPr>
-          <p:cNvPr id="5" name="Rounded Rectangle 4"/>
-          <p:cNvSpPr/>
-          <p:nvPr/>
-        </p:nvSpPr>
-        <p:spPr>
-          <a:xfrm>
-            <a:off x="1645920" y="2926080"/>
-            <a:ext cx="8899855" cy="3291840"/>
-          </a:xfrm>
-          <a:prstGeom prst="roundRect">
-            <a:avLst/>
-          </a:prstGeom>
-          <a:solidFill>
-            <a:srgbClr val="0F2D42"/>
-          </a:solidFill>
-          <a:ln w="19050">
-            <a:solidFill>
-              <a:srgbClr val="3B82F6"/>
-            </a:solidFill>
-          </a:ln>
-        </p:spPr>
-        <p:style>
-          <a:lnRef idx="1">
-            <a:schemeClr val="accent1"/>
-          </a:lnRef>
-          <a:fillRef idx="3">
-            <a:schemeClr val="accent1"/>
-          </a:fillRef>
-          <a:effectRef idx="2">
-            <a:schemeClr val="accent1"/>
-          </a:effectRef>
-          <a:fontRef idx="minor">
-            <a:schemeClr val="lt1"/>
-          </a:fontRef>
-        </p:style>
-        <p:txBody>
-          <a:bodyPr rtlCol="0" anchor="ctr"/>
-          <a:lstStyle/>
-          <a:p>
-            <a:pPr algn="ctr"/>
-          </a:p>
-        </p:txBody>
-      </p:sp>
-      <p:sp>
-        <p:nvSpPr>
-          <p:cNvPr id="6" name="TextBox 5"/>
-          <p:cNvSpPr txBox="1"/>
-          <p:nvPr/>
-        </p:nvSpPr>
-        <p:spPr>
-          <a:xfrm>
-            <a:off x="1920240" y="3108960"/>
-            <a:ext cx="8351215" cy="2926080"/>
-          </a:xfrm>
-          <a:prstGeom prst="rect">
-            <a:avLst/>
-          </a:prstGeom>
-          <a:noFill/>
-        </p:spPr>
-        <p:txBody>
-          <a:bodyPr wrap="square">
-            <a:spAutoFit/>
-          </a:bodyPr>
-          <a:lstStyle/>
-          <a:p>
-            <a:pPr algn="ctr">
-              <a:spcAft>
-                <a:spcPts val="1400"/>
-              </a:spcAft>
-              <a:defRPr sz="2000" b="1">
-                <a:solidFill>
-                  <a:srgbClr val="FBBF24"/>
-                </a:solidFill>
-              </a:defRPr>
-            </a:pPr>
-            <a:r>
-              <a:t>PHIÊN HỎI ĐÁP &amp; BẢO VỆ ĐỒ ÁN (Q&amp;A)</a:t>
-            </a:r>
-          </a:p>
-          <a:p>
-            <a:pPr algn="ctr">
-              <a:spcAft>
-                <a:spcPts val="1400"/>
-              </a:spcAft>
-              <a:defRPr sz="1350">
+              <a:spcAft>
+                <a:spcPts val="800"/>
+              </a:spcAft>
+              <a:defRPr sz="2800" b="1">
                 <a:solidFill>
                   <a:srgbClr val="FFFFFF"/>
                 </a:solidFill>
               </a:defRPr>
             </a:pPr>
             <a:r>
-              <a:t>Nhóm sinh viên thực hiện đã sẵn sàng lắng nghe các câu hỏi, góp ý quý báu và phản biện chuyên môn từ Hội đồng chấm thi.</a:t>
-            </a:r>
-          </a:p>
-          <a:p>
-            <a:pPr algn="ctr">
-              <a:defRPr sz="1200">
-                <a:solidFill>
-                  <a:srgbClr val="E2E8F0"/>
-                </a:solidFill>
-              </a:defRPr>
-            </a:pPr>
-            <a:r>
-              <a:t>✦ Nhóm thực hiện: Vũ Đình Đạo (Nhóm trưởng) • Ngô Gia Bảo • Nguyễn Tiến Dũng • Lê Đức Trọng</a:t>
-            </a:r>
-            <a:br/>
-            <a:r>
-              <a:t>✦ Lớp: TT602-K16LT  |  Khoa Công nghệ Thông tin — CBK</a:t>
-            </a:r>
-            <a:br/>
-            <a:r>
-              <a:t>✦ Mã nguồn &amp; Báo cáo kỹ thuật: Đã kiểm chứng 135/135 Unit Tests tự động vượt qua 100%</a:t>
-            </a:r>
+              <a:rPr lang="en-US" dirty="0"/>
+              <a:t>ĐÃ THEO DÕI BÀI THUYẾT TRÌNH NÀY CỦA CHÚNG EM</a:t>
+            </a:r>
+            <a:endParaRPr dirty="0"/>
           </a:p>
         </p:txBody>
       </p:sp>
@@ -8246,7 +10133,7 @@
 </file>
 
 <file path=ppt/slides/slide2.xml><?xml version="1.0" encoding="utf-8"?>
-<p:sld xmlns:a="http://schemas.openxmlformats.org/drawingml/2006/main" xmlns:p="http://schemas.openxmlformats.org/presentationml/2006/main" xmlns:r="http://schemas.openxmlformats.org/officeDocument/2006/relationships">
+<p:sld xmlns:a="http://schemas.openxmlformats.org/drawingml/2006/main" xmlns:r="http://schemas.openxmlformats.org/officeDocument/2006/relationships" xmlns:p="http://schemas.openxmlformats.org/presentationml/2006/main">
   <p:cSld>
     <p:spTree>
       <p:nvGrpSpPr>
@@ -8254,7 +10141,14 @@
         <p:cNvGrpSpPr/>
         <p:nvPr/>
       </p:nvGrpSpPr>
-      <p:grpSpPr/>
+      <p:grpSpPr>
+        <a:xfrm>
+          <a:off x="0" y="0"/>
+          <a:ext cx="0" cy="0"/>
+          <a:chOff x="0" y="0"/>
+          <a:chExt cx="0" cy="0"/>
+        </a:xfrm>
+      </p:grpSpPr>
       <p:sp>
         <p:nvSpPr>
           <p:cNvPr id="2" name="Rectangle 1"/>
@@ -8295,6 +10189,7 @@
           <a:lstStyle/>
           <a:p>
             <a:pPr algn="ctr"/>
+            <a:endParaRPr/>
           </a:p>
         </p:txBody>
       </p:sp>
@@ -8443,6 +10338,7 @@
           <a:lstStyle/>
           <a:p>
             <a:pPr algn="ctr"/>
+            <a:endParaRPr/>
           </a:p>
         </p:txBody>
       </p:sp>
@@ -8523,6 +10419,7 @@
           <a:lstStyle/>
           <a:p>
             <a:pPr algn="ctr"/>
+            <a:endParaRPr/>
           </a:p>
         </p:txBody>
       </p:sp>
@@ -8567,7 +10464,7 @@
               <a:spcAft>
                 <a:spcPts val="600"/>
               </a:spcAft>
-              <a:defRPr b="1" sz="1350">
+              <a:defRPr sz="1350" b="1">
                 <a:solidFill>
                   <a:srgbClr val="E65100"/>
                 </a:solidFill>
@@ -8681,6 +10578,7 @@
           <a:lstStyle/>
           <a:p>
             <a:pPr algn="ctr"/>
+            <a:endParaRPr/>
           </a:p>
         </p:txBody>
       </p:sp>
@@ -8725,7 +10623,7 @@
               <a:spcAft>
                 <a:spcPts val="600"/>
               </a:spcAft>
-              <a:defRPr b="1" sz="1350">
+              <a:defRPr sz="1350" b="1">
                 <a:solidFill>
                   <a:srgbClr val="0E6655"/>
                 </a:solidFill>
@@ -8806,7 +10704,7 @@
 </file>
 
 <file path=ppt/slides/slide3.xml><?xml version="1.0" encoding="utf-8"?>
-<p:sld xmlns:a="http://schemas.openxmlformats.org/drawingml/2006/main" xmlns:p="http://schemas.openxmlformats.org/presentationml/2006/main" xmlns:r="http://schemas.openxmlformats.org/officeDocument/2006/relationships">
+<p:sld xmlns:a="http://schemas.openxmlformats.org/drawingml/2006/main" xmlns:r="http://schemas.openxmlformats.org/officeDocument/2006/relationships" xmlns:p="http://schemas.openxmlformats.org/presentationml/2006/main">
   <p:cSld>
     <p:spTree>
       <p:nvGrpSpPr>
@@ -8814,7 +10712,14 @@
         <p:cNvGrpSpPr/>
         <p:nvPr/>
       </p:nvGrpSpPr>
-      <p:grpSpPr/>
+      <p:grpSpPr>
+        <a:xfrm>
+          <a:off x="0" y="0"/>
+          <a:ext cx="0" cy="0"/>
+          <a:chOff x="0" y="0"/>
+          <a:chExt cx="0" cy="0"/>
+        </a:xfrm>
+      </p:grpSpPr>
       <p:sp>
         <p:nvSpPr>
           <p:cNvPr id="2" name="Rectangle 1"/>
@@ -8855,6 +10760,7 @@
           <a:lstStyle/>
           <a:p>
             <a:pPr algn="ctr"/>
+            <a:endParaRPr/>
           </a:p>
         </p:txBody>
       </p:sp>
@@ -9003,6 +10909,7 @@
           <a:lstStyle/>
           <a:p>
             <a:pPr algn="ctr"/>
+            <a:endParaRPr/>
           </a:p>
         </p:txBody>
       </p:sp>
@@ -9083,6 +10990,7 @@
           <a:lstStyle/>
           <a:p>
             <a:pPr algn="ctr"/>
+            <a:endParaRPr/>
           </a:p>
         </p:txBody>
       </p:sp>
@@ -9127,7 +11035,7 @@
               <a:spcAft>
                 <a:spcPts val="600"/>
               </a:spcAft>
-              <a:defRPr b="1" sz="1350">
+              <a:defRPr sz="1350" b="1">
                 <a:solidFill>
                   <a:srgbClr val="1B4F72"/>
                 </a:solidFill>
@@ -9241,6 +11149,7 @@
           <a:lstStyle/>
           <a:p>
             <a:pPr algn="ctr"/>
+            <a:endParaRPr/>
           </a:p>
         </p:txBody>
       </p:sp>
@@ -9285,7 +11194,7 @@
               <a:spcAft>
                 <a:spcPts val="600"/>
               </a:spcAft>
-              <a:defRPr b="1" sz="1350">
+              <a:defRPr sz="1350" b="1">
                 <a:solidFill>
                   <a:srgbClr val="1B4F72"/>
                 </a:solidFill>
@@ -9399,6 +11308,7 @@
           <a:lstStyle/>
           <a:p>
             <a:pPr algn="ctr"/>
+            <a:endParaRPr/>
           </a:p>
         </p:txBody>
       </p:sp>
@@ -9443,7 +11353,7 @@
               <a:spcAft>
                 <a:spcPts val="600"/>
               </a:spcAft>
-              <a:defRPr b="1" sz="1350">
+              <a:defRPr sz="1350" b="1">
                 <a:solidFill>
                   <a:srgbClr val="1B4F72"/>
                 </a:solidFill>
@@ -9524,7 +11434,7 @@
 </file>
 
 <file path=ppt/slides/slide4.xml><?xml version="1.0" encoding="utf-8"?>
-<p:sld xmlns:a="http://schemas.openxmlformats.org/drawingml/2006/main" xmlns:p="http://schemas.openxmlformats.org/presentationml/2006/main" xmlns:r="http://schemas.openxmlformats.org/officeDocument/2006/relationships">
+<p:sld xmlns:a="http://schemas.openxmlformats.org/drawingml/2006/main" xmlns:r="http://schemas.openxmlformats.org/officeDocument/2006/relationships" xmlns:p="http://schemas.openxmlformats.org/presentationml/2006/main">
   <p:cSld>
     <p:spTree>
       <p:nvGrpSpPr>
@@ -9532,7 +11442,14 @@
         <p:cNvGrpSpPr/>
         <p:nvPr/>
       </p:nvGrpSpPr>
-      <p:grpSpPr/>
+      <p:grpSpPr>
+        <a:xfrm>
+          <a:off x="0" y="0"/>
+          <a:ext cx="0" cy="0"/>
+          <a:chOff x="0" y="0"/>
+          <a:chExt cx="0" cy="0"/>
+        </a:xfrm>
+      </p:grpSpPr>
       <p:sp>
         <p:nvSpPr>
           <p:cNvPr id="2" name="Rectangle 1"/>
@@ -9573,6 +11490,7 @@
           <a:lstStyle/>
           <a:p>
             <a:pPr algn="ctr"/>
+            <a:endParaRPr/>
           </a:p>
         </p:txBody>
       </p:sp>
@@ -9721,6 +11639,7 @@
           <a:lstStyle/>
           <a:p>
             <a:pPr algn="ctr"/>
+            <a:endParaRPr/>
           </a:p>
         </p:txBody>
       </p:sp>
@@ -9801,6 +11720,7 @@
           <a:lstStyle/>
           <a:p>
             <a:pPr algn="ctr"/>
+            <a:endParaRPr/>
           </a:p>
         </p:txBody>
       </p:sp>
@@ -9845,7 +11765,7 @@
               <a:spcAft>
                 <a:spcPts val="600"/>
               </a:spcAft>
-              <a:defRPr b="1" sz="1350">
+              <a:defRPr sz="1350" b="1">
                 <a:solidFill>
                   <a:srgbClr val="1B4F72"/>
                 </a:solidFill>
@@ -9944,6 +11864,7 @@
           <a:lstStyle/>
           <a:p>
             <a:pPr algn="ctr"/>
+            <a:endParaRPr/>
           </a:p>
         </p:txBody>
       </p:sp>
@@ -9988,7 +11909,7 @@
               <a:spcAft>
                 <a:spcPts val="600"/>
               </a:spcAft>
-              <a:defRPr b="1" sz="1350">
+              <a:defRPr sz="1350" b="1">
                 <a:solidFill>
                   <a:srgbClr val="1B4F72"/>
                 </a:solidFill>
@@ -10087,6 +12008,7 @@
           <a:lstStyle/>
           <a:p>
             <a:pPr algn="ctr"/>
+            <a:endParaRPr/>
           </a:p>
         </p:txBody>
       </p:sp>
@@ -10131,7 +12053,7 @@
               <a:spcAft>
                 <a:spcPts val="600"/>
               </a:spcAft>
-              <a:defRPr b="1" sz="1350">
+              <a:defRPr sz="1350" b="1">
                 <a:solidFill>
                   <a:srgbClr val="1B4F72"/>
                 </a:solidFill>
@@ -10230,6 +12152,7 @@
           <a:lstStyle/>
           <a:p>
             <a:pPr algn="ctr"/>
+            <a:endParaRPr/>
           </a:p>
         </p:txBody>
       </p:sp>
@@ -10274,7 +12197,7 @@
               <a:spcAft>
                 <a:spcPts val="600"/>
               </a:spcAft>
-              <a:defRPr b="1" sz="1350">
+              <a:defRPr sz="1350" b="1">
                 <a:solidFill>
                   <a:srgbClr val="1B4F72"/>
                 </a:solidFill>
@@ -10373,6 +12296,7 @@
           <a:lstStyle/>
           <a:p>
             <a:pPr algn="ctr"/>
+            <a:endParaRPr/>
           </a:p>
         </p:txBody>
       </p:sp>
@@ -10417,7 +12341,7 @@
               <a:spcAft>
                 <a:spcPts val="600"/>
               </a:spcAft>
-              <a:defRPr b="1" sz="1350">
+              <a:defRPr sz="1350" b="1">
                 <a:solidFill>
                   <a:srgbClr val="1B4F72"/>
                 </a:solidFill>
@@ -10483,7 +12407,7 @@
 </file>
 
 <file path=ppt/slides/slide5.xml><?xml version="1.0" encoding="utf-8"?>
-<p:sld xmlns:a="http://schemas.openxmlformats.org/drawingml/2006/main" xmlns:p="http://schemas.openxmlformats.org/presentationml/2006/main" xmlns:r="http://schemas.openxmlformats.org/officeDocument/2006/relationships">
+<p:sld xmlns:a="http://schemas.openxmlformats.org/drawingml/2006/main" xmlns:r="http://schemas.openxmlformats.org/officeDocument/2006/relationships" xmlns:p="http://schemas.openxmlformats.org/presentationml/2006/main">
   <p:cSld>
     <p:spTree>
       <p:nvGrpSpPr>
@@ -10491,7 +12415,14 @@
         <p:cNvGrpSpPr/>
         <p:nvPr/>
       </p:nvGrpSpPr>
-      <p:grpSpPr/>
+      <p:grpSpPr>
+        <a:xfrm>
+          <a:off x="0" y="0"/>
+          <a:ext cx="0" cy="0"/>
+          <a:chOff x="0" y="0"/>
+          <a:chExt cx="0" cy="0"/>
+        </a:xfrm>
+      </p:grpSpPr>
       <p:sp>
         <p:nvSpPr>
           <p:cNvPr id="2" name="Rectangle 1"/>
@@ -10532,6 +12463,7 @@
           <a:lstStyle/>
           <a:p>
             <a:pPr algn="ctr"/>
+            <a:endParaRPr/>
           </a:p>
         </p:txBody>
       </p:sp>
@@ -10680,6 +12612,7 @@
           <a:lstStyle/>
           <a:p>
             <a:pPr algn="ctr"/>
+            <a:endParaRPr/>
           </a:p>
         </p:txBody>
       </p:sp>
@@ -10760,6 +12693,7 @@
           <a:lstStyle/>
           <a:p>
             <a:pPr algn="ctr"/>
+            <a:endParaRPr/>
           </a:p>
         </p:txBody>
       </p:sp>
@@ -10804,7 +12738,7 @@
               <a:spcAft>
                 <a:spcPts val="600"/>
               </a:spcAft>
-              <a:defRPr b="1" sz="1350">
+              <a:defRPr sz="1350" b="1">
                 <a:solidFill>
                   <a:srgbClr val="1B4F72"/>
                 </a:solidFill>
@@ -10918,6 +12852,7 @@
           <a:lstStyle/>
           <a:p>
             <a:pPr algn="ctr"/>
+            <a:endParaRPr/>
           </a:p>
         </p:txBody>
       </p:sp>
@@ -10962,7 +12897,7 @@
               <a:spcAft>
                 <a:spcPts val="600"/>
               </a:spcAft>
-              <a:defRPr b="1" sz="1350">
+              <a:defRPr sz="1350" b="1">
                 <a:solidFill>
                   <a:srgbClr val="0E6655"/>
                 </a:solidFill>
@@ -11043,7 +12978,7 @@
 </file>
 
 <file path=ppt/slides/slide6.xml><?xml version="1.0" encoding="utf-8"?>
-<p:sld xmlns:a="http://schemas.openxmlformats.org/drawingml/2006/main" xmlns:p="http://schemas.openxmlformats.org/presentationml/2006/main" xmlns:r="http://schemas.openxmlformats.org/officeDocument/2006/relationships">
+<p:sld xmlns:a="http://schemas.openxmlformats.org/drawingml/2006/main" xmlns:r="http://schemas.openxmlformats.org/officeDocument/2006/relationships" xmlns:p="http://schemas.openxmlformats.org/presentationml/2006/main">
   <p:cSld>
     <p:spTree>
       <p:nvGrpSpPr>
@@ -11051,7 +12986,14 @@
         <p:cNvGrpSpPr/>
         <p:nvPr/>
       </p:nvGrpSpPr>
-      <p:grpSpPr/>
+      <p:grpSpPr>
+        <a:xfrm>
+          <a:off x="0" y="0"/>
+          <a:ext cx="0" cy="0"/>
+          <a:chOff x="0" y="0"/>
+          <a:chExt cx="0" cy="0"/>
+        </a:xfrm>
+      </p:grpSpPr>
       <p:sp>
         <p:nvSpPr>
           <p:cNvPr id="2" name="Rectangle 1"/>
@@ -11092,6 +13034,7 @@
           <a:lstStyle/>
           <a:p>
             <a:pPr algn="ctr"/>
+            <a:endParaRPr/>
           </a:p>
         </p:txBody>
       </p:sp>
@@ -11240,6 +13183,7 @@
           <a:lstStyle/>
           <a:p>
             <a:pPr algn="ctr"/>
+            <a:endParaRPr/>
           </a:p>
         </p:txBody>
       </p:sp>
@@ -11320,6 +13264,7 @@
           <a:lstStyle/>
           <a:p>
             <a:pPr algn="ctr"/>
+            <a:endParaRPr/>
           </a:p>
         </p:txBody>
       </p:sp>
@@ -11364,7 +13309,7 @@
               <a:spcAft>
                 <a:spcPts val="600"/>
               </a:spcAft>
-              <a:defRPr b="1" sz="1350">
+              <a:defRPr sz="1350" b="1">
                 <a:solidFill>
                   <a:srgbClr val="1B4F72"/>
                 </a:solidFill>
@@ -11493,6 +13438,7 @@
           <a:lstStyle/>
           <a:p>
             <a:pPr algn="ctr"/>
+            <a:endParaRPr/>
           </a:p>
         </p:txBody>
       </p:sp>
@@ -11537,7 +13483,7 @@
               <a:spcAft>
                 <a:spcPts val="600"/>
               </a:spcAft>
-              <a:defRPr b="1" sz="1350">
+              <a:defRPr sz="1350" b="1">
                 <a:solidFill>
                   <a:srgbClr val="1B4F72"/>
                 </a:solidFill>
@@ -11666,6 +13612,7 @@
           <a:lstStyle/>
           <a:p>
             <a:pPr algn="ctr"/>
+            <a:endParaRPr/>
           </a:p>
         </p:txBody>
       </p:sp>
@@ -11692,7 +13639,7 @@
           <a:lstStyle/>
           <a:p>
             <a:pPr>
-              <a:defRPr b="1" sz="1200">
+              <a:defRPr sz="1200" b="1">
                 <a:solidFill>
                   <a:srgbClr val="0E6655"/>
                 </a:solidFill>
@@ -11732,7 +13679,7 @@
 </file>
 
 <file path=ppt/slides/slide7.xml><?xml version="1.0" encoding="utf-8"?>
-<p:sld xmlns:a="http://schemas.openxmlformats.org/drawingml/2006/main" xmlns:p="http://schemas.openxmlformats.org/presentationml/2006/main" xmlns:r="http://schemas.openxmlformats.org/officeDocument/2006/relationships">
+<p:sld xmlns:a="http://schemas.openxmlformats.org/drawingml/2006/main" xmlns:r="http://schemas.openxmlformats.org/officeDocument/2006/relationships" xmlns:p="http://schemas.openxmlformats.org/presentationml/2006/main">
   <p:cSld>
     <p:spTree>
       <p:nvGrpSpPr>
@@ -11740,7 +13687,14 @@
         <p:cNvGrpSpPr/>
         <p:nvPr/>
       </p:nvGrpSpPr>
-      <p:grpSpPr/>
+      <p:grpSpPr>
+        <a:xfrm>
+          <a:off x="0" y="0"/>
+          <a:ext cx="0" cy="0"/>
+          <a:chOff x="0" y="0"/>
+          <a:chExt cx="0" cy="0"/>
+        </a:xfrm>
+      </p:grpSpPr>
       <p:sp>
         <p:nvSpPr>
           <p:cNvPr id="2" name="Rectangle 1"/>
@@ -11781,6 +13735,7 @@
           <a:lstStyle/>
           <a:p>
             <a:pPr algn="ctr"/>
+            <a:endParaRPr/>
           </a:p>
         </p:txBody>
       </p:sp>
@@ -11929,6 +13884,7 @@
           <a:lstStyle/>
           <a:p>
             <a:pPr algn="ctr"/>
+            <a:endParaRPr/>
           </a:p>
         </p:txBody>
       </p:sp>
@@ -12009,6 +13965,7 @@
           <a:lstStyle/>
           <a:p>
             <a:pPr algn="ctr"/>
+            <a:endParaRPr/>
           </a:p>
         </p:txBody>
       </p:sp>
@@ -12053,7 +14010,7 @@
               <a:spcAft>
                 <a:spcPts val="600"/>
               </a:spcAft>
-              <a:defRPr b="1" sz="1350">
+              <a:defRPr sz="1350" b="1">
                 <a:solidFill>
                   <a:srgbClr val="1B4F72"/>
                 </a:solidFill>
@@ -12167,6 +14124,7 @@
           <a:lstStyle/>
           <a:p>
             <a:pPr algn="ctr"/>
+            <a:endParaRPr/>
           </a:p>
         </p:txBody>
       </p:sp>
@@ -12211,7 +14169,7 @@
               <a:spcAft>
                 <a:spcPts val="600"/>
               </a:spcAft>
-              <a:defRPr b="1" sz="1350">
+              <a:defRPr sz="1350" b="1">
                 <a:solidFill>
                   <a:srgbClr val="1B4F72"/>
                 </a:solidFill>
@@ -12325,6 +14283,7 @@
           <a:lstStyle/>
           <a:p>
             <a:pPr algn="ctr"/>
+            <a:endParaRPr/>
           </a:p>
         </p:txBody>
       </p:sp>
@@ -12369,7 +14328,7 @@
               <a:spcAft>
                 <a:spcPts val="600"/>
               </a:spcAft>
-              <a:defRPr b="1" sz="1350">
+              <a:defRPr sz="1350" b="1">
                 <a:solidFill>
                   <a:srgbClr val="1B4F72"/>
                 </a:solidFill>
@@ -12483,6 +14442,7 @@
           <a:lstStyle/>
           <a:p>
             <a:pPr algn="ctr"/>
+            <a:endParaRPr/>
           </a:p>
         </p:txBody>
       </p:sp>
@@ -12509,7 +14469,7 @@
           <a:lstStyle/>
           <a:p>
             <a:pPr>
-              <a:defRPr b="1" sz="1200">
+              <a:defRPr sz="1200" b="1">
                 <a:solidFill>
                   <a:srgbClr val="E65100"/>
                 </a:solidFill>
@@ -12549,7 +14509,7 @@
 </file>
 
 <file path=ppt/slides/slide8.xml><?xml version="1.0" encoding="utf-8"?>
-<p:sld xmlns:a="http://schemas.openxmlformats.org/drawingml/2006/main" xmlns:p="http://schemas.openxmlformats.org/presentationml/2006/main" xmlns:r="http://schemas.openxmlformats.org/officeDocument/2006/relationships">
+<p:sld xmlns:a="http://schemas.openxmlformats.org/drawingml/2006/main" xmlns:r="http://schemas.openxmlformats.org/officeDocument/2006/relationships" xmlns:p="http://schemas.openxmlformats.org/presentationml/2006/main">
   <p:cSld>
     <p:spTree>
       <p:nvGrpSpPr>
@@ -12557,7 +14517,14 @@
         <p:cNvGrpSpPr/>
         <p:nvPr/>
       </p:nvGrpSpPr>
-      <p:grpSpPr/>
+      <p:grpSpPr>
+        <a:xfrm>
+          <a:off x="0" y="0"/>
+          <a:ext cx="0" cy="0"/>
+          <a:chOff x="0" y="0"/>
+          <a:chExt cx="0" cy="0"/>
+        </a:xfrm>
+      </p:grpSpPr>
       <p:sp>
         <p:nvSpPr>
           <p:cNvPr id="2" name="Rectangle 1"/>
@@ -12598,6 +14565,7 @@
           <a:lstStyle/>
           <a:p>
             <a:pPr algn="ctr"/>
+            <a:endParaRPr/>
           </a:p>
         </p:txBody>
       </p:sp>
@@ -12746,6 +14714,7 @@
           <a:lstStyle/>
           <a:p>
             <a:pPr algn="ctr"/>
+            <a:endParaRPr/>
           </a:p>
         </p:txBody>
       </p:sp>
@@ -12826,6 +14795,7 @@
           <a:lstStyle/>
           <a:p>
             <a:pPr algn="ctr"/>
+            <a:endParaRPr/>
           </a:p>
         </p:txBody>
       </p:sp>
@@ -12870,7 +14840,7 @@
               <a:spcAft>
                 <a:spcPts val="600"/>
               </a:spcAft>
-              <a:defRPr b="1" sz="1350">
+              <a:defRPr sz="1350" b="1">
                 <a:solidFill>
                   <a:srgbClr val="1B4F72"/>
                 </a:solidFill>
@@ -12969,6 +14939,7 @@
           <a:lstStyle/>
           <a:p>
             <a:pPr algn="ctr"/>
+            <a:endParaRPr/>
           </a:p>
         </p:txBody>
       </p:sp>
@@ -13013,7 +14984,7 @@
               <a:spcAft>
                 <a:spcPts val="600"/>
               </a:spcAft>
-              <a:defRPr b="1" sz="1350">
+              <a:defRPr sz="1350" b="1">
                 <a:solidFill>
                   <a:srgbClr val="1B4F72"/>
                 </a:solidFill>
@@ -13112,6 +15083,7 @@
           <a:lstStyle/>
           <a:p>
             <a:pPr algn="ctr"/>
+            <a:endParaRPr/>
           </a:p>
         </p:txBody>
       </p:sp>
@@ -13156,7 +15128,7 @@
               <a:spcAft>
                 <a:spcPts val="600"/>
               </a:spcAft>
-              <a:defRPr b="1" sz="1350">
+              <a:defRPr sz="1350" b="1">
                 <a:solidFill>
                   <a:srgbClr val="1B4F72"/>
                 </a:solidFill>
@@ -13255,6 +15227,7 @@
           <a:lstStyle/>
           <a:p>
             <a:pPr algn="ctr"/>
+            <a:endParaRPr/>
           </a:p>
         </p:txBody>
       </p:sp>
@@ -13299,7 +15272,7 @@
               <a:spcAft>
                 <a:spcPts val="600"/>
               </a:spcAft>
-              <a:defRPr b="1" sz="1350">
+              <a:defRPr sz="1350" b="1">
                 <a:solidFill>
                   <a:srgbClr val="1B4F72"/>
                 </a:solidFill>
@@ -13365,7 +15338,7 @@
 </file>
 
 <file path=ppt/slides/slide9.xml><?xml version="1.0" encoding="utf-8"?>
-<p:sld xmlns:a="http://schemas.openxmlformats.org/drawingml/2006/main" xmlns:p="http://schemas.openxmlformats.org/presentationml/2006/main" xmlns:r="http://schemas.openxmlformats.org/officeDocument/2006/relationships">
+<p:sld xmlns:a="http://schemas.openxmlformats.org/drawingml/2006/main" xmlns:r="http://schemas.openxmlformats.org/officeDocument/2006/relationships" xmlns:p="http://schemas.openxmlformats.org/presentationml/2006/main">
   <p:cSld>
     <p:spTree>
       <p:nvGrpSpPr>
@@ -13373,7 +15346,14 @@
         <p:cNvGrpSpPr/>
         <p:nvPr/>
       </p:nvGrpSpPr>
-      <p:grpSpPr/>
+      <p:grpSpPr>
+        <a:xfrm>
+          <a:off x="0" y="0"/>
+          <a:ext cx="0" cy="0"/>
+          <a:chOff x="0" y="0"/>
+          <a:chExt cx="0" cy="0"/>
+        </a:xfrm>
+      </p:grpSpPr>
       <p:sp>
         <p:nvSpPr>
           <p:cNvPr id="2" name="Rectangle 1"/>
@@ -13414,6 +15394,7 @@
           <a:lstStyle/>
           <a:p>
             <a:pPr algn="ctr"/>
+            <a:endParaRPr/>
           </a:p>
         </p:txBody>
       </p:sp>
@@ -13562,6 +15543,7 @@
           <a:lstStyle/>
           <a:p>
             <a:pPr algn="ctr"/>
+            <a:endParaRPr/>
           </a:p>
         </p:txBody>
       </p:sp>
@@ -13642,6 +15624,7 @@
           <a:lstStyle/>
           <a:p>
             <a:pPr algn="ctr"/>
+            <a:endParaRPr/>
           </a:p>
         </p:txBody>
       </p:sp>
@@ -13668,7 +15651,7 @@
           <a:lstStyle/>
           <a:p>
             <a:pPr algn="ctr">
-              <a:defRPr b="1" sz="1050">
+              <a:defRPr sz="1050" b="1">
                 <a:solidFill>
                   <a:srgbClr val="1B4F72"/>
                 </a:solidFill>
@@ -13746,6 +15729,7 @@
           <a:lstStyle/>
           <a:p>
             <a:pPr algn="ctr"/>
+            <a:endParaRPr/>
           </a:p>
         </p:txBody>
       </p:sp>
@@ -13772,7 +15756,7 @@
           <a:lstStyle/>
           <a:p>
             <a:pPr algn="ctr">
-              <a:defRPr b="1" sz="1050">
+              <a:defRPr sz="1050" b="1">
                 <a:solidFill>
                   <a:srgbClr val="1B4F72"/>
                 </a:solidFill>
@@ -13850,6 +15834,7 @@
           <a:lstStyle/>
           <a:p>
             <a:pPr algn="ctr"/>
+            <a:endParaRPr/>
           </a:p>
         </p:txBody>
       </p:sp>
@@ -13894,7 +15879,7 @@
               <a:spcAft>
                 <a:spcPts val="600"/>
               </a:spcAft>
-              <a:defRPr b="1" sz="1350">
+              <a:defRPr sz="1350" b="1">
                 <a:solidFill>
                   <a:srgbClr val="1B4F72"/>
                 </a:solidFill>
@@ -14008,6 +15993,7 @@
           <a:lstStyle/>
           <a:p>
             <a:pPr algn="ctr"/>
+            <a:endParaRPr/>
           </a:p>
         </p:txBody>
       </p:sp>
@@ -14052,7 +16038,7 @@
               <a:spcAft>
                 <a:spcPts val="600"/>
               </a:spcAft>
-              <a:defRPr b="1" sz="1350">
+              <a:defRPr sz="1350" b="1">
                 <a:solidFill>
                   <a:srgbClr val="0E6655"/>
                 </a:solidFill>
